--- a/PPT/Final_PPT/PPT_Final.pptx
+++ b/PPT/Final_PPT/PPT_Final.pptx
@@ -5,18 +5,22 @@
     <p:sldMasterId id="2147483648" r:id="rId1"/>
   </p:sldMasterIdLst>
   <p:notesMasterIdLst>
-    <p:notesMasterId r:id="rId11"/>
+    <p:notesMasterId r:id="rId15"/>
   </p:notesMasterIdLst>
   <p:sldIdLst>
     <p:sldId id="256" r:id="rId2"/>
     <p:sldId id="257" r:id="rId3"/>
     <p:sldId id="268" r:id="rId4"/>
     <p:sldId id="269" r:id="rId5"/>
-    <p:sldId id="276" r:id="rId6"/>
-    <p:sldId id="280" r:id="rId7"/>
-    <p:sldId id="278" r:id="rId8"/>
-    <p:sldId id="279" r:id="rId9"/>
-    <p:sldId id="272" r:id="rId10"/>
+    <p:sldId id="280" r:id="rId6"/>
+    <p:sldId id="278" r:id="rId7"/>
+    <p:sldId id="279" r:id="rId8"/>
+    <p:sldId id="281" r:id="rId9"/>
+    <p:sldId id="283" r:id="rId10"/>
+    <p:sldId id="285" r:id="rId11"/>
+    <p:sldId id="287" r:id="rId12"/>
+    <p:sldId id="276" r:id="rId13"/>
+    <p:sldId id="272" r:id="rId14"/>
   </p:sldIdLst>
   <p:sldSz cx="12192000" cy="6858000"/>
   <p:notesSz cx="6858000" cy="9144000"/>
@@ -205,7 +209,7 @@
           <a:p>
             <a:fld id="{D8606AF6-307D-47B9-ACBB-BC18CBAA4992}" type="datetimeFigureOut">
               <a:rPr lang="zh-CN" altLang="en-US" smtClean="0"/>
-              <a:t>2026/6/3</a:t>
+              <a:t>2026/6/4</a:t>
             </a:fld>
             <a:endParaRPr lang="zh-CN" altLang="en-US"/>
           </a:p>
@@ -563,6 +567,121 @@
 </p:notes>
 </file>
 
+<file path=ppt/notesSlides/notesSlide10.xml><?xml version="1.0" encoding="utf-8"?>
+<p:notes xmlns:a="http://schemas.openxmlformats.org/drawingml/2006/main" xmlns:r="http://schemas.openxmlformats.org/officeDocument/2006/relationships" xmlns:p="http://schemas.openxmlformats.org/presentationml/2006/main">
+  <p:cSld>
+    <p:spTree>
+      <p:nvGrpSpPr>
+        <p:cNvPr id="1" name="">
+          <a:extLst>
+            <a:ext uri="{FF2B5EF4-FFF2-40B4-BE49-F238E27FC236}">
+              <a16:creationId xmlns:a16="http://schemas.microsoft.com/office/drawing/2014/main" id="{FDF8323F-728A-06DB-BFFB-985D833C5C99}"/>
+            </a:ext>
+          </a:extLst>
+        </p:cNvPr>
+        <p:cNvGrpSpPr/>
+        <p:nvPr/>
+      </p:nvGrpSpPr>
+      <p:grpSpPr>
+        <a:xfrm>
+          <a:off x="0" y="0"/>
+          <a:ext cx="0" cy="0"/>
+          <a:chOff x="0" y="0"/>
+          <a:chExt cx="0" cy="0"/>
+        </a:xfrm>
+      </p:grpSpPr>
+      <p:sp>
+        <p:nvSpPr>
+          <p:cNvPr id="2" name="幻灯片图像占位符 1">
+            <a:extLst>
+              <a:ext uri="{FF2B5EF4-FFF2-40B4-BE49-F238E27FC236}">
+                <a16:creationId xmlns:a16="http://schemas.microsoft.com/office/drawing/2014/main" id="{39B66752-C3D5-BCA3-9CBF-BE085C68D2AF}"/>
+              </a:ext>
+            </a:extLst>
+          </p:cNvPr>
+          <p:cNvSpPr>
+            <a:spLocks noGrp="1" noRot="1" noChangeAspect="1"/>
+          </p:cNvSpPr>
+          <p:nvPr>
+            <p:ph type="sldImg"/>
+          </p:nvPr>
+        </p:nvSpPr>
+        <p:spPr/>
+        <p:txBody>
+          <a:bodyPr/>
+          <a:lstStyle/>
+          <a:p>
+            <a:endParaRPr lang="zh-CN" altLang="en-US"/>
+          </a:p>
+        </p:txBody>
+      </p:sp>
+      <p:sp>
+        <p:nvSpPr>
+          <p:cNvPr id="3" name="备注占位符 2">
+            <a:extLst>
+              <a:ext uri="{FF2B5EF4-FFF2-40B4-BE49-F238E27FC236}">
+                <a16:creationId xmlns:a16="http://schemas.microsoft.com/office/drawing/2014/main" id="{4EED8C61-2871-917A-E503-941861DA41B1}"/>
+              </a:ext>
+            </a:extLst>
+          </p:cNvPr>
+          <p:cNvSpPr>
+            <a:spLocks noGrp="1"/>
+          </p:cNvSpPr>
+          <p:nvPr>
+            <p:ph type="body" idx="1"/>
+          </p:nvPr>
+        </p:nvSpPr>
+        <p:spPr/>
+        <p:txBody>
+          <a:bodyPr/>
+          <a:lstStyle/>
+          <a:p>
+            <a:endParaRPr lang="zh-CN" altLang="en-US" dirty="0"/>
+          </a:p>
+        </p:txBody>
+      </p:sp>
+      <p:sp>
+        <p:nvSpPr>
+          <p:cNvPr id="4" name="灯片编号占位符 3">
+            <a:extLst>
+              <a:ext uri="{FF2B5EF4-FFF2-40B4-BE49-F238E27FC236}">
+                <a16:creationId xmlns:a16="http://schemas.microsoft.com/office/drawing/2014/main" id="{6004B6F5-C882-AD48-EF2B-45797DBCA570}"/>
+              </a:ext>
+            </a:extLst>
+          </p:cNvPr>
+          <p:cNvSpPr>
+            <a:spLocks noGrp="1"/>
+          </p:cNvSpPr>
+          <p:nvPr>
+            <p:ph type="sldNum" sz="quarter" idx="5"/>
+          </p:nvPr>
+        </p:nvSpPr>
+        <p:spPr/>
+        <p:txBody>
+          <a:bodyPr/>
+          <a:lstStyle/>
+          <a:p>
+            <a:fld id="{A55E27F9-5A8F-4462-9502-92BCFD996756}" type="slidenum">
+              <a:rPr lang="zh-CN" altLang="en-US" smtClean="0"/>
+              <a:t>12</a:t>
+            </a:fld>
+            <a:endParaRPr lang="zh-CN" altLang="en-US"/>
+          </a:p>
+        </p:txBody>
+      </p:sp>
+    </p:spTree>
+    <p:extLst>
+      <p:ext uri="{BB962C8B-B14F-4D97-AF65-F5344CB8AC3E}">
+        <p14:creationId xmlns:p14="http://schemas.microsoft.com/office/powerpoint/2010/main" val="1078775630"/>
+      </p:ext>
+    </p:extLst>
+  </p:cSld>
+  <p:clrMapOvr>
+    <a:masterClrMapping/>
+  </p:clrMapOvr>
+</p:notes>
+</file>
+
 <file path=ppt/notesSlides/notesSlide2.xml><?xml version="1.0" encoding="utf-8"?>
 <p:notes xmlns:a="http://schemas.openxmlformats.org/drawingml/2006/main" xmlns:r="http://schemas.openxmlformats.org/officeDocument/2006/relationships" xmlns:p="http://schemas.openxmlformats.org/presentationml/2006/main">
   <p:cSld>
@@ -753,121 +872,6 @@
         <p:cNvPr id="1" name="">
           <a:extLst>
             <a:ext uri="{FF2B5EF4-FFF2-40B4-BE49-F238E27FC236}">
-              <a16:creationId xmlns:a16="http://schemas.microsoft.com/office/drawing/2014/main" id="{FDF8323F-728A-06DB-BFFB-985D833C5C99}"/>
-            </a:ext>
-          </a:extLst>
-        </p:cNvPr>
-        <p:cNvGrpSpPr/>
-        <p:nvPr/>
-      </p:nvGrpSpPr>
-      <p:grpSpPr>
-        <a:xfrm>
-          <a:off x="0" y="0"/>
-          <a:ext cx="0" cy="0"/>
-          <a:chOff x="0" y="0"/>
-          <a:chExt cx="0" cy="0"/>
-        </a:xfrm>
-      </p:grpSpPr>
-      <p:sp>
-        <p:nvSpPr>
-          <p:cNvPr id="2" name="幻灯片图像占位符 1">
-            <a:extLst>
-              <a:ext uri="{FF2B5EF4-FFF2-40B4-BE49-F238E27FC236}">
-                <a16:creationId xmlns:a16="http://schemas.microsoft.com/office/drawing/2014/main" id="{39B66752-C3D5-BCA3-9CBF-BE085C68D2AF}"/>
-              </a:ext>
-            </a:extLst>
-          </p:cNvPr>
-          <p:cNvSpPr>
-            <a:spLocks noGrp="1" noRot="1" noChangeAspect="1"/>
-          </p:cNvSpPr>
-          <p:nvPr>
-            <p:ph type="sldImg"/>
-          </p:nvPr>
-        </p:nvSpPr>
-        <p:spPr/>
-        <p:txBody>
-          <a:bodyPr/>
-          <a:lstStyle/>
-          <a:p>
-            <a:endParaRPr lang="zh-CN" altLang="en-US"/>
-          </a:p>
-        </p:txBody>
-      </p:sp>
-      <p:sp>
-        <p:nvSpPr>
-          <p:cNvPr id="3" name="备注占位符 2">
-            <a:extLst>
-              <a:ext uri="{FF2B5EF4-FFF2-40B4-BE49-F238E27FC236}">
-                <a16:creationId xmlns:a16="http://schemas.microsoft.com/office/drawing/2014/main" id="{4EED8C61-2871-917A-E503-941861DA41B1}"/>
-              </a:ext>
-            </a:extLst>
-          </p:cNvPr>
-          <p:cNvSpPr>
-            <a:spLocks noGrp="1"/>
-          </p:cNvSpPr>
-          <p:nvPr>
-            <p:ph type="body" idx="1"/>
-          </p:nvPr>
-        </p:nvSpPr>
-        <p:spPr/>
-        <p:txBody>
-          <a:bodyPr/>
-          <a:lstStyle/>
-          <a:p>
-            <a:endParaRPr lang="zh-CN" altLang="en-US" dirty="0"/>
-          </a:p>
-        </p:txBody>
-      </p:sp>
-      <p:sp>
-        <p:nvSpPr>
-          <p:cNvPr id="4" name="灯片编号占位符 3">
-            <a:extLst>
-              <a:ext uri="{FF2B5EF4-FFF2-40B4-BE49-F238E27FC236}">
-                <a16:creationId xmlns:a16="http://schemas.microsoft.com/office/drawing/2014/main" id="{6004B6F5-C882-AD48-EF2B-45797DBCA570}"/>
-              </a:ext>
-            </a:extLst>
-          </p:cNvPr>
-          <p:cNvSpPr>
-            <a:spLocks noGrp="1"/>
-          </p:cNvSpPr>
-          <p:nvPr>
-            <p:ph type="sldNum" sz="quarter" idx="5"/>
-          </p:nvPr>
-        </p:nvSpPr>
-        <p:spPr/>
-        <p:txBody>
-          <a:bodyPr/>
-          <a:lstStyle/>
-          <a:p>
-            <a:fld id="{A55E27F9-5A8F-4462-9502-92BCFD996756}" type="slidenum">
-              <a:rPr lang="zh-CN" altLang="en-US" smtClean="0"/>
-              <a:t>5</a:t>
-            </a:fld>
-            <a:endParaRPr lang="zh-CN" altLang="en-US"/>
-          </a:p>
-        </p:txBody>
-      </p:sp>
-    </p:spTree>
-    <p:extLst>
-      <p:ext uri="{BB962C8B-B14F-4D97-AF65-F5344CB8AC3E}">
-        <p14:creationId xmlns:p14="http://schemas.microsoft.com/office/powerpoint/2010/main" val="1078775630"/>
-      </p:ext>
-    </p:extLst>
-  </p:cSld>
-  <p:clrMapOvr>
-    <a:masterClrMapping/>
-  </p:clrMapOvr>
-</p:notes>
-</file>
-
-<file path=ppt/notesSlides/notesSlide5.xml><?xml version="1.0" encoding="utf-8"?>
-<p:notes xmlns:a="http://schemas.openxmlformats.org/drawingml/2006/main" xmlns:r="http://schemas.openxmlformats.org/officeDocument/2006/relationships" xmlns:p="http://schemas.openxmlformats.org/presentationml/2006/main">
-  <p:cSld>
-    <p:spTree>
-      <p:nvGrpSpPr>
-        <p:cNvPr id="1" name="">
-          <a:extLst>
-            <a:ext uri="{FF2B5EF4-FFF2-40B4-BE49-F238E27FC236}">
               <a16:creationId xmlns:a16="http://schemas.microsoft.com/office/drawing/2014/main" id="{A83B2A08-25FC-7D85-79FD-40732D91E7DB}"/>
             </a:ext>
           </a:extLst>
@@ -956,7 +960,7 @@
           <a:p>
             <a:fld id="{A55E27F9-5A8F-4462-9502-92BCFD996756}" type="slidenum">
               <a:rPr lang="zh-CN" altLang="en-US" smtClean="0"/>
-              <a:t>6</a:t>
+              <a:t>5</a:t>
             </a:fld>
             <a:endParaRPr lang="zh-CN" altLang="en-US"/>
           </a:p>
@@ -975,7 +979,7 @@
 </p:notes>
 </file>
 
-<file path=ppt/notesSlides/notesSlide6.xml><?xml version="1.0" encoding="utf-8"?>
+<file path=ppt/notesSlides/notesSlide5.xml><?xml version="1.0" encoding="utf-8"?>
 <p:notes xmlns:a="http://schemas.openxmlformats.org/drawingml/2006/main" xmlns:r="http://schemas.openxmlformats.org/officeDocument/2006/relationships" xmlns:p="http://schemas.openxmlformats.org/presentationml/2006/main">
   <p:cSld>
     <p:spTree>
@@ -1071,7 +1075,7 @@
           <a:p>
             <a:fld id="{A55E27F9-5A8F-4462-9502-92BCFD996756}" type="slidenum">
               <a:rPr lang="zh-CN" altLang="en-US" smtClean="0"/>
-              <a:t>7</a:t>
+              <a:t>6</a:t>
             </a:fld>
             <a:endParaRPr lang="zh-CN" altLang="en-US"/>
           </a:p>
@@ -1090,7 +1094,7 @@
 </p:notes>
 </file>
 
-<file path=ppt/notesSlides/notesSlide7.xml><?xml version="1.0" encoding="utf-8"?>
+<file path=ppt/notesSlides/notesSlide6.xml><?xml version="1.0" encoding="utf-8"?>
 <p:notes xmlns:a="http://schemas.openxmlformats.org/drawingml/2006/main" xmlns:r="http://schemas.openxmlformats.org/officeDocument/2006/relationships" xmlns:p="http://schemas.openxmlformats.org/presentationml/2006/main">
   <p:cSld>
     <p:spTree>
@@ -1186,7 +1190,7 @@
           <a:p>
             <a:fld id="{A55E27F9-5A8F-4462-9502-92BCFD996756}" type="slidenum">
               <a:rPr lang="zh-CN" altLang="en-US" smtClean="0"/>
-              <a:t>8</a:t>
+              <a:t>7</a:t>
             </a:fld>
             <a:endParaRPr lang="zh-CN" altLang="en-US"/>
           </a:p>
@@ -1196,6 +1200,351 @@
     <p:extLst>
       <p:ext uri="{BB962C8B-B14F-4D97-AF65-F5344CB8AC3E}">
         <p14:creationId xmlns:p14="http://schemas.microsoft.com/office/powerpoint/2010/main" val="1293261095"/>
+      </p:ext>
+    </p:extLst>
+  </p:cSld>
+  <p:clrMapOvr>
+    <a:masterClrMapping/>
+  </p:clrMapOvr>
+</p:notes>
+</file>
+
+<file path=ppt/notesSlides/notesSlide7.xml><?xml version="1.0" encoding="utf-8"?>
+<p:notes xmlns:a="http://schemas.openxmlformats.org/drawingml/2006/main" xmlns:r="http://schemas.openxmlformats.org/officeDocument/2006/relationships" xmlns:p="http://schemas.openxmlformats.org/presentationml/2006/main">
+  <p:cSld>
+    <p:spTree>
+      <p:nvGrpSpPr>
+        <p:cNvPr id="1" name="">
+          <a:extLst>
+            <a:ext uri="{FF2B5EF4-FFF2-40B4-BE49-F238E27FC236}">
+              <a16:creationId xmlns:a16="http://schemas.microsoft.com/office/drawing/2014/main" id="{0D2741AE-459D-E154-68C2-412DA569981E}"/>
+            </a:ext>
+          </a:extLst>
+        </p:cNvPr>
+        <p:cNvGrpSpPr/>
+        <p:nvPr/>
+      </p:nvGrpSpPr>
+      <p:grpSpPr>
+        <a:xfrm>
+          <a:off x="0" y="0"/>
+          <a:ext cx="0" cy="0"/>
+          <a:chOff x="0" y="0"/>
+          <a:chExt cx="0" cy="0"/>
+        </a:xfrm>
+      </p:grpSpPr>
+      <p:sp>
+        <p:nvSpPr>
+          <p:cNvPr id="2" name="幻灯片图像占位符 1">
+            <a:extLst>
+              <a:ext uri="{FF2B5EF4-FFF2-40B4-BE49-F238E27FC236}">
+                <a16:creationId xmlns:a16="http://schemas.microsoft.com/office/drawing/2014/main" id="{FA22CE55-1D82-A414-E62C-4A957C272378}"/>
+              </a:ext>
+            </a:extLst>
+          </p:cNvPr>
+          <p:cNvSpPr>
+            <a:spLocks noGrp="1" noRot="1" noChangeAspect="1"/>
+          </p:cNvSpPr>
+          <p:nvPr>
+            <p:ph type="sldImg"/>
+          </p:nvPr>
+        </p:nvSpPr>
+        <p:spPr/>
+        <p:txBody>
+          <a:bodyPr/>
+          <a:lstStyle/>
+          <a:p>
+            <a:endParaRPr lang="zh-CN" altLang="en-US"/>
+          </a:p>
+        </p:txBody>
+      </p:sp>
+      <p:sp>
+        <p:nvSpPr>
+          <p:cNvPr id="3" name="备注占位符 2">
+            <a:extLst>
+              <a:ext uri="{FF2B5EF4-FFF2-40B4-BE49-F238E27FC236}">
+                <a16:creationId xmlns:a16="http://schemas.microsoft.com/office/drawing/2014/main" id="{234326B7-7063-5F69-7B0D-1C2E1098AEA1}"/>
+              </a:ext>
+            </a:extLst>
+          </p:cNvPr>
+          <p:cNvSpPr>
+            <a:spLocks noGrp="1"/>
+          </p:cNvSpPr>
+          <p:nvPr>
+            <p:ph type="body" idx="1"/>
+          </p:nvPr>
+        </p:nvSpPr>
+        <p:spPr/>
+        <p:txBody>
+          <a:bodyPr/>
+          <a:lstStyle/>
+          <a:p>
+            <a:endParaRPr lang="zh-CN" altLang="en-US" dirty="0"/>
+          </a:p>
+        </p:txBody>
+      </p:sp>
+      <p:sp>
+        <p:nvSpPr>
+          <p:cNvPr id="4" name="灯片编号占位符 3">
+            <a:extLst>
+              <a:ext uri="{FF2B5EF4-FFF2-40B4-BE49-F238E27FC236}">
+                <a16:creationId xmlns:a16="http://schemas.microsoft.com/office/drawing/2014/main" id="{FA92C47E-BD3D-3970-732A-403CF64143E2}"/>
+              </a:ext>
+            </a:extLst>
+          </p:cNvPr>
+          <p:cNvSpPr>
+            <a:spLocks noGrp="1"/>
+          </p:cNvSpPr>
+          <p:nvPr>
+            <p:ph type="sldNum" sz="quarter" idx="5"/>
+          </p:nvPr>
+        </p:nvSpPr>
+        <p:spPr/>
+        <p:txBody>
+          <a:bodyPr/>
+          <a:lstStyle/>
+          <a:p>
+            <a:fld id="{A55E27F9-5A8F-4462-9502-92BCFD996756}" type="slidenum">
+              <a:rPr lang="zh-CN" altLang="en-US" smtClean="0"/>
+              <a:t>9</a:t>
+            </a:fld>
+            <a:endParaRPr lang="zh-CN" altLang="en-US"/>
+          </a:p>
+        </p:txBody>
+      </p:sp>
+    </p:spTree>
+    <p:extLst>
+      <p:ext uri="{BB962C8B-B14F-4D97-AF65-F5344CB8AC3E}">
+        <p14:creationId xmlns:p14="http://schemas.microsoft.com/office/powerpoint/2010/main" val="271486721"/>
+      </p:ext>
+    </p:extLst>
+  </p:cSld>
+  <p:clrMapOvr>
+    <a:masterClrMapping/>
+  </p:clrMapOvr>
+</p:notes>
+</file>
+
+<file path=ppt/notesSlides/notesSlide8.xml><?xml version="1.0" encoding="utf-8"?>
+<p:notes xmlns:a="http://schemas.openxmlformats.org/drawingml/2006/main" xmlns:r="http://schemas.openxmlformats.org/officeDocument/2006/relationships" xmlns:p="http://schemas.openxmlformats.org/presentationml/2006/main">
+  <p:cSld>
+    <p:spTree>
+      <p:nvGrpSpPr>
+        <p:cNvPr id="1" name="">
+          <a:extLst>
+            <a:ext uri="{FF2B5EF4-FFF2-40B4-BE49-F238E27FC236}">
+              <a16:creationId xmlns:a16="http://schemas.microsoft.com/office/drawing/2014/main" id="{7AC8CFF4-87DE-CD63-56A8-FCC7BD2914B2}"/>
+            </a:ext>
+          </a:extLst>
+        </p:cNvPr>
+        <p:cNvGrpSpPr/>
+        <p:nvPr/>
+      </p:nvGrpSpPr>
+      <p:grpSpPr>
+        <a:xfrm>
+          <a:off x="0" y="0"/>
+          <a:ext cx="0" cy="0"/>
+          <a:chOff x="0" y="0"/>
+          <a:chExt cx="0" cy="0"/>
+        </a:xfrm>
+      </p:grpSpPr>
+      <p:sp>
+        <p:nvSpPr>
+          <p:cNvPr id="2" name="幻灯片图像占位符 1">
+            <a:extLst>
+              <a:ext uri="{FF2B5EF4-FFF2-40B4-BE49-F238E27FC236}">
+                <a16:creationId xmlns:a16="http://schemas.microsoft.com/office/drawing/2014/main" id="{958F587E-19C5-6C96-3417-9BB3A9FE71D9}"/>
+              </a:ext>
+            </a:extLst>
+          </p:cNvPr>
+          <p:cNvSpPr>
+            <a:spLocks noGrp="1" noRot="1" noChangeAspect="1"/>
+          </p:cNvSpPr>
+          <p:nvPr>
+            <p:ph type="sldImg"/>
+          </p:nvPr>
+        </p:nvSpPr>
+        <p:spPr/>
+        <p:txBody>
+          <a:bodyPr/>
+          <a:lstStyle/>
+          <a:p>
+            <a:endParaRPr lang="zh-CN" altLang="en-US"/>
+          </a:p>
+        </p:txBody>
+      </p:sp>
+      <p:sp>
+        <p:nvSpPr>
+          <p:cNvPr id="3" name="备注占位符 2">
+            <a:extLst>
+              <a:ext uri="{FF2B5EF4-FFF2-40B4-BE49-F238E27FC236}">
+                <a16:creationId xmlns:a16="http://schemas.microsoft.com/office/drawing/2014/main" id="{4035A230-E658-4A73-0211-259FC352D350}"/>
+              </a:ext>
+            </a:extLst>
+          </p:cNvPr>
+          <p:cNvSpPr>
+            <a:spLocks noGrp="1"/>
+          </p:cNvSpPr>
+          <p:nvPr>
+            <p:ph type="body" idx="1"/>
+          </p:nvPr>
+        </p:nvSpPr>
+        <p:spPr/>
+        <p:txBody>
+          <a:bodyPr/>
+          <a:lstStyle/>
+          <a:p>
+            <a:endParaRPr lang="zh-CN" altLang="en-US" dirty="0"/>
+          </a:p>
+        </p:txBody>
+      </p:sp>
+      <p:sp>
+        <p:nvSpPr>
+          <p:cNvPr id="4" name="灯片编号占位符 3">
+            <a:extLst>
+              <a:ext uri="{FF2B5EF4-FFF2-40B4-BE49-F238E27FC236}">
+                <a16:creationId xmlns:a16="http://schemas.microsoft.com/office/drawing/2014/main" id="{C7FF0AAA-8AB1-75B4-FF92-CC5ADBEA7459}"/>
+              </a:ext>
+            </a:extLst>
+          </p:cNvPr>
+          <p:cNvSpPr>
+            <a:spLocks noGrp="1"/>
+          </p:cNvSpPr>
+          <p:nvPr>
+            <p:ph type="sldNum" sz="quarter" idx="5"/>
+          </p:nvPr>
+        </p:nvSpPr>
+        <p:spPr/>
+        <p:txBody>
+          <a:bodyPr/>
+          <a:lstStyle/>
+          <a:p>
+            <a:fld id="{A55E27F9-5A8F-4462-9502-92BCFD996756}" type="slidenum">
+              <a:rPr lang="zh-CN" altLang="en-US" smtClean="0"/>
+              <a:t>10</a:t>
+            </a:fld>
+            <a:endParaRPr lang="zh-CN" altLang="en-US"/>
+          </a:p>
+        </p:txBody>
+      </p:sp>
+    </p:spTree>
+    <p:extLst>
+      <p:ext uri="{BB962C8B-B14F-4D97-AF65-F5344CB8AC3E}">
+        <p14:creationId xmlns:p14="http://schemas.microsoft.com/office/powerpoint/2010/main" val="2029431187"/>
+      </p:ext>
+    </p:extLst>
+  </p:cSld>
+  <p:clrMapOvr>
+    <a:masterClrMapping/>
+  </p:clrMapOvr>
+</p:notes>
+</file>
+
+<file path=ppt/notesSlides/notesSlide9.xml><?xml version="1.0" encoding="utf-8"?>
+<p:notes xmlns:a="http://schemas.openxmlformats.org/drawingml/2006/main" xmlns:r="http://schemas.openxmlformats.org/officeDocument/2006/relationships" xmlns:p="http://schemas.openxmlformats.org/presentationml/2006/main">
+  <p:cSld>
+    <p:spTree>
+      <p:nvGrpSpPr>
+        <p:cNvPr id="1" name="">
+          <a:extLst>
+            <a:ext uri="{FF2B5EF4-FFF2-40B4-BE49-F238E27FC236}">
+              <a16:creationId xmlns:a16="http://schemas.microsoft.com/office/drawing/2014/main" id="{835AEEA9-344D-E714-2960-C5F826642C6D}"/>
+            </a:ext>
+          </a:extLst>
+        </p:cNvPr>
+        <p:cNvGrpSpPr/>
+        <p:nvPr/>
+      </p:nvGrpSpPr>
+      <p:grpSpPr>
+        <a:xfrm>
+          <a:off x="0" y="0"/>
+          <a:ext cx="0" cy="0"/>
+          <a:chOff x="0" y="0"/>
+          <a:chExt cx="0" cy="0"/>
+        </a:xfrm>
+      </p:grpSpPr>
+      <p:sp>
+        <p:nvSpPr>
+          <p:cNvPr id="2" name="幻灯片图像占位符 1">
+            <a:extLst>
+              <a:ext uri="{FF2B5EF4-FFF2-40B4-BE49-F238E27FC236}">
+                <a16:creationId xmlns:a16="http://schemas.microsoft.com/office/drawing/2014/main" id="{3468CBE3-2DA7-3E65-D610-05CC253DF2D7}"/>
+              </a:ext>
+            </a:extLst>
+          </p:cNvPr>
+          <p:cNvSpPr>
+            <a:spLocks noGrp="1" noRot="1" noChangeAspect="1"/>
+          </p:cNvSpPr>
+          <p:nvPr>
+            <p:ph type="sldImg"/>
+          </p:nvPr>
+        </p:nvSpPr>
+        <p:spPr/>
+        <p:txBody>
+          <a:bodyPr/>
+          <a:lstStyle/>
+          <a:p>
+            <a:endParaRPr lang="zh-CN" altLang="en-US"/>
+          </a:p>
+        </p:txBody>
+      </p:sp>
+      <p:sp>
+        <p:nvSpPr>
+          <p:cNvPr id="3" name="备注占位符 2">
+            <a:extLst>
+              <a:ext uri="{FF2B5EF4-FFF2-40B4-BE49-F238E27FC236}">
+                <a16:creationId xmlns:a16="http://schemas.microsoft.com/office/drawing/2014/main" id="{13C5A4BB-E66C-E49D-8490-69F713662925}"/>
+              </a:ext>
+            </a:extLst>
+          </p:cNvPr>
+          <p:cNvSpPr>
+            <a:spLocks noGrp="1"/>
+          </p:cNvSpPr>
+          <p:nvPr>
+            <p:ph type="body" idx="1"/>
+          </p:nvPr>
+        </p:nvSpPr>
+        <p:spPr/>
+        <p:txBody>
+          <a:bodyPr/>
+          <a:lstStyle/>
+          <a:p>
+            <a:endParaRPr lang="zh-CN" altLang="en-US" dirty="0"/>
+          </a:p>
+        </p:txBody>
+      </p:sp>
+      <p:sp>
+        <p:nvSpPr>
+          <p:cNvPr id="4" name="灯片编号占位符 3">
+            <a:extLst>
+              <a:ext uri="{FF2B5EF4-FFF2-40B4-BE49-F238E27FC236}">
+                <a16:creationId xmlns:a16="http://schemas.microsoft.com/office/drawing/2014/main" id="{7E90BC9D-F1E7-BA31-52D3-AD85268481EB}"/>
+              </a:ext>
+            </a:extLst>
+          </p:cNvPr>
+          <p:cNvSpPr>
+            <a:spLocks noGrp="1"/>
+          </p:cNvSpPr>
+          <p:nvPr>
+            <p:ph type="sldNum" sz="quarter" idx="5"/>
+          </p:nvPr>
+        </p:nvSpPr>
+        <p:spPr/>
+        <p:txBody>
+          <a:bodyPr/>
+          <a:lstStyle/>
+          <a:p>
+            <a:fld id="{A55E27F9-5A8F-4462-9502-92BCFD996756}" type="slidenum">
+              <a:rPr lang="zh-CN" altLang="en-US" smtClean="0"/>
+              <a:t>11</a:t>
+            </a:fld>
+            <a:endParaRPr lang="zh-CN" altLang="en-US"/>
+          </a:p>
+        </p:txBody>
+      </p:sp>
+    </p:spTree>
+    <p:extLst>
+      <p:ext uri="{BB962C8B-B14F-4D97-AF65-F5344CB8AC3E}">
+        <p14:creationId xmlns:p14="http://schemas.microsoft.com/office/powerpoint/2010/main" val="878948514"/>
       </p:ext>
     </p:extLst>
   </p:cSld>
@@ -1352,7 +1701,7 @@
           <a:p>
             <a:fld id="{02EAEE67-AEBB-4C3E-8606-66E0CCE330BC}" type="datetime1">
               <a:rPr lang="zh-CN" altLang="en-US" smtClean="0"/>
-              <a:t>2026/6/3</a:t>
+              <a:t>2026/6/4</a:t>
             </a:fld>
             <a:endParaRPr lang="zh-CN" altLang="en-US"/>
           </a:p>
@@ -1550,7 +1899,7 @@
           <a:p>
             <a:fld id="{E65A1467-0EF3-4859-99F5-7C80340788F3}" type="datetime1">
               <a:rPr lang="zh-CN" altLang="en-US" smtClean="0"/>
-              <a:t>2026/6/3</a:t>
+              <a:t>2026/6/4</a:t>
             </a:fld>
             <a:endParaRPr lang="zh-CN" altLang="en-US"/>
           </a:p>
@@ -1758,7 +2107,7 @@
           <a:p>
             <a:fld id="{39B8481D-5FEA-402B-A96F-686498436F15}" type="datetime1">
               <a:rPr lang="zh-CN" altLang="en-US" smtClean="0"/>
-              <a:t>2026/6/3</a:t>
+              <a:t>2026/6/4</a:t>
             </a:fld>
             <a:endParaRPr lang="zh-CN" altLang="en-US"/>
           </a:p>
@@ -1956,7 +2305,7 @@
           <a:p>
             <a:fld id="{9784148F-81AF-4FEA-B300-8F5D116B0065}" type="datetime1">
               <a:rPr lang="zh-CN" altLang="en-US" smtClean="0"/>
-              <a:t>2026/6/3</a:t>
+              <a:t>2026/6/4</a:t>
             </a:fld>
             <a:endParaRPr lang="zh-CN" altLang="en-US"/>
           </a:p>
@@ -2231,7 +2580,7 @@
           <a:p>
             <a:fld id="{21F78377-656F-4268-940C-8B965F82C008}" type="datetime1">
               <a:rPr lang="zh-CN" altLang="en-US" smtClean="0"/>
-              <a:t>2026/6/3</a:t>
+              <a:t>2026/6/4</a:t>
             </a:fld>
             <a:endParaRPr lang="zh-CN" altLang="en-US"/>
           </a:p>
@@ -2496,7 +2845,7 @@
           <a:p>
             <a:fld id="{5FBD275D-C9BD-4214-AE2B-8B828D17E4A1}" type="datetime1">
               <a:rPr lang="zh-CN" altLang="en-US" smtClean="0"/>
-              <a:t>2026/6/3</a:t>
+              <a:t>2026/6/4</a:t>
             </a:fld>
             <a:endParaRPr lang="zh-CN" altLang="en-US"/>
           </a:p>
@@ -2908,7 +3257,7 @@
           <a:p>
             <a:fld id="{F838F12B-B1E4-4232-A921-5CD9E8C7CE78}" type="datetime1">
               <a:rPr lang="zh-CN" altLang="en-US" smtClean="0"/>
-              <a:t>2026/6/3</a:t>
+              <a:t>2026/6/4</a:t>
             </a:fld>
             <a:endParaRPr lang="zh-CN" altLang="en-US"/>
           </a:p>
@@ -3049,7 +3398,7 @@
           <a:p>
             <a:fld id="{751519A9-016F-488A-9E38-2AAA80112BE2}" type="datetime1">
               <a:rPr lang="zh-CN" altLang="en-US" smtClean="0"/>
-              <a:t>2026/6/3</a:t>
+              <a:t>2026/6/4</a:t>
             </a:fld>
             <a:endParaRPr lang="zh-CN" altLang="en-US"/>
           </a:p>
@@ -3162,7 +3511,7 @@
           <a:p>
             <a:fld id="{37820205-1646-4F20-9432-DDA11DDF4BD6}" type="datetime1">
               <a:rPr lang="zh-CN" altLang="en-US" smtClean="0"/>
-              <a:t>2026/6/3</a:t>
+              <a:t>2026/6/4</a:t>
             </a:fld>
             <a:endParaRPr lang="zh-CN" altLang="en-US"/>
           </a:p>
@@ -3473,7 +3822,7 @@
           <a:p>
             <a:fld id="{880CA799-B4BA-4704-9B14-101D0629E8F1}" type="datetime1">
               <a:rPr lang="zh-CN" altLang="en-US" smtClean="0"/>
-              <a:t>2026/6/3</a:t>
+              <a:t>2026/6/4</a:t>
             </a:fld>
             <a:endParaRPr lang="zh-CN" altLang="en-US"/>
           </a:p>
@@ -3761,7 +4110,7 @@
           <a:p>
             <a:fld id="{8EB1D122-DFBC-43DE-ADA8-9D106F022C48}" type="datetime1">
               <a:rPr lang="zh-CN" altLang="en-US" smtClean="0"/>
-              <a:t>2026/6/3</a:t>
+              <a:t>2026/6/4</a:t>
             </a:fld>
             <a:endParaRPr lang="zh-CN" altLang="en-US"/>
           </a:p>
@@ -4002,7 +4351,7 @@
           <a:p>
             <a:fld id="{6C2047AB-8171-468A-A15B-570A037DD4A0}" type="datetime1">
               <a:rPr lang="zh-CN" altLang="en-US" smtClean="0"/>
-              <a:t>2026/6/3</a:t>
+              <a:t>2026/6/4</a:t>
             </a:fld>
             <a:endParaRPr lang="zh-CN" altLang="en-US"/>
           </a:p>
@@ -4450,15 +4799,7 @@
           <a:p>
             <a:r>
               <a:rPr lang="en-US" altLang="zh-CN" sz="4000" b="1" dirty="0"/>
-              <a:t>CSI-</a:t>
-            </a:r>
-            <a:r>
-              <a:rPr lang="en-US" altLang="zh-CN" sz="4000" b="1" dirty="0" err="1"/>
-              <a:t>Fesedback</a:t>
-            </a:r>
-            <a:r>
-              <a:rPr lang="en-US" altLang="zh-CN" sz="4000" b="1" dirty="0"/>
-              <a:t>-Driven Link Adaptation in 5G NR Downlink MIMO: A Link Level Simulation Study</a:t>
+              <a:t>CSI-Feedback-Driven Link Adaptation in 5G NR Downlink MIMO: A Link Level Simulation Study</a:t>
             </a:r>
             <a:endParaRPr lang="zh-CN" altLang="en-US" b="1" dirty="0"/>
           </a:p>
@@ -4610,399 +4951,7 @@
 </p:sld>
 </file>
 
-<file path=ppt/slides/slide2.xml><?xml version="1.0" encoding="utf-8"?>
-<p:sld xmlns:a="http://schemas.openxmlformats.org/drawingml/2006/main" xmlns:r="http://schemas.openxmlformats.org/officeDocument/2006/relationships" xmlns:p="http://schemas.openxmlformats.org/presentationml/2006/main">
-  <p:cSld>
-    <p:spTree>
-      <p:nvGrpSpPr>
-        <p:cNvPr id="1" name=""/>
-        <p:cNvGrpSpPr/>
-        <p:nvPr/>
-      </p:nvGrpSpPr>
-      <p:grpSpPr>
-        <a:xfrm>
-          <a:off x="0" y="0"/>
-          <a:ext cx="0" cy="0"/>
-          <a:chOff x="0" y="0"/>
-          <a:chExt cx="0" cy="0"/>
-        </a:xfrm>
-      </p:grpSpPr>
-      <p:sp>
-        <p:nvSpPr>
-          <p:cNvPr id="2" name="标题 1">
-            <a:extLst>
-              <a:ext uri="{FF2B5EF4-FFF2-40B4-BE49-F238E27FC236}">
-                <a16:creationId xmlns:a16="http://schemas.microsoft.com/office/drawing/2014/main" id="{3C1FF6A1-5B32-7043-B7C3-2D8B86A9C5FE}"/>
-              </a:ext>
-            </a:extLst>
-          </p:cNvPr>
-          <p:cNvSpPr>
-            <a:spLocks noGrp="1"/>
-          </p:cNvSpPr>
-          <p:nvPr>
-            <p:ph type="title"/>
-          </p:nvPr>
-        </p:nvSpPr>
-        <p:spPr>
-          <a:xfrm>
-            <a:off x="554865" y="377422"/>
-            <a:ext cx="11082270" cy="607230"/>
-          </a:xfrm>
-        </p:spPr>
-        <p:txBody>
-          <a:bodyPr>
-            <a:normAutofit/>
-          </a:bodyPr>
-          <a:lstStyle/>
-          <a:p>
-            <a:r>
-              <a:rPr lang="en-US" altLang="zh-CN" sz="3200" dirty="0">
-                <a:latin typeface="Arial" panose="020B0604020202020204" pitchFamily="34" charset="0"/>
-                <a:cs typeface="Arial" panose="020B0604020202020204" pitchFamily="34" charset="0"/>
-              </a:rPr>
-              <a:t>Project Objectives</a:t>
-            </a:r>
-            <a:endParaRPr lang="zh-CN" altLang="en-US" sz="3200" dirty="0">
-              <a:latin typeface="Arial" panose="020B0604020202020204" pitchFamily="34" charset="0"/>
-              <a:cs typeface="Arial" panose="020B0604020202020204" pitchFamily="34" charset="0"/>
-            </a:endParaRPr>
-          </a:p>
-        </p:txBody>
-      </p:sp>
-      <p:sp>
-        <p:nvSpPr>
-          <p:cNvPr id="3" name="内容占位符 2">
-            <a:extLst>
-              <a:ext uri="{FF2B5EF4-FFF2-40B4-BE49-F238E27FC236}">
-                <a16:creationId xmlns:a16="http://schemas.microsoft.com/office/drawing/2014/main" id="{88C4747E-D289-1B3A-35E7-C671D8866B08}"/>
-              </a:ext>
-            </a:extLst>
-          </p:cNvPr>
-          <p:cNvSpPr>
-            <a:spLocks noGrp="1"/>
-          </p:cNvSpPr>
-          <p:nvPr>
-            <p:ph idx="1"/>
-          </p:nvPr>
-        </p:nvSpPr>
-        <p:spPr>
-          <a:xfrm>
-            <a:off x="554865" y="1146220"/>
-            <a:ext cx="11082270" cy="5030743"/>
-          </a:xfrm>
-        </p:spPr>
-        <p:txBody>
-          <a:bodyPr>
-            <a:normAutofit/>
-          </a:bodyPr>
-          <a:lstStyle/>
-          <a:p>
-            <a:pPr>
-              <a:lnSpc>
-                <a:spcPct val="150000"/>
-              </a:lnSpc>
-            </a:pPr>
-            <a:r>
-              <a:rPr lang="en-US" altLang="zh-CN" sz="1800" dirty="0">
-                <a:latin typeface="Arial" panose="020B0604020202020204" pitchFamily="34" charset="0"/>
-                <a:cs typeface="Arial" panose="020B0604020202020204" pitchFamily="34" charset="0"/>
-              </a:rPr>
-              <a:t>Construct a </a:t>
-            </a:r>
-            <a:r>
-              <a:rPr lang="en-US" altLang="zh-CN" sz="1800" dirty="0">
-                <a:solidFill>
-                  <a:srgbClr val="0070C0"/>
-                </a:solidFill>
-                <a:latin typeface="Arial" panose="020B0604020202020204" pitchFamily="34" charset="0"/>
-                <a:cs typeface="Arial" panose="020B0604020202020204" pitchFamily="34" charset="0"/>
-              </a:rPr>
-              <a:t>3GPP-aligned</a:t>
-            </a:r>
-            <a:r>
-              <a:rPr lang="en-US" altLang="zh-CN" sz="1800" dirty="0">
-                <a:latin typeface="Arial" panose="020B0604020202020204" pitchFamily="34" charset="0"/>
-                <a:cs typeface="Arial" panose="020B0604020202020204" pitchFamily="34" charset="0"/>
-              </a:rPr>
-              <a:t> MATLAB 5G NR downlink MIMO link-level simulation model</a:t>
-            </a:r>
-          </a:p>
-          <a:p>
-            <a:pPr>
-              <a:lnSpc>
-                <a:spcPct val="150000"/>
-              </a:lnSpc>
-            </a:pPr>
-            <a:r>
-              <a:rPr lang="en-US" altLang="zh-CN" sz="1800" dirty="0">
-                <a:latin typeface="Arial" panose="020B0604020202020204" pitchFamily="34" charset="0"/>
-                <a:cs typeface="Arial" panose="020B0604020202020204" pitchFamily="34" charset="0"/>
-              </a:rPr>
-              <a:t>Study how </a:t>
-            </a:r>
-            <a:r>
-              <a:rPr lang="en-US" altLang="zh-CN" sz="1800" dirty="0">
-                <a:solidFill>
-                  <a:srgbClr val="0070C0"/>
-                </a:solidFill>
-                <a:latin typeface="Arial" panose="020B0604020202020204" pitchFamily="34" charset="0"/>
-                <a:cs typeface="Arial" panose="020B0604020202020204" pitchFamily="34" charset="0"/>
-              </a:rPr>
-              <a:t>CSI feedback </a:t>
-            </a:r>
-            <a:r>
-              <a:rPr lang="en-US" altLang="zh-CN" sz="1800" dirty="0">
-                <a:latin typeface="Arial" panose="020B0604020202020204" pitchFamily="34" charset="0"/>
-                <a:cs typeface="Arial" panose="020B0604020202020204" pitchFamily="34" charset="0"/>
-              </a:rPr>
-              <a:t>affects </a:t>
-            </a:r>
-            <a:r>
-              <a:rPr lang="en-US" altLang="zh-CN" sz="1800" dirty="0">
-                <a:solidFill>
-                  <a:srgbClr val="0070C0"/>
-                </a:solidFill>
-                <a:latin typeface="Arial" panose="020B0604020202020204" pitchFamily="34" charset="0"/>
-                <a:cs typeface="Arial" panose="020B0604020202020204" pitchFamily="34" charset="0"/>
-              </a:rPr>
-              <a:t>rank</a:t>
-            </a:r>
-            <a:r>
-              <a:rPr lang="en-US" altLang="zh-CN" sz="1800" dirty="0">
-                <a:latin typeface="Arial" panose="020B0604020202020204" pitchFamily="34" charset="0"/>
-                <a:cs typeface="Arial" panose="020B0604020202020204" pitchFamily="34" charset="0"/>
-              </a:rPr>
-              <a:t>, </a:t>
-            </a:r>
-            <a:r>
-              <a:rPr lang="en-US" altLang="zh-CN" sz="1800" dirty="0">
-                <a:solidFill>
-                  <a:srgbClr val="0070C0"/>
-                </a:solidFill>
-                <a:latin typeface="Arial" panose="020B0604020202020204" pitchFamily="34" charset="0"/>
-                <a:cs typeface="Arial" panose="020B0604020202020204" pitchFamily="34" charset="0"/>
-              </a:rPr>
-              <a:t>precoding</a:t>
-            </a:r>
-            <a:r>
-              <a:rPr lang="en-US" altLang="zh-CN" sz="1800" dirty="0">
-                <a:latin typeface="Arial" panose="020B0604020202020204" pitchFamily="34" charset="0"/>
-                <a:cs typeface="Arial" panose="020B0604020202020204" pitchFamily="34" charset="0"/>
-              </a:rPr>
-              <a:t>, and </a:t>
-            </a:r>
-            <a:r>
-              <a:rPr lang="en-US" altLang="zh-CN" sz="1800" dirty="0">
-                <a:solidFill>
-                  <a:srgbClr val="0070C0"/>
-                </a:solidFill>
-                <a:latin typeface="Arial" panose="020B0604020202020204" pitchFamily="34" charset="0"/>
-                <a:cs typeface="Arial" panose="020B0604020202020204" pitchFamily="34" charset="0"/>
-              </a:rPr>
-              <a:t>MCS</a:t>
-            </a:r>
-            <a:r>
-              <a:rPr lang="en-US" altLang="zh-CN" sz="1800" dirty="0">
-                <a:latin typeface="Arial" panose="020B0604020202020204" pitchFamily="34" charset="0"/>
-                <a:cs typeface="Arial" panose="020B0604020202020204" pitchFamily="34" charset="0"/>
-              </a:rPr>
-              <a:t> selection</a:t>
-            </a:r>
-          </a:p>
-          <a:p>
-            <a:pPr>
-              <a:lnSpc>
-                <a:spcPct val="150000"/>
-              </a:lnSpc>
-            </a:pPr>
-            <a:r>
-              <a:rPr lang="en-US" altLang="zh-CN" sz="1800" dirty="0">
-                <a:latin typeface="Arial" panose="020B0604020202020204" pitchFamily="34" charset="0"/>
-                <a:cs typeface="Arial" panose="020B0604020202020204" pitchFamily="34" charset="0"/>
-              </a:rPr>
-              <a:t>Evaluate throughput under different </a:t>
-            </a:r>
-            <a:r>
-              <a:rPr lang="en-US" altLang="zh-CN" sz="1800" dirty="0">
-                <a:solidFill>
-                  <a:srgbClr val="0070C0"/>
-                </a:solidFill>
-                <a:latin typeface="Arial" panose="020B0604020202020204" pitchFamily="34" charset="0"/>
-                <a:cs typeface="Arial" panose="020B0604020202020204" pitchFamily="34" charset="0"/>
-              </a:rPr>
-              <a:t>MIMO configurations</a:t>
-            </a:r>
-            <a:r>
-              <a:rPr lang="en-US" altLang="zh-CN" sz="1800" dirty="0">
-                <a:latin typeface="Arial" panose="020B0604020202020204" pitchFamily="34" charset="0"/>
-                <a:cs typeface="Arial" panose="020B0604020202020204" pitchFamily="34" charset="0"/>
-              </a:rPr>
-              <a:t>, </a:t>
-            </a:r>
-            <a:r>
-              <a:rPr lang="en-US" altLang="zh-CN" sz="1800" dirty="0">
-                <a:solidFill>
-                  <a:srgbClr val="0070C0"/>
-                </a:solidFill>
-                <a:latin typeface="Arial" panose="020B0604020202020204" pitchFamily="34" charset="0"/>
-                <a:cs typeface="Arial" panose="020B0604020202020204" pitchFamily="34" charset="0"/>
-              </a:rPr>
-              <a:t>mobility levels</a:t>
-            </a:r>
-            <a:r>
-              <a:rPr lang="en-US" altLang="zh-CN" sz="1800" dirty="0">
-                <a:latin typeface="Arial" panose="020B0604020202020204" pitchFamily="34" charset="0"/>
-                <a:cs typeface="Arial" panose="020B0604020202020204" pitchFamily="34" charset="0"/>
-              </a:rPr>
-              <a:t>, and </a:t>
-            </a:r>
-            <a:r>
-              <a:rPr lang="en-US" altLang="zh-CN" sz="1800" dirty="0">
-                <a:solidFill>
-                  <a:srgbClr val="0070C0"/>
-                </a:solidFill>
-                <a:latin typeface="Arial" panose="020B0604020202020204" pitchFamily="34" charset="0"/>
-                <a:cs typeface="Arial" panose="020B0604020202020204" pitchFamily="34" charset="0"/>
-              </a:rPr>
-              <a:t>CSI reporting periods</a:t>
-            </a:r>
-          </a:p>
-          <a:p>
-            <a:pPr>
-              <a:lnSpc>
-                <a:spcPct val="150000"/>
-              </a:lnSpc>
-            </a:pPr>
-            <a:r>
-              <a:rPr lang="en-US" altLang="zh-CN" sz="1800" dirty="0">
-                <a:latin typeface="Arial" panose="020B0604020202020204" pitchFamily="34" charset="0"/>
-                <a:cs typeface="Arial" panose="020B0604020202020204" pitchFamily="34" charset="0"/>
-              </a:rPr>
-              <a:t>Identify the </a:t>
-            </a:r>
-            <a:r>
-              <a:rPr lang="en-US" altLang="zh-CN" sz="1800" dirty="0">
-                <a:solidFill>
-                  <a:srgbClr val="0070C0"/>
-                </a:solidFill>
-                <a:latin typeface="Arial" panose="020B0604020202020204" pitchFamily="34" charset="0"/>
-                <a:cs typeface="Arial" panose="020B0604020202020204" pitchFamily="34" charset="0"/>
-              </a:rPr>
-              <a:t>trade-off</a:t>
-            </a:r>
-            <a:r>
-              <a:rPr lang="en-US" altLang="zh-CN" sz="1800" dirty="0">
-                <a:latin typeface="Arial" panose="020B0604020202020204" pitchFamily="34" charset="0"/>
-                <a:cs typeface="Arial" panose="020B0604020202020204" pitchFamily="34" charset="0"/>
-              </a:rPr>
-              <a:t> between CSI freshness, throughput gain, and feedback overhead</a:t>
-            </a:r>
-          </a:p>
-          <a:p>
-            <a:pPr>
-              <a:lnSpc>
-                <a:spcPct val="150000"/>
-              </a:lnSpc>
-            </a:pPr>
-            <a:r>
-              <a:rPr lang="en-US" altLang="zh-CN" sz="1800" dirty="0">
-                <a:latin typeface="Arial" panose="020B0604020202020204" pitchFamily="34" charset="0"/>
-                <a:cs typeface="Arial" panose="020B0604020202020204" pitchFamily="34" charset="0"/>
-              </a:rPr>
-              <a:t>Provide insight for future 5/6G </a:t>
-            </a:r>
-            <a:r>
-              <a:rPr lang="en-US" altLang="zh-CN" sz="1800" dirty="0">
-                <a:solidFill>
-                  <a:srgbClr val="0070C0"/>
-                </a:solidFill>
-                <a:latin typeface="Arial" panose="020B0604020202020204" pitchFamily="34" charset="0"/>
-                <a:cs typeface="Arial" panose="020B0604020202020204" pitchFamily="34" charset="0"/>
-              </a:rPr>
-              <a:t>adaptive CSI reporting </a:t>
-            </a:r>
-            <a:r>
-              <a:rPr lang="en-US" altLang="zh-CN" sz="1800" dirty="0">
-                <a:latin typeface="Arial" panose="020B0604020202020204" pitchFamily="34" charset="0"/>
-                <a:cs typeface="Arial" panose="020B0604020202020204" pitchFamily="34" charset="0"/>
-              </a:rPr>
-              <a:t>design</a:t>
-            </a:r>
-            <a:endParaRPr lang="zh-CN" altLang="en-US" sz="1800" dirty="0">
-              <a:latin typeface="Arial" panose="020B0604020202020204" pitchFamily="34" charset="0"/>
-              <a:cs typeface="Arial" panose="020B0604020202020204" pitchFamily="34" charset="0"/>
-            </a:endParaRPr>
-          </a:p>
-        </p:txBody>
-      </p:sp>
-      <p:sp>
-        <p:nvSpPr>
-          <p:cNvPr id="5" name="灯片编号占位符 4">
-            <a:extLst>
-              <a:ext uri="{FF2B5EF4-FFF2-40B4-BE49-F238E27FC236}">
-                <a16:creationId xmlns:a16="http://schemas.microsoft.com/office/drawing/2014/main" id="{2298A1E4-49AF-6477-7C1D-7193789D6323}"/>
-              </a:ext>
-            </a:extLst>
-          </p:cNvPr>
-          <p:cNvSpPr>
-            <a:spLocks noGrp="1"/>
-          </p:cNvSpPr>
-          <p:nvPr>
-            <p:ph type="sldNum" sz="quarter" idx="12"/>
-          </p:nvPr>
-        </p:nvSpPr>
-        <p:spPr>
-          <a:xfrm>
-            <a:off x="8610600" y="6356350"/>
-            <a:ext cx="3026535" cy="365125"/>
-          </a:xfrm>
-        </p:spPr>
-        <p:txBody>
-          <a:bodyPr/>
-          <a:lstStyle/>
-          <a:p>
-            <a:r>
-              <a:rPr lang="en-US" altLang="zh-CN" dirty="0">
-                <a:latin typeface="Arial" panose="020B0604020202020204" pitchFamily="34" charset="0"/>
-                <a:cs typeface="Arial" panose="020B0604020202020204" pitchFamily="34" charset="0"/>
-              </a:rPr>
-              <a:t>MIMO Techniques in 5/6G</a:t>
-            </a:r>
-            <a:r>
-              <a:rPr lang="zh-CN" altLang="en-US" dirty="0">
-                <a:latin typeface="Arial" panose="020B0604020202020204" pitchFamily="34" charset="0"/>
-                <a:cs typeface="Arial" panose="020B0604020202020204" pitchFamily="34" charset="0"/>
-              </a:rPr>
-              <a:t>     </a:t>
-            </a:r>
-            <a:fld id="{95B778F4-F869-49EC-876F-75AABD7B5BBF}" type="slidenum">
-              <a:rPr lang="zh-CN" altLang="en-US" smtClean="0">
-                <a:latin typeface="Arial" panose="020B0604020202020204" pitchFamily="34" charset="0"/>
-                <a:cs typeface="Arial" panose="020B0604020202020204" pitchFamily="34" charset="0"/>
-              </a:rPr>
-              <a:t>2</a:t>
-            </a:fld>
-            <a:endParaRPr lang="zh-CN" altLang="en-US" dirty="0">
-              <a:latin typeface="Arial" panose="020B0604020202020204" pitchFamily="34" charset="0"/>
-              <a:cs typeface="Arial" panose="020B0604020202020204" pitchFamily="34" charset="0"/>
-            </a:endParaRPr>
-          </a:p>
-        </p:txBody>
-      </p:sp>
-    </p:spTree>
-    <p:extLst>
-      <p:ext uri="{BB962C8B-B14F-4D97-AF65-F5344CB8AC3E}">
-        <p14:creationId xmlns:p14="http://schemas.microsoft.com/office/powerpoint/2010/main" val="2637183436"/>
-      </p:ext>
-    </p:extLst>
-  </p:cSld>
-  <p:clrMapOvr>
-    <a:masterClrMapping/>
-  </p:clrMapOvr>
-</p:sld>
-</file>
-
-<file path=ppt/slides/slide3.xml><?xml version="1.0" encoding="utf-8"?>
+<file path=ppt/slides/slide10.xml><?xml version="1.0" encoding="utf-8"?>
 <p:sld xmlns:a="http://schemas.openxmlformats.org/drawingml/2006/main" xmlns:r="http://schemas.openxmlformats.org/officeDocument/2006/relationships" xmlns:p="http://schemas.openxmlformats.org/presentationml/2006/main">
   <p:cSld>
     <p:spTree>
@@ -5010,7 +4959,7 @@
         <p:cNvPr id="1" name="">
           <a:extLst>
             <a:ext uri="{FF2B5EF4-FFF2-40B4-BE49-F238E27FC236}">
-              <a16:creationId xmlns:a16="http://schemas.microsoft.com/office/drawing/2014/main" id="{799F7BEB-F6F8-7C40-C35F-27D2FC144B7F}"/>
+              <a16:creationId xmlns:a16="http://schemas.microsoft.com/office/drawing/2014/main" id="{1E56F09A-D415-3864-C4B9-1E8D610A3DB6}"/>
             </a:ext>
           </a:extLst>
         </p:cNvPr>
@@ -5025,12 +4974,135 @@
           <a:chExt cx="0" cy="0"/>
         </a:xfrm>
       </p:grpSpPr>
+      <p:sp>
+        <p:nvSpPr>
+          <p:cNvPr id="2" name="标题 1">
+            <a:extLst>
+              <a:ext uri="{FF2B5EF4-FFF2-40B4-BE49-F238E27FC236}">
+                <a16:creationId xmlns:a16="http://schemas.microsoft.com/office/drawing/2014/main" id="{2745D904-D494-6613-461D-1A6307879647}"/>
+              </a:ext>
+            </a:extLst>
+          </p:cNvPr>
+          <p:cNvSpPr>
+            <a:spLocks noGrp="1"/>
+          </p:cNvSpPr>
+          <p:nvPr>
+            <p:ph type="title"/>
+          </p:nvPr>
+        </p:nvSpPr>
+        <p:spPr>
+          <a:xfrm>
+            <a:off x="554865" y="377422"/>
+            <a:ext cx="11082270" cy="607230"/>
+          </a:xfrm>
+        </p:spPr>
+        <p:txBody>
+          <a:bodyPr>
+            <a:normAutofit/>
+          </a:bodyPr>
+          <a:lstStyle/>
+          <a:p>
+            <a:r>
+              <a:rPr lang="en-US" altLang="zh-CN" sz="3200" dirty="0">
+                <a:latin typeface="Arial" panose="020B0604020202020204" pitchFamily="34" charset="0"/>
+                <a:cs typeface="Arial" panose="020B0604020202020204" pitchFamily="34" charset="0"/>
+              </a:rPr>
+              <a:t>Appendix</a:t>
+            </a:r>
+            <a:endParaRPr lang="zh-CN" altLang="en-US" sz="3200" dirty="0">
+              <a:latin typeface="Arial" panose="020B0604020202020204" pitchFamily="34" charset="0"/>
+              <a:cs typeface="Arial" panose="020B0604020202020204" pitchFamily="34" charset="0"/>
+            </a:endParaRPr>
+          </a:p>
+        </p:txBody>
+      </p:sp>
+      <p:sp>
+        <p:nvSpPr>
+          <p:cNvPr id="4" name="页脚占位符 3">
+            <a:extLst>
+              <a:ext uri="{FF2B5EF4-FFF2-40B4-BE49-F238E27FC236}">
+                <a16:creationId xmlns:a16="http://schemas.microsoft.com/office/drawing/2014/main" id="{A0793FC7-3CB2-EDB0-AD2D-C2EF8F77C945}"/>
+              </a:ext>
+            </a:extLst>
+          </p:cNvPr>
+          <p:cNvSpPr>
+            <a:spLocks noGrp="1"/>
+          </p:cNvSpPr>
+          <p:nvPr>
+            <p:ph type="ftr" sz="quarter" idx="11"/>
+          </p:nvPr>
+        </p:nvSpPr>
+        <p:spPr>
+          <a:xfrm>
+            <a:off x="554865" y="6356350"/>
+            <a:ext cx="11082270" cy="365125"/>
+          </a:xfrm>
+        </p:spPr>
+        <p:txBody>
+          <a:bodyPr/>
+          <a:lstStyle/>
+          <a:p>
+            <a:pPr algn="l"/>
+            <a:endParaRPr lang="zh-CN" altLang="en-US" dirty="0">
+              <a:latin typeface="Arial" panose="020B0604020202020204" pitchFamily="34" charset="0"/>
+              <a:cs typeface="Arial" panose="020B0604020202020204" pitchFamily="34" charset="0"/>
+            </a:endParaRPr>
+          </a:p>
+        </p:txBody>
+      </p:sp>
+      <p:sp>
+        <p:nvSpPr>
+          <p:cNvPr id="5" name="灯片编号占位符 4">
+            <a:extLst>
+              <a:ext uri="{FF2B5EF4-FFF2-40B4-BE49-F238E27FC236}">
+                <a16:creationId xmlns:a16="http://schemas.microsoft.com/office/drawing/2014/main" id="{0F2BF362-3F4B-108E-7F5A-FAF0494B4D16}"/>
+              </a:ext>
+            </a:extLst>
+          </p:cNvPr>
+          <p:cNvSpPr>
+            <a:spLocks noGrp="1"/>
+          </p:cNvSpPr>
+          <p:nvPr>
+            <p:ph type="sldNum" sz="quarter" idx="12"/>
+          </p:nvPr>
+        </p:nvSpPr>
+        <p:spPr>
+          <a:xfrm>
+            <a:off x="8610599" y="6356350"/>
+            <a:ext cx="3026535" cy="365125"/>
+          </a:xfrm>
+        </p:spPr>
+        <p:txBody>
+          <a:bodyPr/>
+          <a:lstStyle/>
+          <a:p>
+            <a:r>
+              <a:rPr lang="en-US" altLang="zh-CN" dirty="0">
+                <a:latin typeface="Arial" panose="020B0604020202020204" pitchFamily="34" charset="0"/>
+                <a:cs typeface="Arial" panose="020B0604020202020204" pitchFamily="34" charset="0"/>
+              </a:rPr>
+              <a:t>MIMO Techniques in 5/6G     </a:t>
+            </a:r>
+            <a:fld id="{95B778F4-F869-49EC-876F-75AABD7B5BBF}" type="slidenum">
+              <a:rPr lang="zh-CN" altLang="en-US" smtClean="0">
+                <a:latin typeface="Arial" panose="020B0604020202020204" pitchFamily="34" charset="0"/>
+                <a:cs typeface="Arial" panose="020B0604020202020204" pitchFamily="34" charset="0"/>
+              </a:rPr>
+              <a:t>10</a:t>
+            </a:fld>
+            <a:endParaRPr lang="zh-CN" altLang="en-US" dirty="0">
+              <a:latin typeface="Arial" panose="020B0604020202020204" pitchFamily="34" charset="0"/>
+              <a:cs typeface="Arial" panose="020B0604020202020204" pitchFamily="34" charset="0"/>
+            </a:endParaRPr>
+          </a:p>
+        </p:txBody>
+      </p:sp>
       <p:pic>
         <p:nvPicPr>
-          <p:cNvPr id="7" name="图片 6">
-            <a:extLst>
-              <a:ext uri="{FF2B5EF4-FFF2-40B4-BE49-F238E27FC236}">
-                <a16:creationId xmlns:a16="http://schemas.microsoft.com/office/drawing/2014/main" id="{D4AA7DC2-AF3F-DDBF-A461-306E1CBAAC51}"/>
+          <p:cNvPr id="8" name="图片 7">
+            <a:extLst>
+              <a:ext uri="{FF2B5EF4-FFF2-40B4-BE49-F238E27FC236}">
+                <a16:creationId xmlns:a16="http://schemas.microsoft.com/office/drawing/2014/main" id="{268CD8F2-BA47-10E8-8A32-389541A9D321}"/>
               </a:ext>
             </a:extLst>
           </p:cNvPr>
@@ -5047,379 +5119,18 @@
         </p:blipFill>
         <p:spPr>
           <a:xfrm>
-            <a:off x="3062524" y="3683358"/>
-            <a:ext cx="6066949" cy="2287704"/>
+            <a:off x="973347" y="1247625"/>
+            <a:ext cx="10245306" cy="4845752"/>
           </a:xfrm>
           <a:prstGeom prst="rect">
             <a:avLst/>
           </a:prstGeom>
         </p:spPr>
       </p:pic>
-      <p:sp>
-        <p:nvSpPr>
-          <p:cNvPr id="2" name="标题 1">
-            <a:extLst>
-              <a:ext uri="{FF2B5EF4-FFF2-40B4-BE49-F238E27FC236}">
-                <a16:creationId xmlns:a16="http://schemas.microsoft.com/office/drawing/2014/main" id="{D1811416-A87A-4A1A-4165-64AF60DEC22A}"/>
-              </a:ext>
-            </a:extLst>
-          </p:cNvPr>
-          <p:cNvSpPr>
-            <a:spLocks noGrp="1"/>
-          </p:cNvSpPr>
-          <p:nvPr>
-            <p:ph type="title"/>
-          </p:nvPr>
-        </p:nvSpPr>
-        <p:spPr>
-          <a:xfrm>
-            <a:off x="554865" y="377422"/>
-            <a:ext cx="11082270" cy="607230"/>
-          </a:xfrm>
-        </p:spPr>
-        <p:txBody>
-          <a:bodyPr>
-            <a:normAutofit/>
-          </a:bodyPr>
-          <a:lstStyle/>
-          <a:p>
-            <a:r>
-              <a:rPr lang="en-US" altLang="zh-CN" sz="3200" dirty="0">
-                <a:latin typeface="Arial" panose="020B0604020202020204" pitchFamily="34" charset="0"/>
-                <a:cs typeface="Arial" panose="020B0604020202020204" pitchFamily="34" charset="0"/>
-              </a:rPr>
-              <a:t>Channel State Information (CSI)</a:t>
-            </a:r>
-            <a:endParaRPr lang="zh-CN" altLang="en-US" sz="3200" dirty="0">
-              <a:latin typeface="Arial" panose="020B0604020202020204" pitchFamily="34" charset="0"/>
-              <a:cs typeface="Arial" panose="020B0604020202020204" pitchFamily="34" charset="0"/>
-            </a:endParaRPr>
-          </a:p>
-        </p:txBody>
-      </p:sp>
-      <p:sp>
-        <p:nvSpPr>
-          <p:cNvPr id="3" name="内容占位符 2">
-            <a:extLst>
-              <a:ext uri="{FF2B5EF4-FFF2-40B4-BE49-F238E27FC236}">
-                <a16:creationId xmlns:a16="http://schemas.microsoft.com/office/drawing/2014/main" id="{17B67127-22D4-A5C0-F66C-948249928F07}"/>
-              </a:ext>
-            </a:extLst>
-          </p:cNvPr>
-          <p:cNvSpPr>
-            <a:spLocks noGrp="1"/>
-          </p:cNvSpPr>
-          <p:nvPr>
-            <p:ph idx="1"/>
-          </p:nvPr>
-        </p:nvSpPr>
-        <p:spPr>
-          <a:xfrm>
-            <a:off x="554865" y="1146220"/>
-            <a:ext cx="11082270" cy="3205647"/>
-          </a:xfrm>
-        </p:spPr>
-        <p:txBody>
-          <a:bodyPr>
-            <a:normAutofit/>
-          </a:bodyPr>
-          <a:lstStyle/>
-          <a:p>
-            <a:pPr>
-              <a:lnSpc>
-                <a:spcPct val="150000"/>
-              </a:lnSpc>
-            </a:pPr>
-            <a:r>
-              <a:rPr lang="en-US" altLang="zh-CN" sz="1800" dirty="0">
-                <a:latin typeface="Arial" panose="020B0604020202020204" pitchFamily="34" charset="0"/>
-                <a:cs typeface="Arial" panose="020B0604020202020204" pitchFamily="34" charset="0"/>
-              </a:rPr>
-              <a:t>UE estimates the downlink channel using </a:t>
-            </a:r>
-            <a:r>
-              <a:rPr lang="en-US" altLang="zh-CN" sz="1800" dirty="0">
-                <a:solidFill>
-                  <a:srgbClr val="0070C0"/>
-                </a:solidFill>
-                <a:latin typeface="Arial" panose="020B0604020202020204" pitchFamily="34" charset="0"/>
-                <a:cs typeface="Arial" panose="020B0604020202020204" pitchFamily="34" charset="0"/>
-              </a:rPr>
-              <a:t>CSI-RS</a:t>
-            </a:r>
-            <a:r>
-              <a:rPr lang="en-US" altLang="zh-CN" sz="1800" dirty="0">
-                <a:latin typeface="Arial" panose="020B0604020202020204" pitchFamily="34" charset="0"/>
-                <a:cs typeface="Arial" panose="020B0604020202020204" pitchFamily="34" charset="0"/>
-              </a:rPr>
-              <a:t> and reports </a:t>
-            </a:r>
-            <a:r>
-              <a:rPr lang="en-US" altLang="zh-CN" sz="1800" dirty="0">
-                <a:solidFill>
-                  <a:srgbClr val="0070C0"/>
-                </a:solidFill>
-                <a:latin typeface="Arial" panose="020B0604020202020204" pitchFamily="34" charset="0"/>
-                <a:cs typeface="Arial" panose="020B0604020202020204" pitchFamily="34" charset="0"/>
-              </a:rPr>
-              <a:t>CSI</a:t>
-            </a:r>
-            <a:r>
-              <a:rPr lang="en-US" altLang="zh-CN" sz="1800" dirty="0">
-                <a:latin typeface="Arial" panose="020B0604020202020204" pitchFamily="34" charset="0"/>
-                <a:cs typeface="Arial" panose="020B0604020202020204" pitchFamily="34" charset="0"/>
-              </a:rPr>
-              <a:t> to the gNB</a:t>
-            </a:r>
-          </a:p>
-          <a:p>
-            <a:pPr>
-              <a:lnSpc>
-                <a:spcPct val="150000"/>
-              </a:lnSpc>
-            </a:pPr>
-            <a:r>
-              <a:rPr lang="en-US" altLang="zh-CN" sz="1800" dirty="0">
-                <a:latin typeface="Arial" panose="020B0604020202020204" pitchFamily="34" charset="0"/>
-                <a:cs typeface="Arial" panose="020B0604020202020204" pitchFamily="34" charset="0"/>
-              </a:rPr>
-              <a:t>CSI feedback supports link adaptation:</a:t>
-            </a:r>
-          </a:p>
-          <a:p>
-            <a:pPr lvl="1">
-              <a:lnSpc>
-                <a:spcPct val="150000"/>
-              </a:lnSpc>
-              <a:buClr>
-                <a:schemeClr val="tx1"/>
-              </a:buClr>
-            </a:pPr>
-            <a:r>
-              <a:rPr lang="en-US" altLang="zh-CN" sz="1800" dirty="0">
-                <a:solidFill>
-                  <a:srgbClr val="0070C0"/>
-                </a:solidFill>
-                <a:latin typeface="Arial" panose="020B0604020202020204" pitchFamily="34" charset="0"/>
-                <a:cs typeface="Arial" panose="020B0604020202020204" pitchFamily="34" charset="0"/>
-              </a:rPr>
-              <a:t>Precoder Matrix Indicator (PMI): </a:t>
-            </a:r>
-            <a:r>
-              <a:rPr lang="en-US" altLang="zh-CN" sz="1800" dirty="0">
-                <a:latin typeface="Arial" panose="020B0604020202020204" pitchFamily="34" charset="0"/>
-                <a:cs typeface="Arial" panose="020B0604020202020204" pitchFamily="34" charset="0"/>
-              </a:rPr>
-              <a:t>preferred precoding matrix</a:t>
-            </a:r>
-          </a:p>
-          <a:p>
-            <a:pPr lvl="1">
-              <a:lnSpc>
-                <a:spcPct val="150000"/>
-              </a:lnSpc>
-              <a:buClr>
-                <a:schemeClr val="tx1"/>
-              </a:buClr>
-            </a:pPr>
-            <a:r>
-              <a:rPr lang="en-US" altLang="zh-CN" sz="1800" dirty="0">
-                <a:solidFill>
-                  <a:srgbClr val="0070C0"/>
-                </a:solidFill>
-                <a:latin typeface="Arial" panose="020B0604020202020204" pitchFamily="34" charset="0"/>
-                <a:cs typeface="Arial" panose="020B0604020202020204" pitchFamily="34" charset="0"/>
-              </a:rPr>
-              <a:t>Rank Indicator (RI):</a:t>
-            </a:r>
-            <a:r>
-              <a:rPr lang="en-US" altLang="zh-CN" sz="1800" dirty="0">
-                <a:latin typeface="Arial" panose="020B0604020202020204" pitchFamily="34" charset="0"/>
-                <a:cs typeface="Arial" panose="020B0604020202020204" pitchFamily="34" charset="0"/>
-              </a:rPr>
-              <a:t> recommended number of layers (rank)</a:t>
-            </a:r>
-          </a:p>
-          <a:p>
-            <a:pPr lvl="1">
-              <a:lnSpc>
-                <a:spcPct val="150000"/>
-              </a:lnSpc>
-              <a:buClr>
-                <a:schemeClr val="tx1"/>
-              </a:buClr>
-            </a:pPr>
-            <a:r>
-              <a:rPr lang="en-US" altLang="zh-CN" sz="1800" dirty="0">
-                <a:solidFill>
-                  <a:srgbClr val="0070C0"/>
-                </a:solidFill>
-                <a:latin typeface="Arial" panose="020B0604020202020204" pitchFamily="34" charset="0"/>
-                <a:cs typeface="Arial" panose="020B0604020202020204" pitchFamily="34" charset="0"/>
-              </a:rPr>
-              <a:t>Channel Quality Indicator (CQI):</a:t>
-            </a:r>
-            <a:r>
-              <a:rPr lang="en-US" altLang="zh-CN" sz="1800" dirty="0">
-                <a:latin typeface="Arial" panose="020B0604020202020204" pitchFamily="34" charset="0"/>
-                <a:cs typeface="Arial" panose="020B0604020202020204" pitchFamily="34" charset="0"/>
-              </a:rPr>
-              <a:t> recommended modulation and coding</a:t>
-            </a:r>
-          </a:p>
-          <a:p>
-            <a:pPr marL="0" indent="0">
-              <a:buNone/>
-            </a:pPr>
-            <a:endParaRPr lang="zh-CN" altLang="en-US" sz="2000" dirty="0">
-              <a:latin typeface="Arial" panose="020B0604020202020204" pitchFamily="34" charset="0"/>
-              <a:cs typeface="Arial" panose="020B0604020202020204" pitchFamily="34" charset="0"/>
-            </a:endParaRPr>
-          </a:p>
-        </p:txBody>
-      </p:sp>
-      <p:sp>
-        <p:nvSpPr>
-          <p:cNvPr id="4" name="页脚占位符 3">
-            <a:extLst>
-              <a:ext uri="{FF2B5EF4-FFF2-40B4-BE49-F238E27FC236}">
-                <a16:creationId xmlns:a16="http://schemas.microsoft.com/office/drawing/2014/main" id="{0A4809AF-1C89-B1D2-8EF9-D816F52DC50D}"/>
-              </a:ext>
-            </a:extLst>
-          </p:cNvPr>
-          <p:cNvSpPr>
-            <a:spLocks noGrp="1"/>
-          </p:cNvSpPr>
-          <p:nvPr>
-            <p:ph type="ftr" sz="quarter" idx="11"/>
-          </p:nvPr>
-        </p:nvSpPr>
-        <p:spPr>
-          <a:xfrm>
-            <a:off x="554865" y="6356350"/>
-            <a:ext cx="11082270" cy="365125"/>
-          </a:xfrm>
-        </p:spPr>
-        <p:txBody>
-          <a:bodyPr/>
-          <a:lstStyle/>
-          <a:p>
-            <a:pPr algn="l"/>
-            <a:r>
-              <a:rPr lang="en-US" altLang="zh-CN" dirty="0">
-                <a:latin typeface="Arial" panose="020B0604020202020204" pitchFamily="34" charset="0"/>
-                <a:cs typeface="Arial" panose="020B0604020202020204" pitchFamily="34" charset="0"/>
-              </a:rPr>
-              <a:t>Source: The Next Generation Wireless Access Technology</a:t>
-            </a:r>
-            <a:endParaRPr lang="zh-CN" altLang="en-US" dirty="0">
-              <a:latin typeface="Arial" panose="020B0604020202020204" pitchFamily="34" charset="0"/>
-              <a:cs typeface="Arial" panose="020B0604020202020204" pitchFamily="34" charset="0"/>
-            </a:endParaRPr>
-          </a:p>
-        </p:txBody>
-      </p:sp>
-      <p:sp>
-        <p:nvSpPr>
-          <p:cNvPr id="5" name="灯片编号占位符 4">
-            <a:extLst>
-              <a:ext uri="{FF2B5EF4-FFF2-40B4-BE49-F238E27FC236}">
-                <a16:creationId xmlns:a16="http://schemas.microsoft.com/office/drawing/2014/main" id="{22B6B49A-130B-935C-8172-075C5AB169C7}"/>
-              </a:ext>
-            </a:extLst>
-          </p:cNvPr>
-          <p:cNvSpPr>
-            <a:spLocks noGrp="1"/>
-          </p:cNvSpPr>
-          <p:nvPr>
-            <p:ph type="sldNum" sz="quarter" idx="12"/>
-          </p:nvPr>
-        </p:nvSpPr>
-        <p:spPr>
-          <a:xfrm>
-            <a:off x="8610599" y="6356350"/>
-            <a:ext cx="3026535" cy="365125"/>
-          </a:xfrm>
-        </p:spPr>
-        <p:txBody>
-          <a:bodyPr/>
-          <a:lstStyle/>
-          <a:p>
-            <a:r>
-              <a:rPr lang="en-US" altLang="zh-CN" dirty="0">
-                <a:latin typeface="Arial" panose="020B0604020202020204" pitchFamily="34" charset="0"/>
-                <a:cs typeface="Arial" panose="020B0604020202020204" pitchFamily="34" charset="0"/>
-              </a:rPr>
-              <a:t>MIMO Techniques in 5/6G</a:t>
-            </a:r>
-            <a:r>
-              <a:rPr lang="zh-CN" altLang="en-US" dirty="0">
-                <a:latin typeface="Arial" panose="020B0604020202020204" pitchFamily="34" charset="0"/>
-                <a:cs typeface="Arial" panose="020B0604020202020204" pitchFamily="34" charset="0"/>
-              </a:rPr>
-              <a:t>     </a:t>
-            </a:r>
-            <a:fld id="{95B778F4-F869-49EC-876F-75AABD7B5BBF}" type="slidenum">
-              <a:rPr lang="zh-CN" altLang="en-US" smtClean="0">
-                <a:latin typeface="Arial" panose="020B0604020202020204" pitchFamily="34" charset="0"/>
-                <a:cs typeface="Arial" panose="020B0604020202020204" pitchFamily="34" charset="0"/>
-              </a:rPr>
-              <a:t>3</a:t>
-            </a:fld>
-            <a:endParaRPr lang="zh-CN" altLang="en-US" dirty="0">
-              <a:latin typeface="Arial" panose="020B0604020202020204" pitchFamily="34" charset="0"/>
-              <a:cs typeface="Arial" panose="020B0604020202020204" pitchFamily="34" charset="0"/>
-            </a:endParaRPr>
-          </a:p>
-        </p:txBody>
-      </p:sp>
-      <p:sp>
-        <p:nvSpPr>
-          <p:cNvPr id="12" name="文本框 11">
-            <a:extLst>
-              <a:ext uri="{FF2B5EF4-FFF2-40B4-BE49-F238E27FC236}">
-                <a16:creationId xmlns:a16="http://schemas.microsoft.com/office/drawing/2014/main" id="{BD9B5D6D-8A2E-236F-A58D-283E7AFCC984}"/>
-              </a:ext>
-            </a:extLst>
-          </p:cNvPr>
-          <p:cNvSpPr txBox="1"/>
-          <p:nvPr/>
-        </p:nvSpPr>
-        <p:spPr>
-          <a:xfrm>
-            <a:off x="3073879" y="6012441"/>
-            <a:ext cx="6044241" cy="307777"/>
-          </a:xfrm>
-          <a:prstGeom prst="rect">
-            <a:avLst/>
-          </a:prstGeom>
-          <a:noFill/>
-        </p:spPr>
-        <p:txBody>
-          <a:bodyPr wrap="square">
-            <a:spAutoFit/>
-          </a:bodyPr>
-          <a:lstStyle/>
-          <a:p>
-            <a:pPr algn="ctr"/>
-            <a:r>
-              <a:rPr lang="en-US" altLang="zh-CN" sz="1400" dirty="0">
-                <a:latin typeface="Arial" panose="020B0604020202020204" pitchFamily="34" charset="0"/>
-                <a:cs typeface="Arial" panose="020B0604020202020204" pitchFamily="34" charset="0"/>
-              </a:rPr>
-              <a:t>Figure 1: CSI reporting and downlink transmission</a:t>
-            </a:r>
-            <a:endParaRPr lang="zh-CN" altLang="en-US" sz="1400" dirty="0">
-              <a:latin typeface="Arial" panose="020B0604020202020204" pitchFamily="34" charset="0"/>
-              <a:cs typeface="Arial" panose="020B0604020202020204" pitchFamily="34" charset="0"/>
-            </a:endParaRPr>
-          </a:p>
-        </p:txBody>
-      </p:sp>
     </p:spTree>
     <p:extLst>
       <p:ext uri="{BB962C8B-B14F-4D97-AF65-F5344CB8AC3E}">
-        <p14:creationId xmlns:p14="http://schemas.microsoft.com/office/powerpoint/2010/main" val="3754076247"/>
+        <p14:creationId xmlns:p14="http://schemas.microsoft.com/office/powerpoint/2010/main" val="2569040733"/>
       </p:ext>
     </p:extLst>
   </p:cSld>
@@ -5429,7 +5140,7 @@
 </p:sld>
 </file>
 
-<file path=ppt/slides/slide4.xml><?xml version="1.0" encoding="utf-8"?>
+<file path=ppt/slides/slide11.xml><?xml version="1.0" encoding="utf-8"?>
 <p:sld xmlns:a="http://schemas.openxmlformats.org/drawingml/2006/main" xmlns:r="http://schemas.openxmlformats.org/officeDocument/2006/relationships" xmlns:p="http://schemas.openxmlformats.org/presentationml/2006/main">
   <p:cSld>
     <p:spTree>
@@ -5437,7 +5148,7 @@
         <p:cNvPr id="1" name="">
           <a:extLst>
             <a:ext uri="{FF2B5EF4-FFF2-40B4-BE49-F238E27FC236}">
-              <a16:creationId xmlns:a16="http://schemas.microsoft.com/office/drawing/2014/main" id="{98F4380B-FB44-E067-22EA-94FA43955D75}"/>
+              <a16:creationId xmlns:a16="http://schemas.microsoft.com/office/drawing/2014/main" id="{78B9BD5B-DF04-41E0-0293-87CA7C4BD9EB}"/>
             </a:ext>
           </a:extLst>
         </p:cNvPr>
@@ -5457,7 +5168,7 @@
           <p:cNvPr id="2" name="标题 1">
             <a:extLst>
               <a:ext uri="{FF2B5EF4-FFF2-40B4-BE49-F238E27FC236}">
-                <a16:creationId xmlns:a16="http://schemas.microsoft.com/office/drawing/2014/main" id="{9CEEFE5A-68F0-A94B-704D-15F4E2EDA12E}"/>
+                <a16:creationId xmlns:a16="http://schemas.microsoft.com/office/drawing/2014/main" id="{6937D499-4CB7-500E-84C3-DBDE59C1AED2}"/>
               </a:ext>
             </a:extLst>
           </p:cNvPr>
@@ -5485,7 +5196,7 @@
                 <a:latin typeface="Arial" panose="020B0604020202020204" pitchFamily="34" charset="0"/>
                 <a:cs typeface="Arial" panose="020B0604020202020204" pitchFamily="34" charset="0"/>
               </a:rPr>
-              <a:t>Simulation Framework</a:t>
+              <a:t>Appendix</a:t>
             </a:r>
             <a:endParaRPr lang="zh-CN" altLang="en-US" sz="3200" dirty="0">
               <a:latin typeface="Arial" panose="020B0604020202020204" pitchFamily="34" charset="0"/>
@@ -5499,7 +5210,7 @@
           <p:cNvPr id="4" name="页脚占位符 3">
             <a:extLst>
               <a:ext uri="{FF2B5EF4-FFF2-40B4-BE49-F238E27FC236}">
-                <a16:creationId xmlns:a16="http://schemas.microsoft.com/office/drawing/2014/main" id="{DC3A1099-FFCC-5B98-467C-C081001A2C9C}"/>
+                <a16:creationId xmlns:a16="http://schemas.microsoft.com/office/drawing/2014/main" id="{F36B6CF7-7D6C-9F14-3C90-91DA13019FC2}"/>
               </a:ext>
             </a:extLst>
           </p:cNvPr>
@@ -5521,13 +5232,6 @@
           <a:lstStyle/>
           <a:p>
             <a:pPr algn="l"/>
-            <a:r>
-              <a:rPr lang="en-US" altLang="zh-CN" dirty="0">
-                <a:latin typeface="Arial" panose="020B0604020202020204" pitchFamily="34" charset="0"/>
-                <a:cs typeface="Arial" panose="020B0604020202020204" pitchFamily="34" charset="0"/>
-              </a:rPr>
-              <a:t>Source: MATLAB NR PDSCH Throughput Using Channel State Information Feedback</a:t>
-            </a:r>
             <a:endParaRPr lang="zh-CN" altLang="en-US" dirty="0">
               <a:latin typeface="Arial" panose="020B0604020202020204" pitchFamily="34" charset="0"/>
               <a:cs typeface="Arial" panose="020B0604020202020204" pitchFamily="34" charset="0"/>
@@ -5540,7 +5244,7 @@
           <p:cNvPr id="5" name="灯片编号占位符 4">
             <a:extLst>
               <a:ext uri="{FF2B5EF4-FFF2-40B4-BE49-F238E27FC236}">
-                <a16:creationId xmlns:a16="http://schemas.microsoft.com/office/drawing/2014/main" id="{23B1A9A6-53E3-CFED-69C9-7A5F9484964B}"/>
+                <a16:creationId xmlns:a16="http://schemas.microsoft.com/office/drawing/2014/main" id="{B3EAB836-D255-3487-CA8C-F2DB619E767A}"/>
               </a:ext>
             </a:extLst>
           </p:cNvPr>
@@ -5573,7 +5277,7 @@
                 <a:latin typeface="Arial" panose="020B0604020202020204" pitchFamily="34" charset="0"/>
                 <a:cs typeface="Arial" panose="020B0604020202020204" pitchFamily="34" charset="0"/>
               </a:rPr>
-              <a:t>4</a:t>
+              <a:t>11</a:t>
             </a:fld>
             <a:endParaRPr lang="zh-CN" altLang="en-US" dirty="0">
               <a:latin typeface="Arial" panose="020B0604020202020204" pitchFamily="34" charset="0"/>
@@ -5584,10 +5288,10 @@
       </p:sp>
       <p:pic>
         <p:nvPicPr>
-          <p:cNvPr id="11" name="图片 10">
-            <a:extLst>
-              <a:ext uri="{FF2B5EF4-FFF2-40B4-BE49-F238E27FC236}">
-                <a16:creationId xmlns:a16="http://schemas.microsoft.com/office/drawing/2014/main" id="{84534A41-BAFA-A82D-90E4-2FC5EA7BC6D2}"/>
+          <p:cNvPr id="6" name="图片 5">
+            <a:extLst>
+              <a:ext uri="{FF2B5EF4-FFF2-40B4-BE49-F238E27FC236}">
+                <a16:creationId xmlns:a16="http://schemas.microsoft.com/office/drawing/2014/main" id="{549279E3-BC42-64DA-7F00-7FA1B8B08990}"/>
               </a:ext>
             </a:extLst>
           </p:cNvPr>
@@ -5598,195 +5302,24 @@
         </p:nvPicPr>
         <p:blipFill>
           <a:blip r:embed="rId3"/>
-          <a:srcRect l="1944" r="1350"/>
           <a:stretch>
             <a:fillRect/>
           </a:stretch>
         </p:blipFill>
         <p:spPr>
           <a:xfrm>
-            <a:off x="946030" y="899785"/>
-            <a:ext cx="10299939" cy="3020229"/>
+            <a:off x="1098430" y="984652"/>
+            <a:ext cx="9661585" cy="5232851"/>
           </a:xfrm>
           <a:prstGeom prst="rect">
             <a:avLst/>
           </a:prstGeom>
         </p:spPr>
       </p:pic>
-      <p:sp>
-        <p:nvSpPr>
-          <p:cNvPr id="6" name="文本框 5">
-            <a:extLst>
-              <a:ext uri="{FF2B5EF4-FFF2-40B4-BE49-F238E27FC236}">
-                <a16:creationId xmlns:a16="http://schemas.microsoft.com/office/drawing/2014/main" id="{B441B10E-B056-0C9E-E818-D17BCAD0297F}"/>
-              </a:ext>
-            </a:extLst>
-          </p:cNvPr>
-          <p:cNvSpPr txBox="1"/>
-          <p:nvPr/>
-        </p:nvSpPr>
-        <p:spPr>
-          <a:xfrm>
-            <a:off x="554865" y="4275111"/>
-            <a:ext cx="11132712" cy="1703030"/>
-          </a:xfrm>
-          <a:prstGeom prst="rect">
-            <a:avLst/>
-          </a:prstGeom>
-          <a:noFill/>
-        </p:spPr>
-        <p:txBody>
-          <a:bodyPr wrap="square">
-            <a:spAutoFit/>
-          </a:bodyPr>
-          <a:lstStyle/>
-          <a:p>
-            <a:pPr marL="285750" indent="-285750">
-              <a:lnSpc>
-                <a:spcPct val="150000"/>
-              </a:lnSpc>
-              <a:buFont typeface="Arial" panose="020B0604020202020204" pitchFamily="34" charset="0"/>
-              <a:buChar char="•"/>
-            </a:pPr>
-            <a:r>
-              <a:rPr lang="en-US" altLang="zh-CN" sz="1800" dirty="0">
-                <a:latin typeface="Arial" panose="020B0604020202020204" pitchFamily="34" charset="0"/>
-                <a:cs typeface="Arial" panose="020B0604020202020204" pitchFamily="34" charset="0"/>
-              </a:rPr>
-              <a:t>CSI based feedback with adaptive RI / PMI / CQI</a:t>
-            </a:r>
-          </a:p>
-          <a:p>
-            <a:pPr marL="285750" indent="-285750">
-              <a:lnSpc>
-                <a:spcPct val="150000"/>
-              </a:lnSpc>
-              <a:buClr>
-                <a:schemeClr val="tx1"/>
-              </a:buClr>
-              <a:buFont typeface="Arial" panose="020B0604020202020204" pitchFamily="34" charset="0"/>
-              <a:buChar char="•"/>
-            </a:pPr>
-            <a:r>
-              <a:rPr lang="en-US" altLang="zh-CN" sz="1800" dirty="0">
-                <a:solidFill>
-                  <a:srgbClr val="0070C0"/>
-                </a:solidFill>
-                <a:latin typeface="Arial" panose="020B0604020202020204" pitchFamily="34" charset="0"/>
-                <a:cs typeface="Arial" panose="020B0604020202020204" pitchFamily="34" charset="0"/>
-              </a:rPr>
-              <a:t>Baseline</a:t>
-            </a:r>
-            <a:r>
-              <a:rPr lang="en-US" altLang="zh-CN" sz="1800" dirty="0">
-                <a:latin typeface="Arial" panose="020B0604020202020204" pitchFamily="34" charset="0"/>
-                <a:cs typeface="Arial" panose="020B0604020202020204" pitchFamily="34" charset="0"/>
-              </a:rPr>
-              <a:t>: 3.5 GHz, 40 MHz BW, 30 kHz SCS, 4Tx 4Rx, CDL-C channel</a:t>
-            </a:r>
-          </a:p>
-          <a:p>
-            <a:pPr marL="285750" indent="-285750">
-              <a:lnSpc>
-                <a:spcPct val="150000"/>
-              </a:lnSpc>
-              <a:buFont typeface="Arial" panose="020B0604020202020204" pitchFamily="34" charset="0"/>
-              <a:buChar char="•"/>
-            </a:pPr>
-            <a:r>
-              <a:rPr lang="en-US" altLang="zh-CN" dirty="0">
-                <a:latin typeface="Arial" panose="020B0604020202020204" pitchFamily="34" charset="0"/>
-                <a:cs typeface="Arial" panose="020B0604020202020204" pitchFamily="34" charset="0"/>
-              </a:rPr>
-              <a:t>Performance metric: delivered PDSCH </a:t>
-            </a:r>
-            <a:r>
-              <a:rPr lang="en-US" altLang="zh-CN" dirty="0">
-                <a:solidFill>
-                  <a:srgbClr val="0070C0"/>
-                </a:solidFill>
-                <a:latin typeface="Arial" panose="020B0604020202020204" pitchFamily="34" charset="0"/>
-                <a:cs typeface="Arial" panose="020B0604020202020204" pitchFamily="34" charset="0"/>
-              </a:rPr>
-              <a:t>throughput in Mbps</a:t>
-            </a:r>
-          </a:p>
-          <a:p>
-            <a:pPr marL="285750" indent="-285750">
-              <a:lnSpc>
-                <a:spcPct val="150000"/>
-              </a:lnSpc>
-              <a:buFont typeface="Arial" panose="020B0604020202020204" pitchFamily="34" charset="0"/>
-              <a:buChar char="•"/>
-            </a:pPr>
-            <a:r>
-              <a:rPr lang="en-US" altLang="zh-CN" dirty="0">
-                <a:latin typeface="Arial" panose="020B0604020202020204" pitchFamily="34" charset="0"/>
-                <a:cs typeface="Arial" panose="020B0604020202020204" pitchFamily="34" charset="0"/>
-              </a:rPr>
-              <a:t>SNR range: -5 to 25 dB, with 1</a:t>
-            </a:r>
-            <a:r>
-              <a:rPr lang="fr-FR" altLang="zh-CN" dirty="0">
-                <a:latin typeface="Arial" panose="020B0604020202020204" pitchFamily="34" charset="0"/>
-                <a:cs typeface="Arial" panose="020B0604020202020204" pitchFamily="34" charset="0"/>
-              </a:rPr>
-              <a:t>500 10-ms frames per SNR point</a:t>
-            </a:r>
-            <a:endParaRPr lang="en-US" altLang="zh-CN" sz="1800" dirty="0">
-              <a:latin typeface="Arial" panose="020B0604020202020204" pitchFamily="34" charset="0"/>
-              <a:cs typeface="Arial" panose="020B0604020202020204" pitchFamily="34" charset="0"/>
-            </a:endParaRPr>
-          </a:p>
-        </p:txBody>
-      </p:sp>
-      <p:sp>
-        <p:nvSpPr>
-          <p:cNvPr id="8" name="文本框 7">
-            <a:extLst>
-              <a:ext uri="{FF2B5EF4-FFF2-40B4-BE49-F238E27FC236}">
-                <a16:creationId xmlns:a16="http://schemas.microsoft.com/office/drawing/2014/main" id="{5A54DFC8-F30F-7A57-6700-FF7C264870FC}"/>
-              </a:ext>
-            </a:extLst>
-          </p:cNvPr>
-          <p:cNvSpPr txBox="1"/>
-          <p:nvPr/>
-        </p:nvSpPr>
-        <p:spPr>
-          <a:xfrm>
-            <a:off x="2427110" y="3895864"/>
-            <a:ext cx="7337778" cy="307777"/>
-          </a:xfrm>
-          <a:prstGeom prst="rect">
-            <a:avLst/>
-          </a:prstGeom>
-          <a:noFill/>
-        </p:spPr>
-        <p:txBody>
-          <a:bodyPr wrap="square">
-            <a:spAutoFit/>
-          </a:bodyPr>
-          <a:lstStyle/>
-          <a:p>
-            <a:pPr algn="ctr"/>
-            <a:r>
-              <a:rPr lang="en-US" altLang="zh-CN" sz="1400" dirty="0">
-                <a:latin typeface="Arial" panose="020B0604020202020204" pitchFamily="34" charset="0"/>
-                <a:cs typeface="Arial" panose="020B0604020202020204" pitchFamily="34" charset="0"/>
-              </a:rPr>
-              <a:t>Figure 2:  Overview of the CSI-based downlink transmission and feedback framework</a:t>
-            </a:r>
-            <a:endParaRPr lang="zh-CN" altLang="en-US" sz="1400" dirty="0">
-              <a:latin typeface="Arial" panose="020B0604020202020204" pitchFamily="34" charset="0"/>
-              <a:cs typeface="Arial" panose="020B0604020202020204" pitchFamily="34" charset="0"/>
-            </a:endParaRPr>
-          </a:p>
-        </p:txBody>
-      </p:sp>
     </p:spTree>
     <p:extLst>
       <p:ext uri="{BB962C8B-B14F-4D97-AF65-F5344CB8AC3E}">
-        <p14:creationId xmlns:p14="http://schemas.microsoft.com/office/powerpoint/2010/main" val="1561402976"/>
+        <p14:creationId xmlns:p14="http://schemas.microsoft.com/office/powerpoint/2010/main" val="759488176"/>
       </p:ext>
     </p:extLst>
   </p:cSld>
@@ -5796,7 +5329,7 @@
 </p:sld>
 </file>
 
-<file path=ppt/slides/slide5.xml><?xml version="1.0" encoding="utf-8"?>
+<file path=ppt/slides/slide12.xml><?xml version="1.0" encoding="utf-8"?>
 <p:sld xmlns:a="http://schemas.openxmlformats.org/drawingml/2006/main" xmlns:r="http://schemas.openxmlformats.org/officeDocument/2006/relationships" xmlns:p="http://schemas.openxmlformats.org/presentationml/2006/main" show="0">
   <p:cSld>
     <p:spTree>
@@ -5899,7 +5432,7 @@
                 <a:latin typeface="Arial" panose="020B0604020202020204" pitchFamily="34" charset="0"/>
                 <a:cs typeface="Arial" panose="020B0604020202020204" pitchFamily="34" charset="0"/>
               </a:rPr>
-              <a:t>5</a:t>
+              <a:t>12</a:t>
             </a:fld>
             <a:endParaRPr lang="zh-CN" altLang="en-US" dirty="0">
               <a:latin typeface="Arial" panose="020B0604020202020204" pitchFamily="34" charset="0"/>
@@ -5938,8 +5471,8 @@
           </a:prstGeom>
         </p:spPr>
       </p:pic>
-      <mc:AlternateContent xmlns:mc="http://schemas.openxmlformats.org/markup-compatibility/2006">
-        <mc:Choice xmlns:a14="http://schemas.microsoft.com/office/drawing/2010/main" Requires="a14">
+      <mc:AlternateContent xmlns:mc="http://schemas.openxmlformats.org/markup-compatibility/2006" xmlns:a14="http://schemas.microsoft.com/office/drawing/2010/main">
+        <mc:Choice Requires="a14">
           <p:sp>
             <p:nvSpPr>
               <p:cNvPr id="8" name="内容占位符 2">
@@ -6067,7 +5600,7 @@
             </p:txBody>
           </p:sp>
         </mc:Choice>
-        <mc:Fallback>
+        <mc:Fallback xmlns="">
           <p:sp>
             <p:nvSpPr>
               <p:cNvPr id="8" name="内容占位符 2">
@@ -6167,877 +5700,7 @@
 </p:sld>
 </file>
 
-<file path=ppt/slides/slide6.xml><?xml version="1.0" encoding="utf-8"?>
-<p:sld xmlns:a="http://schemas.openxmlformats.org/drawingml/2006/main" xmlns:r="http://schemas.openxmlformats.org/officeDocument/2006/relationships" xmlns:p="http://schemas.openxmlformats.org/presentationml/2006/main">
-  <p:cSld>
-    <p:spTree>
-      <p:nvGrpSpPr>
-        <p:cNvPr id="1" name="">
-          <a:extLst>
-            <a:ext uri="{FF2B5EF4-FFF2-40B4-BE49-F238E27FC236}">
-              <a16:creationId xmlns:a16="http://schemas.microsoft.com/office/drawing/2014/main" id="{A92A20DB-4E70-201D-943C-C88079E9EEB1}"/>
-            </a:ext>
-          </a:extLst>
-        </p:cNvPr>
-        <p:cNvGrpSpPr/>
-        <p:nvPr/>
-      </p:nvGrpSpPr>
-      <p:grpSpPr>
-        <a:xfrm>
-          <a:off x="0" y="0"/>
-          <a:ext cx="0" cy="0"/>
-          <a:chOff x="0" y="0"/>
-          <a:chExt cx="0" cy="0"/>
-        </a:xfrm>
-      </p:grpSpPr>
-      <p:sp>
-        <p:nvSpPr>
-          <p:cNvPr id="2" name="标题 1">
-            <a:extLst>
-              <a:ext uri="{FF2B5EF4-FFF2-40B4-BE49-F238E27FC236}">
-                <a16:creationId xmlns:a16="http://schemas.microsoft.com/office/drawing/2014/main" id="{2680CB3E-5CD4-FC3B-40CE-E42A67849EFD}"/>
-              </a:ext>
-            </a:extLst>
-          </p:cNvPr>
-          <p:cNvSpPr>
-            <a:spLocks noGrp="1"/>
-          </p:cNvSpPr>
-          <p:nvPr>
-            <p:ph type="title"/>
-          </p:nvPr>
-        </p:nvSpPr>
-        <p:spPr>
-          <a:xfrm>
-            <a:off x="554865" y="377422"/>
-            <a:ext cx="11082270" cy="607230"/>
-          </a:xfrm>
-        </p:spPr>
-        <p:txBody>
-          <a:bodyPr>
-            <a:normAutofit/>
-          </a:bodyPr>
-          <a:lstStyle/>
-          <a:p>
-            <a:r>
-              <a:rPr lang="en-US" altLang="zh-CN" sz="3200" dirty="0">
-                <a:latin typeface="Arial" panose="020B0604020202020204" pitchFamily="34" charset="0"/>
-                <a:cs typeface="Arial" panose="020B0604020202020204" pitchFamily="34" charset="0"/>
-              </a:rPr>
-              <a:t>Baseline Link Adaptation</a:t>
-            </a:r>
-            <a:endParaRPr lang="zh-CN" altLang="en-US" sz="3200" dirty="0">
-              <a:latin typeface="Arial" panose="020B0604020202020204" pitchFamily="34" charset="0"/>
-              <a:cs typeface="Arial" panose="020B0604020202020204" pitchFamily="34" charset="0"/>
-            </a:endParaRPr>
-          </a:p>
-        </p:txBody>
-      </p:sp>
-      <p:sp>
-        <p:nvSpPr>
-          <p:cNvPr id="5" name="灯片编号占位符 4">
-            <a:extLst>
-              <a:ext uri="{FF2B5EF4-FFF2-40B4-BE49-F238E27FC236}">
-                <a16:creationId xmlns:a16="http://schemas.microsoft.com/office/drawing/2014/main" id="{BE73DD59-7444-BA95-A818-A6FA9A53EF98}"/>
-              </a:ext>
-            </a:extLst>
-          </p:cNvPr>
-          <p:cNvSpPr>
-            <a:spLocks noGrp="1"/>
-          </p:cNvSpPr>
-          <p:nvPr>
-            <p:ph type="sldNum" sz="quarter" idx="12"/>
-          </p:nvPr>
-        </p:nvSpPr>
-        <p:spPr>
-          <a:xfrm>
-            <a:off x="8610599" y="6356350"/>
-            <a:ext cx="3026535" cy="365125"/>
-          </a:xfrm>
-        </p:spPr>
-        <p:txBody>
-          <a:bodyPr/>
-          <a:lstStyle/>
-          <a:p>
-            <a:r>
-              <a:rPr lang="en-US" altLang="zh-CN" dirty="0">
-                <a:latin typeface="Arial" panose="020B0604020202020204" pitchFamily="34" charset="0"/>
-                <a:cs typeface="Arial" panose="020B0604020202020204" pitchFamily="34" charset="0"/>
-              </a:rPr>
-              <a:t>MIMO Techniques in 5/6G     </a:t>
-            </a:r>
-            <a:fld id="{95B778F4-F869-49EC-876F-75AABD7B5BBF}" type="slidenum">
-              <a:rPr lang="zh-CN" altLang="en-US" smtClean="0">
-                <a:latin typeface="Arial" panose="020B0604020202020204" pitchFamily="34" charset="0"/>
-                <a:cs typeface="Arial" panose="020B0604020202020204" pitchFamily="34" charset="0"/>
-              </a:rPr>
-              <a:t>6</a:t>
-            </a:fld>
-            <a:endParaRPr lang="zh-CN" altLang="en-US" dirty="0">
-              <a:latin typeface="Arial" panose="020B0604020202020204" pitchFamily="34" charset="0"/>
-              <a:cs typeface="Arial" panose="020B0604020202020204" pitchFamily="34" charset="0"/>
-            </a:endParaRPr>
-          </a:p>
-        </p:txBody>
-      </p:sp>
-      <p:pic>
-        <p:nvPicPr>
-          <p:cNvPr id="7" name="图片 6">
-            <a:extLst>
-              <a:ext uri="{FF2B5EF4-FFF2-40B4-BE49-F238E27FC236}">
-                <a16:creationId xmlns:a16="http://schemas.microsoft.com/office/drawing/2014/main" id="{90CDD9EE-1848-5023-CA65-68B3C5A0F289}"/>
-              </a:ext>
-            </a:extLst>
-          </p:cNvPr>
-          <p:cNvPicPr>
-            <a:picLocks noChangeAspect="1"/>
-          </p:cNvPicPr>
-          <p:nvPr/>
-        </p:nvPicPr>
-        <p:blipFill>
-          <a:blip r:embed="rId3"/>
-          <a:stretch>
-            <a:fillRect/>
-          </a:stretch>
-        </p:blipFill>
-        <p:spPr>
-          <a:xfrm>
-            <a:off x="1110942" y="984652"/>
-            <a:ext cx="9180350" cy="5248723"/>
-          </a:xfrm>
-          <a:prstGeom prst="rect">
-            <a:avLst/>
-          </a:prstGeom>
-        </p:spPr>
-      </p:pic>
-      <p:sp>
-        <p:nvSpPr>
-          <p:cNvPr id="9" name="文本框 8">
-            <a:extLst>
-              <a:ext uri="{FF2B5EF4-FFF2-40B4-BE49-F238E27FC236}">
-                <a16:creationId xmlns:a16="http://schemas.microsoft.com/office/drawing/2014/main" id="{A91B3358-24C7-5D47-E89F-D91A6B15FE1C}"/>
-              </a:ext>
-            </a:extLst>
-          </p:cNvPr>
-          <p:cNvSpPr txBox="1"/>
-          <p:nvPr/>
-        </p:nvSpPr>
-        <p:spPr>
-          <a:xfrm>
-            <a:off x="3263511" y="6172801"/>
-            <a:ext cx="4875212" cy="307777"/>
-          </a:xfrm>
-          <a:prstGeom prst="rect">
-            <a:avLst/>
-          </a:prstGeom>
-          <a:noFill/>
-        </p:spPr>
-        <p:txBody>
-          <a:bodyPr wrap="square">
-            <a:spAutoFit/>
-          </a:bodyPr>
-          <a:lstStyle/>
-          <a:p>
-            <a:pPr algn="ctr"/>
-            <a:r>
-              <a:rPr lang="en-US" altLang="zh-CN" sz="1400" dirty="0">
-                <a:latin typeface="Arial" panose="020B0604020202020204" pitchFamily="34" charset="0"/>
-                <a:cs typeface="Arial" panose="020B0604020202020204" pitchFamily="34" charset="0"/>
-              </a:rPr>
-              <a:t>Figure 3:  CSI-driven link adaptation </a:t>
-            </a:r>
-            <a:r>
-              <a:rPr lang="en-US" altLang="zh-CN" sz="1400" dirty="0" err="1">
-                <a:latin typeface="Arial" panose="020B0604020202020204" pitchFamily="34" charset="0"/>
-                <a:cs typeface="Arial" panose="020B0604020202020204" pitchFamily="34" charset="0"/>
-              </a:rPr>
-              <a:t>behaviour</a:t>
-            </a:r>
-            <a:r>
-              <a:rPr lang="en-US" altLang="zh-CN" sz="1400" dirty="0">
-                <a:latin typeface="Arial" panose="020B0604020202020204" pitchFamily="34" charset="0"/>
-                <a:cs typeface="Arial" panose="020B0604020202020204" pitchFamily="34" charset="0"/>
-              </a:rPr>
-              <a:t> across SNR</a:t>
-            </a:r>
-            <a:endParaRPr lang="zh-CN" altLang="en-US" sz="1400" dirty="0">
-              <a:latin typeface="Arial" panose="020B0604020202020204" pitchFamily="34" charset="0"/>
-              <a:cs typeface="Arial" panose="020B0604020202020204" pitchFamily="34" charset="0"/>
-            </a:endParaRPr>
-          </a:p>
-        </p:txBody>
-      </p:sp>
-    </p:spTree>
-    <p:extLst>
-      <p:ext uri="{BB962C8B-B14F-4D97-AF65-F5344CB8AC3E}">
-        <p14:creationId xmlns:p14="http://schemas.microsoft.com/office/powerpoint/2010/main" val="3573729426"/>
-      </p:ext>
-    </p:extLst>
-  </p:cSld>
-  <p:clrMapOvr>
-    <a:masterClrMapping/>
-  </p:clrMapOvr>
-</p:sld>
-</file>
-
-<file path=ppt/slides/slide7.xml><?xml version="1.0" encoding="utf-8"?>
-<p:sld xmlns:a="http://schemas.openxmlformats.org/drawingml/2006/main" xmlns:r="http://schemas.openxmlformats.org/officeDocument/2006/relationships" xmlns:p="http://schemas.openxmlformats.org/presentationml/2006/main">
-  <p:cSld>
-    <p:spTree>
-      <p:nvGrpSpPr>
-        <p:cNvPr id="1" name="">
-          <a:extLst>
-            <a:ext uri="{FF2B5EF4-FFF2-40B4-BE49-F238E27FC236}">
-              <a16:creationId xmlns:a16="http://schemas.microsoft.com/office/drawing/2014/main" id="{BC601B16-EE68-09D0-7C57-A8CCF77BA30D}"/>
-            </a:ext>
-          </a:extLst>
-        </p:cNvPr>
-        <p:cNvGrpSpPr/>
-        <p:nvPr/>
-      </p:nvGrpSpPr>
-      <p:grpSpPr>
-        <a:xfrm>
-          <a:off x="0" y="0"/>
-          <a:ext cx="0" cy="0"/>
-          <a:chOff x="0" y="0"/>
-          <a:chExt cx="0" cy="0"/>
-        </a:xfrm>
-      </p:grpSpPr>
-      <p:sp>
-        <p:nvSpPr>
-          <p:cNvPr id="2" name="标题 1">
-            <a:extLst>
-              <a:ext uri="{FF2B5EF4-FFF2-40B4-BE49-F238E27FC236}">
-                <a16:creationId xmlns:a16="http://schemas.microsoft.com/office/drawing/2014/main" id="{71E24783-486D-2923-D66A-FA5A73D1DA15}"/>
-              </a:ext>
-            </a:extLst>
-          </p:cNvPr>
-          <p:cNvSpPr>
-            <a:spLocks noGrp="1"/>
-          </p:cNvSpPr>
-          <p:nvPr>
-            <p:ph type="title"/>
-          </p:nvPr>
-        </p:nvSpPr>
-        <p:spPr>
-          <a:xfrm>
-            <a:off x="554865" y="377422"/>
-            <a:ext cx="11082270" cy="607230"/>
-          </a:xfrm>
-        </p:spPr>
-        <p:txBody>
-          <a:bodyPr>
-            <a:normAutofit/>
-          </a:bodyPr>
-          <a:lstStyle/>
-          <a:p>
-            <a:r>
-              <a:rPr lang="en-US" altLang="zh-CN" sz="3200" dirty="0">
-                <a:latin typeface="Arial" panose="020B0604020202020204" pitchFamily="34" charset="0"/>
-                <a:cs typeface="Arial" panose="020B0604020202020204" pitchFamily="34" charset="0"/>
-              </a:rPr>
-              <a:t>CSI Reporting Periodicity</a:t>
-            </a:r>
-            <a:endParaRPr lang="zh-CN" altLang="en-US" sz="3200" dirty="0">
-              <a:latin typeface="Arial" panose="020B0604020202020204" pitchFamily="34" charset="0"/>
-              <a:cs typeface="Arial" panose="020B0604020202020204" pitchFamily="34" charset="0"/>
-            </a:endParaRPr>
-          </a:p>
-        </p:txBody>
-      </p:sp>
-      <p:sp>
-        <p:nvSpPr>
-          <p:cNvPr id="4" name="页脚占位符 3">
-            <a:extLst>
-              <a:ext uri="{FF2B5EF4-FFF2-40B4-BE49-F238E27FC236}">
-                <a16:creationId xmlns:a16="http://schemas.microsoft.com/office/drawing/2014/main" id="{AA400AA7-8656-DE97-BDE2-14A17D165EE6}"/>
-              </a:ext>
-            </a:extLst>
-          </p:cNvPr>
-          <p:cNvSpPr>
-            <a:spLocks noGrp="1"/>
-          </p:cNvSpPr>
-          <p:nvPr>
-            <p:ph type="ftr" sz="quarter" idx="11"/>
-          </p:nvPr>
-        </p:nvSpPr>
-        <p:spPr>
-          <a:xfrm>
-            <a:off x="554865" y="6356350"/>
-            <a:ext cx="11082270" cy="365125"/>
-          </a:xfrm>
-        </p:spPr>
-        <p:txBody>
-          <a:bodyPr/>
-          <a:lstStyle/>
-          <a:p>
-            <a:pPr algn="l"/>
-            <a:endParaRPr lang="zh-CN" altLang="en-US" dirty="0">
-              <a:latin typeface="Arial" panose="020B0604020202020204" pitchFamily="34" charset="0"/>
-              <a:cs typeface="Arial" panose="020B0604020202020204" pitchFamily="34" charset="0"/>
-            </a:endParaRPr>
-          </a:p>
-        </p:txBody>
-      </p:sp>
-      <p:sp>
-        <p:nvSpPr>
-          <p:cNvPr id="5" name="灯片编号占位符 4">
-            <a:extLst>
-              <a:ext uri="{FF2B5EF4-FFF2-40B4-BE49-F238E27FC236}">
-                <a16:creationId xmlns:a16="http://schemas.microsoft.com/office/drawing/2014/main" id="{BA624365-6944-5A89-9BBD-8A08E62953EE}"/>
-              </a:ext>
-            </a:extLst>
-          </p:cNvPr>
-          <p:cNvSpPr>
-            <a:spLocks noGrp="1"/>
-          </p:cNvSpPr>
-          <p:nvPr>
-            <p:ph type="sldNum" sz="quarter" idx="12"/>
-          </p:nvPr>
-        </p:nvSpPr>
-        <p:spPr>
-          <a:xfrm>
-            <a:off x="8610599" y="6356350"/>
-            <a:ext cx="3026535" cy="365125"/>
-          </a:xfrm>
-        </p:spPr>
-        <p:txBody>
-          <a:bodyPr/>
-          <a:lstStyle/>
-          <a:p>
-            <a:r>
-              <a:rPr lang="en-US" altLang="zh-CN" dirty="0">
-                <a:latin typeface="Arial" panose="020B0604020202020204" pitchFamily="34" charset="0"/>
-                <a:cs typeface="Arial" panose="020B0604020202020204" pitchFamily="34" charset="0"/>
-              </a:rPr>
-              <a:t>MIMO Techniques in 5/6G     </a:t>
-            </a:r>
-            <a:fld id="{95B778F4-F869-49EC-876F-75AABD7B5BBF}" type="slidenum">
-              <a:rPr lang="zh-CN" altLang="en-US" smtClean="0">
-                <a:latin typeface="Arial" panose="020B0604020202020204" pitchFamily="34" charset="0"/>
-                <a:cs typeface="Arial" panose="020B0604020202020204" pitchFamily="34" charset="0"/>
-              </a:rPr>
-              <a:t>7</a:t>
-            </a:fld>
-            <a:endParaRPr lang="zh-CN" altLang="en-US" dirty="0">
-              <a:latin typeface="Arial" panose="020B0604020202020204" pitchFamily="34" charset="0"/>
-              <a:cs typeface="Arial" panose="020B0604020202020204" pitchFamily="34" charset="0"/>
-            </a:endParaRPr>
-          </a:p>
-        </p:txBody>
-      </p:sp>
-      <p:pic>
-        <p:nvPicPr>
-          <p:cNvPr id="10" name="图片 9">
-            <a:extLst>
-              <a:ext uri="{FF2B5EF4-FFF2-40B4-BE49-F238E27FC236}">
-                <a16:creationId xmlns:a16="http://schemas.microsoft.com/office/drawing/2014/main" id="{6466A5D5-B6BF-FC2E-FEE6-B485F053C53D}"/>
-              </a:ext>
-            </a:extLst>
-          </p:cNvPr>
-          <p:cNvPicPr>
-            <a:picLocks noChangeAspect="1"/>
-          </p:cNvPicPr>
-          <p:nvPr/>
-        </p:nvPicPr>
-        <p:blipFill>
-          <a:blip r:embed="rId3"/>
-          <a:stretch>
-            <a:fillRect/>
-          </a:stretch>
-        </p:blipFill>
-        <p:spPr>
-          <a:xfrm>
-            <a:off x="1203563" y="1031175"/>
-            <a:ext cx="9630328" cy="5325175"/>
-          </a:xfrm>
-          <a:prstGeom prst="rect">
-            <a:avLst/>
-          </a:prstGeom>
-        </p:spPr>
-      </p:pic>
-      <p:sp>
-        <p:nvSpPr>
-          <p:cNvPr id="3" name="文本框 2">
-            <a:extLst>
-              <a:ext uri="{FF2B5EF4-FFF2-40B4-BE49-F238E27FC236}">
-                <a16:creationId xmlns:a16="http://schemas.microsoft.com/office/drawing/2014/main" id="{B89FC807-3165-C39D-8703-41CA4F24659C}"/>
-              </a:ext>
-            </a:extLst>
-          </p:cNvPr>
-          <p:cNvSpPr txBox="1"/>
-          <p:nvPr/>
-        </p:nvSpPr>
-        <p:spPr>
-          <a:xfrm>
-            <a:off x="1280836" y="6309827"/>
-            <a:ext cx="9630328" cy="307777"/>
-          </a:xfrm>
-          <a:prstGeom prst="rect">
-            <a:avLst/>
-          </a:prstGeom>
-          <a:noFill/>
-        </p:spPr>
-        <p:txBody>
-          <a:bodyPr wrap="square">
-            <a:spAutoFit/>
-          </a:bodyPr>
-          <a:lstStyle/>
-          <a:p>
-            <a:pPr algn="ctr"/>
-            <a:r>
-              <a:rPr lang="en-US" altLang="zh-CN" sz="1400" dirty="0">
-                <a:latin typeface="Arial" panose="020B0604020202020204" pitchFamily="34" charset="0"/>
-                <a:cs typeface="Arial" panose="020B0604020202020204" pitchFamily="34" charset="0"/>
-              </a:rPr>
-              <a:t>Figure 4:  Downlink throughput performance under different CSI reporting periods</a:t>
-            </a:r>
-            <a:endParaRPr lang="zh-CN" altLang="en-US" sz="1400" dirty="0">
-              <a:latin typeface="Arial" panose="020B0604020202020204" pitchFamily="34" charset="0"/>
-              <a:cs typeface="Arial" panose="020B0604020202020204" pitchFamily="34" charset="0"/>
-            </a:endParaRPr>
-          </a:p>
-        </p:txBody>
-      </p:sp>
-    </p:spTree>
-    <p:extLst>
-      <p:ext uri="{BB962C8B-B14F-4D97-AF65-F5344CB8AC3E}">
-        <p14:creationId xmlns:p14="http://schemas.microsoft.com/office/powerpoint/2010/main" val="999303387"/>
-      </p:ext>
-    </p:extLst>
-  </p:cSld>
-  <p:clrMapOvr>
-    <a:masterClrMapping/>
-  </p:clrMapOvr>
-</p:sld>
-</file>
-
-<file path=ppt/slides/slide8.xml><?xml version="1.0" encoding="utf-8"?>
-<p:sld xmlns:a="http://schemas.openxmlformats.org/drawingml/2006/main" xmlns:r="http://schemas.openxmlformats.org/officeDocument/2006/relationships" xmlns:p="http://schemas.openxmlformats.org/presentationml/2006/main">
-  <p:cSld>
-    <p:spTree>
-      <p:nvGrpSpPr>
-        <p:cNvPr id="1" name="">
-          <a:extLst>
-            <a:ext uri="{FF2B5EF4-FFF2-40B4-BE49-F238E27FC236}">
-              <a16:creationId xmlns:a16="http://schemas.microsoft.com/office/drawing/2014/main" id="{1F3A3E98-5DBF-BC03-3769-A5E97FA7029D}"/>
-            </a:ext>
-          </a:extLst>
-        </p:cNvPr>
-        <p:cNvGrpSpPr/>
-        <p:nvPr/>
-      </p:nvGrpSpPr>
-      <p:grpSpPr>
-        <a:xfrm>
-          <a:off x="0" y="0"/>
-          <a:ext cx="0" cy="0"/>
-          <a:chOff x="0" y="0"/>
-          <a:chExt cx="0" cy="0"/>
-        </a:xfrm>
-      </p:grpSpPr>
-      <p:sp>
-        <p:nvSpPr>
-          <p:cNvPr id="2" name="标题 1">
-            <a:extLst>
-              <a:ext uri="{FF2B5EF4-FFF2-40B4-BE49-F238E27FC236}">
-                <a16:creationId xmlns:a16="http://schemas.microsoft.com/office/drawing/2014/main" id="{79B63D06-D3AB-9D4C-4ABA-6AC83B9E9DA9}"/>
-              </a:ext>
-            </a:extLst>
-          </p:cNvPr>
-          <p:cNvSpPr>
-            <a:spLocks noGrp="1"/>
-          </p:cNvSpPr>
-          <p:nvPr>
-            <p:ph type="title"/>
-          </p:nvPr>
-        </p:nvSpPr>
-        <p:spPr>
-          <a:xfrm>
-            <a:off x="554865" y="377422"/>
-            <a:ext cx="11082270" cy="607230"/>
-          </a:xfrm>
-        </p:spPr>
-        <p:txBody>
-          <a:bodyPr>
-            <a:normAutofit/>
-          </a:bodyPr>
-          <a:lstStyle/>
-          <a:p>
-            <a:r>
-              <a:rPr lang="en-US" altLang="zh-CN" sz="3200" dirty="0">
-                <a:latin typeface="Arial" panose="020B0604020202020204" pitchFamily="34" charset="0"/>
-                <a:cs typeface="Arial" panose="020B0604020202020204" pitchFamily="34" charset="0"/>
-              </a:rPr>
-              <a:t>Contributions and Future Work</a:t>
-            </a:r>
-            <a:endParaRPr lang="zh-CN" altLang="en-US" sz="3200" dirty="0">
-              <a:latin typeface="Arial" panose="020B0604020202020204" pitchFamily="34" charset="0"/>
-              <a:cs typeface="Arial" panose="020B0604020202020204" pitchFamily="34" charset="0"/>
-            </a:endParaRPr>
-          </a:p>
-        </p:txBody>
-      </p:sp>
-      <p:sp>
-        <p:nvSpPr>
-          <p:cNvPr id="4" name="页脚占位符 3">
-            <a:extLst>
-              <a:ext uri="{FF2B5EF4-FFF2-40B4-BE49-F238E27FC236}">
-                <a16:creationId xmlns:a16="http://schemas.microsoft.com/office/drawing/2014/main" id="{8FBDDDE6-3314-C65A-5E07-6265FD29BD0B}"/>
-              </a:ext>
-            </a:extLst>
-          </p:cNvPr>
-          <p:cNvSpPr>
-            <a:spLocks noGrp="1"/>
-          </p:cNvSpPr>
-          <p:nvPr>
-            <p:ph type="ftr" sz="quarter" idx="11"/>
-          </p:nvPr>
-        </p:nvSpPr>
-        <p:spPr>
-          <a:xfrm>
-            <a:off x="554865" y="6356350"/>
-            <a:ext cx="11082270" cy="365125"/>
-          </a:xfrm>
-        </p:spPr>
-        <p:txBody>
-          <a:bodyPr/>
-          <a:lstStyle/>
-          <a:p>
-            <a:pPr algn="l"/>
-            <a:endParaRPr lang="zh-CN" altLang="en-US" dirty="0">
-              <a:latin typeface="Arial" panose="020B0604020202020204" pitchFamily="34" charset="0"/>
-              <a:cs typeface="Arial" panose="020B0604020202020204" pitchFamily="34" charset="0"/>
-            </a:endParaRPr>
-          </a:p>
-        </p:txBody>
-      </p:sp>
-      <p:sp>
-        <p:nvSpPr>
-          <p:cNvPr id="5" name="灯片编号占位符 4">
-            <a:extLst>
-              <a:ext uri="{FF2B5EF4-FFF2-40B4-BE49-F238E27FC236}">
-                <a16:creationId xmlns:a16="http://schemas.microsoft.com/office/drawing/2014/main" id="{1022D68E-A487-3A32-3077-685437586D06}"/>
-              </a:ext>
-            </a:extLst>
-          </p:cNvPr>
-          <p:cNvSpPr>
-            <a:spLocks noGrp="1"/>
-          </p:cNvSpPr>
-          <p:nvPr>
-            <p:ph type="sldNum" sz="quarter" idx="12"/>
-          </p:nvPr>
-        </p:nvSpPr>
-        <p:spPr>
-          <a:xfrm>
-            <a:off x="8610599" y="6356350"/>
-            <a:ext cx="3026535" cy="365125"/>
-          </a:xfrm>
-        </p:spPr>
-        <p:txBody>
-          <a:bodyPr/>
-          <a:lstStyle/>
-          <a:p>
-            <a:r>
-              <a:rPr lang="en-US" altLang="zh-CN" dirty="0">
-                <a:latin typeface="Arial" panose="020B0604020202020204" pitchFamily="34" charset="0"/>
-                <a:cs typeface="Arial" panose="020B0604020202020204" pitchFamily="34" charset="0"/>
-              </a:rPr>
-              <a:t>MIMO Techniques in 5/6G     </a:t>
-            </a:r>
-            <a:fld id="{95B778F4-F869-49EC-876F-75AABD7B5BBF}" type="slidenum">
-              <a:rPr lang="zh-CN" altLang="en-US" smtClean="0">
-                <a:latin typeface="Arial" panose="020B0604020202020204" pitchFamily="34" charset="0"/>
-                <a:cs typeface="Arial" panose="020B0604020202020204" pitchFamily="34" charset="0"/>
-              </a:rPr>
-              <a:t>8</a:t>
-            </a:fld>
-            <a:endParaRPr lang="zh-CN" altLang="en-US" dirty="0">
-              <a:latin typeface="Arial" panose="020B0604020202020204" pitchFamily="34" charset="0"/>
-              <a:cs typeface="Arial" panose="020B0604020202020204" pitchFamily="34" charset="0"/>
-            </a:endParaRPr>
-          </a:p>
-        </p:txBody>
-      </p:sp>
-      <p:sp>
-        <p:nvSpPr>
-          <p:cNvPr id="6" name="文本框 5">
-            <a:extLst>
-              <a:ext uri="{FF2B5EF4-FFF2-40B4-BE49-F238E27FC236}">
-                <a16:creationId xmlns:a16="http://schemas.microsoft.com/office/drawing/2014/main" id="{5A95C3D1-7200-AC8D-C0A1-54A5E2ADDD31}"/>
-              </a:ext>
-            </a:extLst>
-          </p:cNvPr>
-          <p:cNvSpPr txBox="1"/>
-          <p:nvPr/>
-        </p:nvSpPr>
-        <p:spPr>
-          <a:xfrm>
-            <a:off x="554865" y="1324860"/>
-            <a:ext cx="11023242" cy="1703030"/>
-          </a:xfrm>
-          <a:prstGeom prst="rect">
-            <a:avLst/>
-          </a:prstGeom>
-          <a:noFill/>
-        </p:spPr>
-        <p:txBody>
-          <a:bodyPr wrap="square">
-            <a:spAutoFit/>
-          </a:bodyPr>
-          <a:lstStyle/>
-          <a:p>
-            <a:pPr>
-              <a:lnSpc>
-                <a:spcPct val="150000"/>
-              </a:lnSpc>
-            </a:pPr>
-            <a:r>
-              <a:rPr lang="en-US" altLang="zh-CN" b="1" dirty="0">
-                <a:latin typeface="Arial" panose="020B0604020202020204" pitchFamily="34" charset="0"/>
-                <a:cs typeface="Arial" panose="020B0604020202020204" pitchFamily="34" charset="0"/>
-              </a:rPr>
-              <a:t>Contribution: </a:t>
-            </a:r>
-          </a:p>
-          <a:p>
-            <a:pPr marL="285750" indent="-285750">
-              <a:lnSpc>
-                <a:spcPct val="150000"/>
-              </a:lnSpc>
-              <a:buFont typeface="Arial" panose="020B0604020202020204" pitchFamily="34" charset="0"/>
-              <a:buChar char="•"/>
-            </a:pPr>
-            <a:r>
-              <a:rPr lang="en-US" altLang="zh-CN" sz="1800" dirty="0">
-                <a:latin typeface="Arial" panose="020B0604020202020204" pitchFamily="34" charset="0"/>
-                <a:cs typeface="Arial" panose="020B0604020202020204" pitchFamily="34" charset="0"/>
-              </a:rPr>
-              <a:t>Built a 3GPP-aligned </a:t>
-            </a:r>
-            <a:r>
-              <a:rPr lang="en-US" altLang="zh-CN" sz="1800" dirty="0">
-                <a:solidFill>
-                  <a:srgbClr val="0070C0"/>
-                </a:solidFill>
-                <a:latin typeface="Arial" panose="020B0604020202020204" pitchFamily="34" charset="0"/>
-                <a:cs typeface="Arial" panose="020B0604020202020204" pitchFamily="34" charset="0"/>
-              </a:rPr>
-              <a:t>simulation framework </a:t>
-            </a:r>
-            <a:r>
-              <a:rPr lang="en-US" altLang="zh-CN" sz="1800" dirty="0">
-                <a:latin typeface="Arial" panose="020B0604020202020204" pitchFamily="34" charset="0"/>
-                <a:cs typeface="Arial" panose="020B0604020202020204" pitchFamily="34" charset="0"/>
-              </a:rPr>
-              <a:t>for CSI-driven downlink MIMO</a:t>
-            </a:r>
-          </a:p>
-          <a:p>
-            <a:pPr marL="285750" indent="-285750">
-              <a:lnSpc>
-                <a:spcPct val="150000"/>
-              </a:lnSpc>
-              <a:buFont typeface="Arial" panose="020B0604020202020204" pitchFamily="34" charset="0"/>
-              <a:buChar char="•"/>
-            </a:pPr>
-            <a:r>
-              <a:rPr lang="en-US" altLang="zh-CN" sz="1800" dirty="0">
-                <a:latin typeface="Arial" panose="020B0604020202020204" pitchFamily="34" charset="0"/>
-                <a:cs typeface="Arial" panose="020B0604020202020204" pitchFamily="34" charset="0"/>
-              </a:rPr>
-              <a:t>Quantified </a:t>
-            </a:r>
-            <a:r>
-              <a:rPr lang="en-US" altLang="zh-CN" sz="1800" dirty="0">
-                <a:solidFill>
-                  <a:srgbClr val="0070C0"/>
-                </a:solidFill>
-                <a:latin typeface="Arial" panose="020B0604020202020204" pitchFamily="34" charset="0"/>
-                <a:cs typeface="Arial" panose="020B0604020202020204" pitchFamily="34" charset="0"/>
-              </a:rPr>
-              <a:t>throughput trends </a:t>
-            </a:r>
-            <a:r>
-              <a:rPr lang="en-US" altLang="zh-CN" sz="1800" dirty="0">
-                <a:latin typeface="Arial" panose="020B0604020202020204" pitchFamily="34" charset="0"/>
-                <a:cs typeface="Arial" panose="020B0604020202020204" pitchFamily="34" charset="0"/>
-              </a:rPr>
-              <a:t>under MIMO configuration, mobility, and CSI reporting-period changes</a:t>
-            </a:r>
-          </a:p>
-          <a:p>
-            <a:pPr marL="285750" indent="-285750">
-              <a:lnSpc>
-                <a:spcPct val="150000"/>
-              </a:lnSpc>
-              <a:buFont typeface="Arial" panose="020B0604020202020204" pitchFamily="34" charset="0"/>
-              <a:buChar char="•"/>
-            </a:pPr>
-            <a:r>
-              <a:rPr lang="en-US" altLang="zh-CN" sz="1800" dirty="0">
-                <a:latin typeface="Arial" panose="020B0604020202020204" pitchFamily="34" charset="0"/>
-                <a:cs typeface="Arial" panose="020B0604020202020204" pitchFamily="34" charset="0"/>
-              </a:rPr>
-              <a:t>Identified the </a:t>
-            </a:r>
-            <a:r>
-              <a:rPr lang="en-US" altLang="zh-CN" sz="1800" dirty="0">
-                <a:solidFill>
-                  <a:srgbClr val="0070C0"/>
-                </a:solidFill>
-                <a:latin typeface="Arial" panose="020B0604020202020204" pitchFamily="34" charset="0"/>
-                <a:cs typeface="Arial" panose="020B0604020202020204" pitchFamily="34" charset="0"/>
-              </a:rPr>
-              <a:t>scenario-dependent benefits </a:t>
-            </a:r>
-            <a:r>
-              <a:rPr lang="en-US" altLang="zh-CN" sz="1800" dirty="0">
-                <a:latin typeface="Arial" panose="020B0604020202020204" pitchFamily="34" charset="0"/>
-                <a:cs typeface="Arial" panose="020B0604020202020204" pitchFamily="34" charset="0"/>
-              </a:rPr>
-              <a:t>of CSI reporting and discussed the trade-off</a:t>
-            </a:r>
-            <a:endParaRPr lang="en-US" altLang="zh-CN" sz="1800" dirty="0">
-              <a:solidFill>
-                <a:srgbClr val="0070C0"/>
-              </a:solidFill>
-              <a:latin typeface="Arial" panose="020B0604020202020204" pitchFamily="34" charset="0"/>
-              <a:cs typeface="Arial" panose="020B0604020202020204" pitchFamily="34" charset="0"/>
-            </a:endParaRPr>
-          </a:p>
-        </p:txBody>
-      </p:sp>
-      <p:sp>
-        <p:nvSpPr>
-          <p:cNvPr id="7" name="文本框 6">
-            <a:extLst>
-              <a:ext uri="{FF2B5EF4-FFF2-40B4-BE49-F238E27FC236}">
-                <a16:creationId xmlns:a16="http://schemas.microsoft.com/office/drawing/2014/main" id="{4D9A6B43-C5FA-6CD7-2929-388AC07827EA}"/>
-              </a:ext>
-            </a:extLst>
-          </p:cNvPr>
-          <p:cNvSpPr txBox="1"/>
-          <p:nvPr/>
-        </p:nvSpPr>
-        <p:spPr>
-          <a:xfrm>
-            <a:off x="613892" y="3492803"/>
-            <a:ext cx="11023242" cy="1703030"/>
-          </a:xfrm>
-          <a:prstGeom prst="rect">
-            <a:avLst/>
-          </a:prstGeom>
-          <a:noFill/>
-        </p:spPr>
-        <p:txBody>
-          <a:bodyPr wrap="square">
-            <a:spAutoFit/>
-          </a:bodyPr>
-          <a:lstStyle/>
-          <a:p>
-            <a:pPr>
-              <a:lnSpc>
-                <a:spcPct val="150000"/>
-              </a:lnSpc>
-            </a:pPr>
-            <a:r>
-              <a:rPr lang="en-US" altLang="zh-CN" b="1" dirty="0">
-                <a:latin typeface="Arial" panose="020B0604020202020204" pitchFamily="34" charset="0"/>
-                <a:cs typeface="Arial" panose="020B0604020202020204" pitchFamily="34" charset="0"/>
-              </a:rPr>
-              <a:t>Future work: </a:t>
-            </a:r>
-          </a:p>
-          <a:p>
-            <a:pPr marL="285750" indent="-285750">
-              <a:lnSpc>
-                <a:spcPct val="150000"/>
-              </a:lnSpc>
-              <a:buFont typeface="Arial" panose="020B0604020202020204" pitchFamily="34" charset="0"/>
-              <a:buChar char="•"/>
-            </a:pPr>
-            <a:r>
-              <a:rPr lang="en-US" altLang="zh-CN" sz="1800" dirty="0">
-                <a:latin typeface="Arial" panose="020B0604020202020204" pitchFamily="34" charset="0"/>
-                <a:cs typeface="Arial" panose="020B0604020202020204" pitchFamily="34" charset="0"/>
-              </a:rPr>
-              <a:t>Develop </a:t>
-            </a:r>
-            <a:r>
-              <a:rPr lang="en-US" altLang="zh-CN" sz="1800" dirty="0">
-                <a:solidFill>
-                  <a:srgbClr val="0070C0"/>
-                </a:solidFill>
-                <a:latin typeface="Arial" panose="020B0604020202020204" pitchFamily="34" charset="0"/>
-                <a:cs typeface="Arial" panose="020B0604020202020204" pitchFamily="34" charset="0"/>
-              </a:rPr>
-              <a:t>adaptive CSI reporting-period selection algorithms</a:t>
-            </a:r>
-          </a:p>
-          <a:p>
-            <a:pPr marL="285750" indent="-285750">
-              <a:lnSpc>
-                <a:spcPct val="150000"/>
-              </a:lnSpc>
-              <a:buFont typeface="Arial" panose="020B0604020202020204" pitchFamily="34" charset="0"/>
-              <a:buChar char="•"/>
-            </a:pPr>
-            <a:r>
-              <a:rPr lang="en-US" altLang="zh-CN" sz="1800" dirty="0">
-                <a:latin typeface="Arial" panose="020B0604020202020204" pitchFamily="34" charset="0"/>
-                <a:cs typeface="Arial" panose="020B0604020202020204" pitchFamily="34" charset="0"/>
-              </a:rPr>
-              <a:t>Explore </a:t>
-            </a:r>
-            <a:r>
-              <a:rPr lang="en-US" altLang="zh-CN" sz="1800" dirty="0">
-                <a:solidFill>
-                  <a:srgbClr val="0070C0"/>
-                </a:solidFill>
-                <a:latin typeface="Arial" panose="020B0604020202020204" pitchFamily="34" charset="0"/>
-                <a:cs typeface="Arial" panose="020B0604020202020204" pitchFamily="34" charset="0"/>
-              </a:rPr>
-              <a:t>AI-native</a:t>
-            </a:r>
-            <a:r>
-              <a:rPr lang="en-US" altLang="zh-CN" sz="1800" dirty="0">
-                <a:latin typeface="Arial" panose="020B0604020202020204" pitchFamily="34" charset="0"/>
-                <a:cs typeface="Arial" panose="020B0604020202020204" pitchFamily="34" charset="0"/>
-              </a:rPr>
-              <a:t> CSI management for future 6G systems</a:t>
-            </a:r>
-          </a:p>
-          <a:p>
-            <a:pPr marL="285750" indent="-285750">
-              <a:lnSpc>
-                <a:spcPct val="150000"/>
-              </a:lnSpc>
-              <a:buFont typeface="Arial" panose="020B0604020202020204" pitchFamily="34" charset="0"/>
-              <a:buChar char="•"/>
-            </a:pPr>
-            <a:r>
-              <a:rPr lang="en-US" altLang="zh-CN" dirty="0">
-                <a:latin typeface="Arial" panose="020B0604020202020204" pitchFamily="34" charset="0"/>
-                <a:cs typeface="Arial" panose="020B0604020202020204" pitchFamily="34" charset="0"/>
-              </a:rPr>
-              <a:t>Extend the simulation with HARQ and more realistic traffic / channel dynamics</a:t>
-            </a:r>
-          </a:p>
-        </p:txBody>
-      </p:sp>
-    </p:spTree>
-    <p:extLst>
-      <p:ext uri="{BB962C8B-B14F-4D97-AF65-F5344CB8AC3E}">
-        <p14:creationId xmlns:p14="http://schemas.microsoft.com/office/powerpoint/2010/main" val="2125488668"/>
-      </p:ext>
-    </p:extLst>
-  </p:cSld>
-  <p:clrMapOvr>
-    <a:masterClrMapping/>
-  </p:clrMapOvr>
-</p:sld>
-</file>
-
-<file path=ppt/slides/slide9.xml><?xml version="1.0" encoding="utf-8"?>
+<file path=ppt/slides/slide13.xml><?xml version="1.0" encoding="utf-8"?>
 <p:sld xmlns:a="http://schemas.openxmlformats.org/drawingml/2006/main" xmlns:r="http://schemas.openxmlformats.org/officeDocument/2006/relationships" xmlns:p="http://schemas.openxmlformats.org/presentationml/2006/main" show="0">
   <p:cSld>
     <p:spTree>
@@ -7077,7 +5740,7 @@
         </p:blipFill>
         <p:spPr>
           <a:xfrm>
-            <a:off x="1878826" y="2113184"/>
+            <a:off x="3023266" y="2124686"/>
             <a:ext cx="874398" cy="2169980"/>
           </a:xfrm>
           <a:prstGeom prst="rect">
@@ -7108,7 +5771,7 @@
         </p:blipFill>
         <p:spPr>
           <a:xfrm>
-            <a:off x="7193884" y="2746619"/>
+            <a:off x="8338324" y="2758121"/>
             <a:ext cx="613191" cy="903111"/>
           </a:xfrm>
           <a:prstGeom prst="rect">
@@ -7132,7 +5795,7 @@
         </p:nvCxnSpPr>
         <p:spPr>
           <a:xfrm>
-            <a:off x="3279421" y="2824968"/>
+            <a:off x="4423861" y="2836470"/>
             <a:ext cx="3355623" cy="0"/>
           </a:xfrm>
           <a:prstGeom prst="straightConnector1">
@@ -7174,7 +5837,7 @@
         </p:nvSpPr>
         <p:spPr>
           <a:xfrm>
-            <a:off x="4500403" y="2419135"/>
+            <a:off x="5644843" y="2430637"/>
             <a:ext cx="1078089" cy="338554"/>
           </a:xfrm>
           <a:prstGeom prst="rect">
@@ -7219,7 +5882,7 @@
         </p:nvCxnSpPr>
         <p:spPr>
           <a:xfrm flipH="1">
-            <a:off x="3279422" y="3380869"/>
+            <a:off x="4423862" y="3392371"/>
             <a:ext cx="3355622" cy="0"/>
           </a:xfrm>
           <a:prstGeom prst="straightConnector1">
@@ -7263,7 +5926,7 @@
         </p:nvCxnSpPr>
         <p:spPr>
           <a:xfrm>
-            <a:off x="3327400" y="3987724"/>
+            <a:off x="4471840" y="3999226"/>
             <a:ext cx="3307644" cy="0"/>
           </a:xfrm>
           <a:prstGeom prst="straightConnector1">
@@ -7305,7 +5968,7 @@
         </p:nvSpPr>
         <p:spPr>
           <a:xfrm>
-            <a:off x="3237828" y="3054849"/>
+            <a:off x="4382268" y="3066351"/>
             <a:ext cx="3603239" cy="338554"/>
           </a:xfrm>
           <a:prstGeom prst="rect">
@@ -7362,7 +6025,7 @@
         </p:nvSpPr>
         <p:spPr>
           <a:xfrm>
-            <a:off x="4500403" y="3623283"/>
+            <a:off x="5644843" y="3634785"/>
             <a:ext cx="1078089" cy="338554"/>
           </a:xfrm>
           <a:prstGeom prst="rect">
@@ -7405,7 +6068,7 @@
         </p:nvSpPr>
         <p:spPr>
           <a:xfrm>
-            <a:off x="1288349" y="4406937"/>
+            <a:off x="2432789" y="4418439"/>
             <a:ext cx="2055352" cy="338554"/>
           </a:xfrm>
           <a:prstGeom prst="rect">
@@ -7448,7 +6111,7 @@
         </p:nvSpPr>
         <p:spPr>
           <a:xfrm>
-            <a:off x="6395209" y="4406937"/>
+            <a:off x="7539649" y="4418439"/>
             <a:ext cx="2210539" cy="338554"/>
           </a:xfrm>
           <a:prstGeom prst="rect">
@@ -7481,6 +6144,2365 @@
     <p:extLst>
       <p:ext uri="{BB962C8B-B14F-4D97-AF65-F5344CB8AC3E}">
         <p14:creationId xmlns:p14="http://schemas.microsoft.com/office/powerpoint/2010/main" val="2235492382"/>
+      </p:ext>
+    </p:extLst>
+  </p:cSld>
+  <p:clrMapOvr>
+    <a:masterClrMapping/>
+  </p:clrMapOvr>
+</p:sld>
+</file>
+
+<file path=ppt/slides/slide2.xml><?xml version="1.0" encoding="utf-8"?>
+<p:sld xmlns:a="http://schemas.openxmlformats.org/drawingml/2006/main" xmlns:r="http://schemas.openxmlformats.org/officeDocument/2006/relationships" xmlns:p="http://schemas.openxmlformats.org/presentationml/2006/main">
+  <p:cSld>
+    <p:spTree>
+      <p:nvGrpSpPr>
+        <p:cNvPr id="1" name=""/>
+        <p:cNvGrpSpPr/>
+        <p:nvPr/>
+      </p:nvGrpSpPr>
+      <p:grpSpPr>
+        <a:xfrm>
+          <a:off x="0" y="0"/>
+          <a:ext cx="0" cy="0"/>
+          <a:chOff x="0" y="0"/>
+          <a:chExt cx="0" cy="0"/>
+        </a:xfrm>
+      </p:grpSpPr>
+      <p:sp>
+        <p:nvSpPr>
+          <p:cNvPr id="2" name="标题 1">
+            <a:extLst>
+              <a:ext uri="{FF2B5EF4-FFF2-40B4-BE49-F238E27FC236}">
+                <a16:creationId xmlns:a16="http://schemas.microsoft.com/office/drawing/2014/main" id="{3C1FF6A1-5B32-7043-B7C3-2D8B86A9C5FE}"/>
+              </a:ext>
+            </a:extLst>
+          </p:cNvPr>
+          <p:cNvSpPr>
+            <a:spLocks noGrp="1"/>
+          </p:cNvSpPr>
+          <p:nvPr>
+            <p:ph type="title"/>
+          </p:nvPr>
+        </p:nvSpPr>
+        <p:spPr>
+          <a:xfrm>
+            <a:off x="554865" y="377422"/>
+            <a:ext cx="11082270" cy="607230"/>
+          </a:xfrm>
+        </p:spPr>
+        <p:txBody>
+          <a:bodyPr>
+            <a:normAutofit/>
+          </a:bodyPr>
+          <a:lstStyle/>
+          <a:p>
+            <a:r>
+              <a:rPr lang="en-US" altLang="zh-CN" sz="3200" dirty="0">
+                <a:latin typeface="Arial" panose="020B0604020202020204" pitchFamily="34" charset="0"/>
+                <a:cs typeface="Arial" panose="020B0604020202020204" pitchFamily="34" charset="0"/>
+              </a:rPr>
+              <a:t>Project Objectives</a:t>
+            </a:r>
+            <a:endParaRPr lang="zh-CN" altLang="en-US" sz="3200" dirty="0">
+              <a:latin typeface="Arial" panose="020B0604020202020204" pitchFamily="34" charset="0"/>
+              <a:cs typeface="Arial" panose="020B0604020202020204" pitchFamily="34" charset="0"/>
+            </a:endParaRPr>
+          </a:p>
+        </p:txBody>
+      </p:sp>
+      <p:sp>
+        <p:nvSpPr>
+          <p:cNvPr id="3" name="内容占位符 2">
+            <a:extLst>
+              <a:ext uri="{FF2B5EF4-FFF2-40B4-BE49-F238E27FC236}">
+                <a16:creationId xmlns:a16="http://schemas.microsoft.com/office/drawing/2014/main" id="{88C4747E-D289-1B3A-35E7-C671D8866B08}"/>
+              </a:ext>
+            </a:extLst>
+          </p:cNvPr>
+          <p:cNvSpPr>
+            <a:spLocks noGrp="1"/>
+          </p:cNvSpPr>
+          <p:nvPr>
+            <p:ph idx="1"/>
+          </p:nvPr>
+        </p:nvSpPr>
+        <p:spPr>
+          <a:xfrm>
+            <a:off x="554865" y="1146220"/>
+            <a:ext cx="11082270" cy="5030743"/>
+          </a:xfrm>
+        </p:spPr>
+        <p:txBody>
+          <a:bodyPr>
+            <a:normAutofit/>
+          </a:bodyPr>
+          <a:lstStyle/>
+          <a:p>
+            <a:pPr>
+              <a:lnSpc>
+                <a:spcPct val="150000"/>
+              </a:lnSpc>
+            </a:pPr>
+            <a:r>
+              <a:rPr lang="en-US" altLang="zh-CN" sz="1800" dirty="0">
+                <a:latin typeface="Arial" panose="020B0604020202020204" pitchFamily="34" charset="0"/>
+                <a:cs typeface="Arial" panose="020B0604020202020204" pitchFamily="34" charset="0"/>
+              </a:rPr>
+              <a:t>Construct a </a:t>
+            </a:r>
+            <a:r>
+              <a:rPr lang="en-US" altLang="zh-CN" sz="1800" dirty="0">
+                <a:solidFill>
+                  <a:srgbClr val="0070C0"/>
+                </a:solidFill>
+                <a:latin typeface="Arial" panose="020B0604020202020204" pitchFamily="34" charset="0"/>
+                <a:cs typeface="Arial" panose="020B0604020202020204" pitchFamily="34" charset="0"/>
+              </a:rPr>
+              <a:t>3GPP-aligned</a:t>
+            </a:r>
+            <a:r>
+              <a:rPr lang="en-US" altLang="zh-CN" sz="1800" dirty="0">
+                <a:latin typeface="Arial" panose="020B0604020202020204" pitchFamily="34" charset="0"/>
+                <a:cs typeface="Arial" panose="020B0604020202020204" pitchFamily="34" charset="0"/>
+              </a:rPr>
+              <a:t> MATLAB 5G NR downlink MIMO link-level simulation model</a:t>
+            </a:r>
+          </a:p>
+          <a:p>
+            <a:pPr>
+              <a:lnSpc>
+                <a:spcPct val="150000"/>
+              </a:lnSpc>
+            </a:pPr>
+            <a:r>
+              <a:rPr lang="en-US" altLang="zh-CN" sz="1800" dirty="0">
+                <a:latin typeface="Arial" panose="020B0604020202020204" pitchFamily="34" charset="0"/>
+                <a:cs typeface="Arial" panose="020B0604020202020204" pitchFamily="34" charset="0"/>
+              </a:rPr>
+              <a:t>Study how </a:t>
+            </a:r>
+            <a:r>
+              <a:rPr lang="en-US" altLang="zh-CN" sz="1800" dirty="0">
+                <a:solidFill>
+                  <a:srgbClr val="0070C0"/>
+                </a:solidFill>
+                <a:latin typeface="Arial" panose="020B0604020202020204" pitchFamily="34" charset="0"/>
+                <a:cs typeface="Arial" panose="020B0604020202020204" pitchFamily="34" charset="0"/>
+              </a:rPr>
+              <a:t>CSI feedback </a:t>
+            </a:r>
+            <a:r>
+              <a:rPr lang="en-US" altLang="zh-CN" sz="1800" dirty="0">
+                <a:latin typeface="Arial" panose="020B0604020202020204" pitchFamily="34" charset="0"/>
+                <a:cs typeface="Arial" panose="020B0604020202020204" pitchFamily="34" charset="0"/>
+              </a:rPr>
+              <a:t>affects </a:t>
+            </a:r>
+            <a:r>
+              <a:rPr lang="en-US" altLang="zh-CN" sz="1800" dirty="0">
+                <a:solidFill>
+                  <a:srgbClr val="0070C0"/>
+                </a:solidFill>
+                <a:latin typeface="Arial" panose="020B0604020202020204" pitchFamily="34" charset="0"/>
+                <a:cs typeface="Arial" panose="020B0604020202020204" pitchFamily="34" charset="0"/>
+              </a:rPr>
+              <a:t>rank</a:t>
+            </a:r>
+            <a:r>
+              <a:rPr lang="en-US" altLang="zh-CN" sz="1800" dirty="0">
+                <a:latin typeface="Arial" panose="020B0604020202020204" pitchFamily="34" charset="0"/>
+                <a:cs typeface="Arial" panose="020B0604020202020204" pitchFamily="34" charset="0"/>
+              </a:rPr>
+              <a:t>, </a:t>
+            </a:r>
+            <a:r>
+              <a:rPr lang="en-US" altLang="zh-CN" sz="1800" dirty="0">
+                <a:solidFill>
+                  <a:srgbClr val="0070C0"/>
+                </a:solidFill>
+                <a:latin typeface="Arial" panose="020B0604020202020204" pitchFamily="34" charset="0"/>
+                <a:cs typeface="Arial" panose="020B0604020202020204" pitchFamily="34" charset="0"/>
+              </a:rPr>
+              <a:t>precoding</a:t>
+            </a:r>
+            <a:r>
+              <a:rPr lang="en-US" altLang="zh-CN" sz="1800" dirty="0">
+                <a:latin typeface="Arial" panose="020B0604020202020204" pitchFamily="34" charset="0"/>
+                <a:cs typeface="Arial" panose="020B0604020202020204" pitchFamily="34" charset="0"/>
+              </a:rPr>
+              <a:t>, and </a:t>
+            </a:r>
+            <a:r>
+              <a:rPr lang="en-US" altLang="zh-CN" sz="1800" dirty="0">
+                <a:solidFill>
+                  <a:srgbClr val="0070C0"/>
+                </a:solidFill>
+                <a:latin typeface="Arial" panose="020B0604020202020204" pitchFamily="34" charset="0"/>
+                <a:cs typeface="Arial" panose="020B0604020202020204" pitchFamily="34" charset="0"/>
+              </a:rPr>
+              <a:t>MCS</a:t>
+            </a:r>
+            <a:r>
+              <a:rPr lang="en-US" altLang="zh-CN" sz="1800" dirty="0">
+                <a:latin typeface="Arial" panose="020B0604020202020204" pitchFamily="34" charset="0"/>
+                <a:cs typeface="Arial" panose="020B0604020202020204" pitchFamily="34" charset="0"/>
+              </a:rPr>
+              <a:t> selection</a:t>
+            </a:r>
+          </a:p>
+          <a:p>
+            <a:pPr>
+              <a:lnSpc>
+                <a:spcPct val="150000"/>
+              </a:lnSpc>
+            </a:pPr>
+            <a:r>
+              <a:rPr lang="en-US" altLang="zh-CN" sz="1800" dirty="0">
+                <a:latin typeface="Arial" panose="020B0604020202020204" pitchFamily="34" charset="0"/>
+                <a:cs typeface="Arial" panose="020B0604020202020204" pitchFamily="34" charset="0"/>
+              </a:rPr>
+              <a:t>Evaluate throughput under different </a:t>
+            </a:r>
+            <a:r>
+              <a:rPr lang="en-US" altLang="zh-CN" sz="1800" dirty="0">
+                <a:solidFill>
+                  <a:srgbClr val="0070C0"/>
+                </a:solidFill>
+                <a:latin typeface="Arial" panose="020B0604020202020204" pitchFamily="34" charset="0"/>
+                <a:cs typeface="Arial" panose="020B0604020202020204" pitchFamily="34" charset="0"/>
+              </a:rPr>
+              <a:t>MIMO configurations</a:t>
+            </a:r>
+            <a:r>
+              <a:rPr lang="en-US" altLang="zh-CN" sz="1800" dirty="0">
+                <a:latin typeface="Arial" panose="020B0604020202020204" pitchFamily="34" charset="0"/>
+                <a:cs typeface="Arial" panose="020B0604020202020204" pitchFamily="34" charset="0"/>
+              </a:rPr>
+              <a:t>, </a:t>
+            </a:r>
+            <a:r>
+              <a:rPr lang="en-US" altLang="zh-CN" sz="1800" dirty="0">
+                <a:solidFill>
+                  <a:srgbClr val="0070C0"/>
+                </a:solidFill>
+                <a:latin typeface="Arial" panose="020B0604020202020204" pitchFamily="34" charset="0"/>
+                <a:cs typeface="Arial" panose="020B0604020202020204" pitchFamily="34" charset="0"/>
+              </a:rPr>
+              <a:t>mobility levels</a:t>
+            </a:r>
+            <a:r>
+              <a:rPr lang="en-US" altLang="zh-CN" sz="1800" dirty="0">
+                <a:latin typeface="Arial" panose="020B0604020202020204" pitchFamily="34" charset="0"/>
+                <a:cs typeface="Arial" panose="020B0604020202020204" pitchFamily="34" charset="0"/>
+              </a:rPr>
+              <a:t>, and </a:t>
+            </a:r>
+            <a:r>
+              <a:rPr lang="en-US" altLang="zh-CN" sz="1800" dirty="0">
+                <a:solidFill>
+                  <a:srgbClr val="0070C0"/>
+                </a:solidFill>
+                <a:latin typeface="Arial" panose="020B0604020202020204" pitchFamily="34" charset="0"/>
+                <a:cs typeface="Arial" panose="020B0604020202020204" pitchFamily="34" charset="0"/>
+              </a:rPr>
+              <a:t>CSI reporting periods</a:t>
+            </a:r>
+          </a:p>
+          <a:p>
+            <a:pPr>
+              <a:lnSpc>
+                <a:spcPct val="150000"/>
+              </a:lnSpc>
+            </a:pPr>
+            <a:r>
+              <a:rPr lang="en-US" altLang="zh-CN" sz="1800" dirty="0">
+                <a:latin typeface="Arial" panose="020B0604020202020204" pitchFamily="34" charset="0"/>
+                <a:cs typeface="Arial" panose="020B0604020202020204" pitchFamily="34" charset="0"/>
+              </a:rPr>
+              <a:t>Identify the </a:t>
+            </a:r>
+            <a:r>
+              <a:rPr lang="en-US" altLang="zh-CN" sz="1800" dirty="0">
+                <a:solidFill>
+                  <a:srgbClr val="0070C0"/>
+                </a:solidFill>
+                <a:latin typeface="Arial" panose="020B0604020202020204" pitchFamily="34" charset="0"/>
+                <a:cs typeface="Arial" panose="020B0604020202020204" pitchFamily="34" charset="0"/>
+              </a:rPr>
+              <a:t>trade-off</a:t>
+            </a:r>
+            <a:r>
+              <a:rPr lang="en-US" altLang="zh-CN" sz="1800" dirty="0">
+                <a:latin typeface="Arial" panose="020B0604020202020204" pitchFamily="34" charset="0"/>
+                <a:cs typeface="Arial" panose="020B0604020202020204" pitchFamily="34" charset="0"/>
+              </a:rPr>
+              <a:t> between CSI freshness, throughput gain, and feedback overhead</a:t>
+            </a:r>
+          </a:p>
+          <a:p>
+            <a:pPr>
+              <a:lnSpc>
+                <a:spcPct val="150000"/>
+              </a:lnSpc>
+            </a:pPr>
+            <a:r>
+              <a:rPr lang="en-US" altLang="zh-CN" sz="1800" dirty="0">
+                <a:latin typeface="Arial" panose="020B0604020202020204" pitchFamily="34" charset="0"/>
+                <a:cs typeface="Arial" panose="020B0604020202020204" pitchFamily="34" charset="0"/>
+              </a:rPr>
+              <a:t>Provide insight for future 5/6G </a:t>
+            </a:r>
+            <a:r>
+              <a:rPr lang="en-US" altLang="zh-CN" sz="1800" dirty="0">
+                <a:solidFill>
+                  <a:srgbClr val="0070C0"/>
+                </a:solidFill>
+                <a:latin typeface="Arial" panose="020B0604020202020204" pitchFamily="34" charset="0"/>
+                <a:cs typeface="Arial" panose="020B0604020202020204" pitchFamily="34" charset="0"/>
+              </a:rPr>
+              <a:t>adaptive CSI reporting </a:t>
+            </a:r>
+            <a:r>
+              <a:rPr lang="en-US" altLang="zh-CN" sz="1800" dirty="0">
+                <a:latin typeface="Arial" panose="020B0604020202020204" pitchFamily="34" charset="0"/>
+                <a:cs typeface="Arial" panose="020B0604020202020204" pitchFamily="34" charset="0"/>
+              </a:rPr>
+              <a:t>design</a:t>
+            </a:r>
+            <a:endParaRPr lang="zh-CN" altLang="en-US" sz="1800" dirty="0">
+              <a:latin typeface="Arial" panose="020B0604020202020204" pitchFamily="34" charset="0"/>
+              <a:cs typeface="Arial" panose="020B0604020202020204" pitchFamily="34" charset="0"/>
+            </a:endParaRPr>
+          </a:p>
+        </p:txBody>
+      </p:sp>
+      <p:sp>
+        <p:nvSpPr>
+          <p:cNvPr id="5" name="灯片编号占位符 4">
+            <a:extLst>
+              <a:ext uri="{FF2B5EF4-FFF2-40B4-BE49-F238E27FC236}">
+                <a16:creationId xmlns:a16="http://schemas.microsoft.com/office/drawing/2014/main" id="{2298A1E4-49AF-6477-7C1D-7193789D6323}"/>
+              </a:ext>
+            </a:extLst>
+          </p:cNvPr>
+          <p:cNvSpPr>
+            <a:spLocks noGrp="1"/>
+          </p:cNvSpPr>
+          <p:nvPr>
+            <p:ph type="sldNum" sz="quarter" idx="12"/>
+          </p:nvPr>
+        </p:nvSpPr>
+        <p:spPr>
+          <a:xfrm>
+            <a:off x="8610600" y="6356350"/>
+            <a:ext cx="3026535" cy="365125"/>
+          </a:xfrm>
+        </p:spPr>
+        <p:txBody>
+          <a:bodyPr/>
+          <a:lstStyle/>
+          <a:p>
+            <a:r>
+              <a:rPr lang="en-US" altLang="zh-CN" dirty="0">
+                <a:latin typeface="Arial" panose="020B0604020202020204" pitchFamily="34" charset="0"/>
+                <a:cs typeface="Arial" panose="020B0604020202020204" pitchFamily="34" charset="0"/>
+              </a:rPr>
+              <a:t>MIMO Techniques in 5/6G</a:t>
+            </a:r>
+            <a:r>
+              <a:rPr lang="zh-CN" altLang="en-US" dirty="0">
+                <a:latin typeface="Arial" panose="020B0604020202020204" pitchFamily="34" charset="0"/>
+                <a:cs typeface="Arial" panose="020B0604020202020204" pitchFamily="34" charset="0"/>
+              </a:rPr>
+              <a:t>     </a:t>
+            </a:r>
+            <a:fld id="{95B778F4-F869-49EC-876F-75AABD7B5BBF}" type="slidenum">
+              <a:rPr lang="zh-CN" altLang="en-US" smtClean="0">
+                <a:latin typeface="Arial" panose="020B0604020202020204" pitchFamily="34" charset="0"/>
+                <a:cs typeface="Arial" panose="020B0604020202020204" pitchFamily="34" charset="0"/>
+              </a:rPr>
+              <a:t>2</a:t>
+            </a:fld>
+            <a:endParaRPr lang="zh-CN" altLang="en-US" dirty="0">
+              <a:latin typeface="Arial" panose="020B0604020202020204" pitchFamily="34" charset="0"/>
+              <a:cs typeface="Arial" panose="020B0604020202020204" pitchFamily="34" charset="0"/>
+            </a:endParaRPr>
+          </a:p>
+        </p:txBody>
+      </p:sp>
+    </p:spTree>
+    <p:extLst>
+      <p:ext uri="{BB962C8B-B14F-4D97-AF65-F5344CB8AC3E}">
+        <p14:creationId xmlns:p14="http://schemas.microsoft.com/office/powerpoint/2010/main" val="2637183436"/>
+      </p:ext>
+    </p:extLst>
+  </p:cSld>
+  <p:clrMapOvr>
+    <a:masterClrMapping/>
+  </p:clrMapOvr>
+</p:sld>
+</file>
+
+<file path=ppt/slides/slide3.xml><?xml version="1.0" encoding="utf-8"?>
+<p:sld xmlns:a="http://schemas.openxmlformats.org/drawingml/2006/main" xmlns:r="http://schemas.openxmlformats.org/officeDocument/2006/relationships" xmlns:p="http://schemas.openxmlformats.org/presentationml/2006/main">
+  <p:cSld>
+    <p:spTree>
+      <p:nvGrpSpPr>
+        <p:cNvPr id="1" name="">
+          <a:extLst>
+            <a:ext uri="{FF2B5EF4-FFF2-40B4-BE49-F238E27FC236}">
+              <a16:creationId xmlns:a16="http://schemas.microsoft.com/office/drawing/2014/main" id="{799F7BEB-F6F8-7C40-C35F-27D2FC144B7F}"/>
+            </a:ext>
+          </a:extLst>
+        </p:cNvPr>
+        <p:cNvGrpSpPr/>
+        <p:nvPr/>
+      </p:nvGrpSpPr>
+      <p:grpSpPr>
+        <a:xfrm>
+          <a:off x="0" y="0"/>
+          <a:ext cx="0" cy="0"/>
+          <a:chOff x="0" y="0"/>
+          <a:chExt cx="0" cy="0"/>
+        </a:xfrm>
+      </p:grpSpPr>
+      <p:pic>
+        <p:nvPicPr>
+          <p:cNvPr id="7" name="图片 6">
+            <a:extLst>
+              <a:ext uri="{FF2B5EF4-FFF2-40B4-BE49-F238E27FC236}">
+                <a16:creationId xmlns:a16="http://schemas.microsoft.com/office/drawing/2014/main" id="{D4AA7DC2-AF3F-DDBF-A461-306E1CBAAC51}"/>
+              </a:ext>
+            </a:extLst>
+          </p:cNvPr>
+          <p:cNvPicPr>
+            <a:picLocks noChangeAspect="1"/>
+          </p:cNvPicPr>
+          <p:nvPr/>
+        </p:nvPicPr>
+        <p:blipFill>
+          <a:blip r:embed="rId3"/>
+          <a:stretch>
+            <a:fillRect/>
+          </a:stretch>
+        </p:blipFill>
+        <p:spPr>
+          <a:xfrm>
+            <a:off x="3344297" y="3995042"/>
+            <a:ext cx="5503404" cy="2075204"/>
+          </a:xfrm>
+          <a:prstGeom prst="rect">
+            <a:avLst/>
+          </a:prstGeom>
+        </p:spPr>
+      </p:pic>
+      <p:sp>
+        <p:nvSpPr>
+          <p:cNvPr id="2" name="标题 1">
+            <a:extLst>
+              <a:ext uri="{FF2B5EF4-FFF2-40B4-BE49-F238E27FC236}">
+                <a16:creationId xmlns:a16="http://schemas.microsoft.com/office/drawing/2014/main" id="{D1811416-A87A-4A1A-4165-64AF60DEC22A}"/>
+              </a:ext>
+            </a:extLst>
+          </p:cNvPr>
+          <p:cNvSpPr>
+            <a:spLocks noGrp="1"/>
+          </p:cNvSpPr>
+          <p:nvPr>
+            <p:ph type="title"/>
+          </p:nvPr>
+        </p:nvSpPr>
+        <p:spPr>
+          <a:xfrm>
+            <a:off x="554865" y="377422"/>
+            <a:ext cx="11082270" cy="607230"/>
+          </a:xfrm>
+        </p:spPr>
+        <p:txBody>
+          <a:bodyPr>
+            <a:normAutofit/>
+          </a:bodyPr>
+          <a:lstStyle/>
+          <a:p>
+            <a:r>
+              <a:rPr lang="en-US" altLang="zh-CN" sz="3200" dirty="0">
+                <a:latin typeface="Arial" panose="020B0604020202020204" pitchFamily="34" charset="0"/>
+                <a:cs typeface="Arial" panose="020B0604020202020204" pitchFamily="34" charset="0"/>
+              </a:rPr>
+              <a:t>Channel State Information (CSI)</a:t>
+            </a:r>
+            <a:endParaRPr lang="zh-CN" altLang="en-US" sz="3200" dirty="0">
+              <a:latin typeface="Arial" panose="020B0604020202020204" pitchFamily="34" charset="0"/>
+              <a:cs typeface="Arial" panose="020B0604020202020204" pitchFamily="34" charset="0"/>
+            </a:endParaRPr>
+          </a:p>
+        </p:txBody>
+      </p:sp>
+      <p:sp>
+        <p:nvSpPr>
+          <p:cNvPr id="3" name="内容占位符 2">
+            <a:extLst>
+              <a:ext uri="{FF2B5EF4-FFF2-40B4-BE49-F238E27FC236}">
+                <a16:creationId xmlns:a16="http://schemas.microsoft.com/office/drawing/2014/main" id="{17B67127-22D4-A5C0-F66C-948249928F07}"/>
+              </a:ext>
+            </a:extLst>
+          </p:cNvPr>
+          <p:cNvSpPr>
+            <a:spLocks noGrp="1"/>
+          </p:cNvSpPr>
+          <p:nvPr>
+            <p:ph idx="1"/>
+          </p:nvPr>
+        </p:nvSpPr>
+        <p:spPr>
+          <a:xfrm>
+            <a:off x="554865" y="1146220"/>
+            <a:ext cx="11082270" cy="3205647"/>
+          </a:xfrm>
+        </p:spPr>
+        <p:txBody>
+          <a:bodyPr>
+            <a:normAutofit/>
+          </a:bodyPr>
+          <a:lstStyle/>
+          <a:p>
+            <a:pPr>
+              <a:lnSpc>
+                <a:spcPct val="150000"/>
+              </a:lnSpc>
+            </a:pPr>
+            <a:r>
+              <a:rPr lang="en-US" altLang="zh-CN" sz="1800" dirty="0">
+                <a:latin typeface="Arial" panose="020B0604020202020204" pitchFamily="34" charset="0"/>
+                <a:cs typeface="Arial" panose="020B0604020202020204" pitchFamily="34" charset="0"/>
+              </a:rPr>
+              <a:t>UE estimates the downlink channel using </a:t>
+            </a:r>
+            <a:r>
+              <a:rPr lang="en-US" altLang="zh-CN" sz="1800" dirty="0">
+                <a:solidFill>
+                  <a:srgbClr val="0070C0"/>
+                </a:solidFill>
+                <a:latin typeface="Arial" panose="020B0604020202020204" pitchFamily="34" charset="0"/>
+                <a:cs typeface="Arial" panose="020B0604020202020204" pitchFamily="34" charset="0"/>
+              </a:rPr>
+              <a:t>CSI-RS</a:t>
+            </a:r>
+            <a:r>
+              <a:rPr lang="en-US" altLang="zh-CN" sz="1800" dirty="0">
+                <a:latin typeface="Arial" panose="020B0604020202020204" pitchFamily="34" charset="0"/>
+                <a:cs typeface="Arial" panose="020B0604020202020204" pitchFamily="34" charset="0"/>
+              </a:rPr>
+              <a:t> and reports </a:t>
+            </a:r>
+            <a:r>
+              <a:rPr lang="en-US" altLang="zh-CN" sz="1800" dirty="0">
+                <a:solidFill>
+                  <a:srgbClr val="0070C0"/>
+                </a:solidFill>
+                <a:latin typeface="Arial" panose="020B0604020202020204" pitchFamily="34" charset="0"/>
+                <a:cs typeface="Arial" panose="020B0604020202020204" pitchFamily="34" charset="0"/>
+              </a:rPr>
+              <a:t>CSI</a:t>
+            </a:r>
+            <a:r>
+              <a:rPr lang="en-US" altLang="zh-CN" sz="1800" dirty="0">
+                <a:latin typeface="Arial" panose="020B0604020202020204" pitchFamily="34" charset="0"/>
+                <a:cs typeface="Arial" panose="020B0604020202020204" pitchFamily="34" charset="0"/>
+              </a:rPr>
+              <a:t> to the gNB</a:t>
+            </a:r>
+          </a:p>
+          <a:p>
+            <a:pPr>
+              <a:lnSpc>
+                <a:spcPct val="150000"/>
+              </a:lnSpc>
+            </a:pPr>
+            <a:r>
+              <a:rPr lang="en-US" altLang="zh-CN" sz="1800" dirty="0">
+                <a:latin typeface="Arial" panose="020B0604020202020204" pitchFamily="34" charset="0"/>
+                <a:cs typeface="Arial" panose="020B0604020202020204" pitchFamily="34" charset="0"/>
+              </a:rPr>
+              <a:t>CSI feedback supports link adaptation:</a:t>
+            </a:r>
+          </a:p>
+          <a:p>
+            <a:pPr lvl="1">
+              <a:lnSpc>
+                <a:spcPct val="150000"/>
+              </a:lnSpc>
+              <a:buClr>
+                <a:schemeClr val="tx1"/>
+              </a:buClr>
+            </a:pPr>
+            <a:r>
+              <a:rPr lang="en-US" altLang="zh-CN" sz="1800" dirty="0">
+                <a:solidFill>
+                  <a:srgbClr val="0070C0"/>
+                </a:solidFill>
+                <a:latin typeface="Arial" panose="020B0604020202020204" pitchFamily="34" charset="0"/>
+                <a:cs typeface="Arial" panose="020B0604020202020204" pitchFamily="34" charset="0"/>
+              </a:rPr>
+              <a:t>Precoding Matrix Indicator (PMI): </a:t>
+            </a:r>
+            <a:r>
+              <a:rPr lang="en-US" altLang="zh-CN" sz="1800" dirty="0">
+                <a:latin typeface="Arial" panose="020B0604020202020204" pitchFamily="34" charset="0"/>
+                <a:cs typeface="Arial" panose="020B0604020202020204" pitchFamily="34" charset="0"/>
+              </a:rPr>
+              <a:t>preferred precoding matrix</a:t>
+            </a:r>
+          </a:p>
+          <a:p>
+            <a:pPr lvl="1">
+              <a:lnSpc>
+                <a:spcPct val="150000"/>
+              </a:lnSpc>
+              <a:buClr>
+                <a:schemeClr val="tx1"/>
+              </a:buClr>
+            </a:pPr>
+            <a:r>
+              <a:rPr lang="en-US" altLang="zh-CN" sz="1800" dirty="0">
+                <a:solidFill>
+                  <a:srgbClr val="0070C0"/>
+                </a:solidFill>
+                <a:latin typeface="Arial" panose="020B0604020202020204" pitchFamily="34" charset="0"/>
+                <a:cs typeface="Arial" panose="020B0604020202020204" pitchFamily="34" charset="0"/>
+              </a:rPr>
+              <a:t>Rank Indicator (RI):</a:t>
+            </a:r>
+            <a:r>
+              <a:rPr lang="en-US" altLang="zh-CN" sz="1800" dirty="0">
+                <a:latin typeface="Arial" panose="020B0604020202020204" pitchFamily="34" charset="0"/>
+                <a:cs typeface="Arial" panose="020B0604020202020204" pitchFamily="34" charset="0"/>
+              </a:rPr>
+              <a:t> recommended number of layers (rank)</a:t>
+            </a:r>
+          </a:p>
+          <a:p>
+            <a:pPr lvl="1">
+              <a:lnSpc>
+                <a:spcPct val="150000"/>
+              </a:lnSpc>
+              <a:buClr>
+                <a:schemeClr val="tx1"/>
+              </a:buClr>
+            </a:pPr>
+            <a:r>
+              <a:rPr lang="en-US" altLang="zh-CN" sz="1800" dirty="0">
+                <a:solidFill>
+                  <a:srgbClr val="0070C0"/>
+                </a:solidFill>
+                <a:latin typeface="Arial" panose="020B0604020202020204" pitchFamily="34" charset="0"/>
+                <a:cs typeface="Arial" panose="020B0604020202020204" pitchFamily="34" charset="0"/>
+              </a:rPr>
+              <a:t>Channel Quality Indicator (CQI):</a:t>
+            </a:r>
+            <a:r>
+              <a:rPr lang="en-US" altLang="zh-CN" sz="1800" dirty="0">
+                <a:latin typeface="Arial" panose="020B0604020202020204" pitchFamily="34" charset="0"/>
+                <a:cs typeface="Arial" panose="020B0604020202020204" pitchFamily="34" charset="0"/>
+              </a:rPr>
+              <a:t> recommended modulation and coding</a:t>
+            </a:r>
+          </a:p>
+          <a:p>
+            <a:pPr>
+              <a:lnSpc>
+                <a:spcPct val="150000"/>
+              </a:lnSpc>
+              <a:buClr>
+                <a:schemeClr val="tx1"/>
+              </a:buClr>
+            </a:pPr>
+            <a:r>
+              <a:rPr lang="en-US" altLang="zh-CN" sz="1800" dirty="0">
+                <a:latin typeface="Arial" panose="020B0604020202020204" pitchFamily="34" charset="0"/>
+                <a:cs typeface="Arial" panose="020B0604020202020204" pitchFamily="34" charset="0"/>
+              </a:rPr>
+              <a:t>CSI reporting must be </a:t>
+            </a:r>
+            <a:r>
+              <a:rPr lang="en-US" altLang="zh-CN" sz="1800" dirty="0">
+                <a:solidFill>
+                  <a:srgbClr val="0070C0"/>
+                </a:solidFill>
+                <a:latin typeface="Arial" panose="020B0604020202020204" pitchFamily="34" charset="0"/>
+                <a:cs typeface="Arial" panose="020B0604020202020204" pitchFamily="34" charset="0"/>
+              </a:rPr>
+              <a:t>fast</a:t>
+            </a:r>
+            <a:r>
+              <a:rPr lang="en-US" altLang="zh-CN" sz="1800" dirty="0">
+                <a:latin typeface="Arial" panose="020B0604020202020204" pitchFamily="34" charset="0"/>
+                <a:cs typeface="Arial" panose="020B0604020202020204" pitchFamily="34" charset="0"/>
+              </a:rPr>
+              <a:t> enough to track </a:t>
+            </a:r>
+            <a:r>
+              <a:rPr lang="en-US" altLang="zh-CN" sz="1800" dirty="0">
+                <a:solidFill>
+                  <a:srgbClr val="0070C0"/>
+                </a:solidFill>
+                <a:latin typeface="Arial" panose="020B0604020202020204" pitchFamily="34" charset="0"/>
+                <a:cs typeface="Arial" panose="020B0604020202020204" pitchFamily="34" charset="0"/>
+              </a:rPr>
+              <a:t>channel variation</a:t>
+            </a:r>
+          </a:p>
+          <a:p>
+            <a:pPr marL="0" indent="0">
+              <a:buNone/>
+            </a:pPr>
+            <a:endParaRPr lang="zh-CN" altLang="en-US" sz="2000" dirty="0">
+              <a:latin typeface="Arial" panose="020B0604020202020204" pitchFamily="34" charset="0"/>
+              <a:cs typeface="Arial" panose="020B0604020202020204" pitchFamily="34" charset="0"/>
+            </a:endParaRPr>
+          </a:p>
+        </p:txBody>
+      </p:sp>
+      <p:sp>
+        <p:nvSpPr>
+          <p:cNvPr id="4" name="页脚占位符 3">
+            <a:extLst>
+              <a:ext uri="{FF2B5EF4-FFF2-40B4-BE49-F238E27FC236}">
+                <a16:creationId xmlns:a16="http://schemas.microsoft.com/office/drawing/2014/main" id="{0A4809AF-1C89-B1D2-8EF9-D816F52DC50D}"/>
+              </a:ext>
+            </a:extLst>
+          </p:cNvPr>
+          <p:cNvSpPr>
+            <a:spLocks noGrp="1"/>
+          </p:cNvSpPr>
+          <p:nvPr>
+            <p:ph type="ftr" sz="quarter" idx="11"/>
+          </p:nvPr>
+        </p:nvSpPr>
+        <p:spPr>
+          <a:xfrm>
+            <a:off x="554865" y="6356350"/>
+            <a:ext cx="11082270" cy="365125"/>
+          </a:xfrm>
+        </p:spPr>
+        <p:txBody>
+          <a:bodyPr/>
+          <a:lstStyle/>
+          <a:p>
+            <a:pPr algn="l"/>
+            <a:r>
+              <a:rPr lang="en-US" altLang="zh-CN" dirty="0">
+                <a:latin typeface="Arial" panose="020B0604020202020204" pitchFamily="34" charset="0"/>
+                <a:cs typeface="Arial" panose="020B0604020202020204" pitchFamily="34" charset="0"/>
+              </a:rPr>
+              <a:t>Source: The Next Generation Wireless Access Technology</a:t>
+            </a:r>
+            <a:endParaRPr lang="zh-CN" altLang="en-US" dirty="0">
+              <a:latin typeface="Arial" panose="020B0604020202020204" pitchFamily="34" charset="0"/>
+              <a:cs typeface="Arial" panose="020B0604020202020204" pitchFamily="34" charset="0"/>
+            </a:endParaRPr>
+          </a:p>
+        </p:txBody>
+      </p:sp>
+      <p:sp>
+        <p:nvSpPr>
+          <p:cNvPr id="5" name="灯片编号占位符 4">
+            <a:extLst>
+              <a:ext uri="{FF2B5EF4-FFF2-40B4-BE49-F238E27FC236}">
+                <a16:creationId xmlns:a16="http://schemas.microsoft.com/office/drawing/2014/main" id="{22B6B49A-130B-935C-8172-075C5AB169C7}"/>
+              </a:ext>
+            </a:extLst>
+          </p:cNvPr>
+          <p:cNvSpPr>
+            <a:spLocks noGrp="1"/>
+          </p:cNvSpPr>
+          <p:nvPr>
+            <p:ph type="sldNum" sz="quarter" idx="12"/>
+          </p:nvPr>
+        </p:nvSpPr>
+        <p:spPr>
+          <a:xfrm>
+            <a:off x="8610599" y="6356350"/>
+            <a:ext cx="3026535" cy="365125"/>
+          </a:xfrm>
+        </p:spPr>
+        <p:txBody>
+          <a:bodyPr/>
+          <a:lstStyle/>
+          <a:p>
+            <a:r>
+              <a:rPr lang="en-US" altLang="zh-CN" dirty="0">
+                <a:latin typeface="Arial" panose="020B0604020202020204" pitchFamily="34" charset="0"/>
+                <a:cs typeface="Arial" panose="020B0604020202020204" pitchFamily="34" charset="0"/>
+              </a:rPr>
+              <a:t>MIMO Techniques in 5/6G</a:t>
+            </a:r>
+            <a:r>
+              <a:rPr lang="zh-CN" altLang="en-US" dirty="0">
+                <a:latin typeface="Arial" panose="020B0604020202020204" pitchFamily="34" charset="0"/>
+                <a:cs typeface="Arial" panose="020B0604020202020204" pitchFamily="34" charset="0"/>
+              </a:rPr>
+              <a:t>     </a:t>
+            </a:r>
+            <a:fld id="{95B778F4-F869-49EC-876F-75AABD7B5BBF}" type="slidenum">
+              <a:rPr lang="zh-CN" altLang="en-US" smtClean="0">
+                <a:latin typeface="Arial" panose="020B0604020202020204" pitchFamily="34" charset="0"/>
+                <a:cs typeface="Arial" panose="020B0604020202020204" pitchFamily="34" charset="0"/>
+              </a:rPr>
+              <a:t>3</a:t>
+            </a:fld>
+            <a:endParaRPr lang="zh-CN" altLang="en-US" dirty="0">
+              <a:latin typeface="Arial" panose="020B0604020202020204" pitchFamily="34" charset="0"/>
+              <a:cs typeface="Arial" panose="020B0604020202020204" pitchFamily="34" charset="0"/>
+            </a:endParaRPr>
+          </a:p>
+        </p:txBody>
+      </p:sp>
+      <p:sp>
+        <p:nvSpPr>
+          <p:cNvPr id="12" name="文本框 11">
+            <a:extLst>
+              <a:ext uri="{FF2B5EF4-FFF2-40B4-BE49-F238E27FC236}">
+                <a16:creationId xmlns:a16="http://schemas.microsoft.com/office/drawing/2014/main" id="{BD9B5D6D-8A2E-236F-A58D-283E7AFCC984}"/>
+              </a:ext>
+            </a:extLst>
+          </p:cNvPr>
+          <p:cNvSpPr txBox="1"/>
+          <p:nvPr/>
+        </p:nvSpPr>
+        <p:spPr>
+          <a:xfrm>
+            <a:off x="3073879" y="6070246"/>
+            <a:ext cx="6044241" cy="307777"/>
+          </a:xfrm>
+          <a:prstGeom prst="rect">
+            <a:avLst/>
+          </a:prstGeom>
+          <a:noFill/>
+        </p:spPr>
+        <p:txBody>
+          <a:bodyPr wrap="square">
+            <a:spAutoFit/>
+          </a:bodyPr>
+          <a:lstStyle/>
+          <a:p>
+            <a:pPr algn="ctr"/>
+            <a:r>
+              <a:rPr lang="en-US" altLang="zh-CN" sz="1400" dirty="0">
+                <a:latin typeface="Arial" panose="020B0604020202020204" pitchFamily="34" charset="0"/>
+                <a:cs typeface="Arial" panose="020B0604020202020204" pitchFamily="34" charset="0"/>
+              </a:rPr>
+              <a:t>Figure 1: CSI reporting and downlink transmission</a:t>
+            </a:r>
+            <a:endParaRPr lang="zh-CN" altLang="en-US" sz="1400" dirty="0">
+              <a:latin typeface="Arial" panose="020B0604020202020204" pitchFamily="34" charset="0"/>
+              <a:cs typeface="Arial" panose="020B0604020202020204" pitchFamily="34" charset="0"/>
+            </a:endParaRPr>
+          </a:p>
+        </p:txBody>
+      </p:sp>
+    </p:spTree>
+    <p:extLst>
+      <p:ext uri="{BB962C8B-B14F-4D97-AF65-F5344CB8AC3E}">
+        <p14:creationId xmlns:p14="http://schemas.microsoft.com/office/powerpoint/2010/main" val="3754076247"/>
+      </p:ext>
+    </p:extLst>
+  </p:cSld>
+  <p:clrMapOvr>
+    <a:masterClrMapping/>
+  </p:clrMapOvr>
+</p:sld>
+</file>
+
+<file path=ppt/slides/slide4.xml><?xml version="1.0" encoding="utf-8"?>
+<p:sld xmlns:a="http://schemas.openxmlformats.org/drawingml/2006/main" xmlns:r="http://schemas.openxmlformats.org/officeDocument/2006/relationships" xmlns:p="http://schemas.openxmlformats.org/presentationml/2006/main">
+  <p:cSld>
+    <p:spTree>
+      <p:nvGrpSpPr>
+        <p:cNvPr id="1" name="">
+          <a:extLst>
+            <a:ext uri="{FF2B5EF4-FFF2-40B4-BE49-F238E27FC236}">
+              <a16:creationId xmlns:a16="http://schemas.microsoft.com/office/drawing/2014/main" id="{98F4380B-FB44-E067-22EA-94FA43955D75}"/>
+            </a:ext>
+          </a:extLst>
+        </p:cNvPr>
+        <p:cNvGrpSpPr/>
+        <p:nvPr/>
+      </p:nvGrpSpPr>
+      <p:grpSpPr>
+        <a:xfrm>
+          <a:off x="0" y="0"/>
+          <a:ext cx="0" cy="0"/>
+          <a:chOff x="0" y="0"/>
+          <a:chExt cx="0" cy="0"/>
+        </a:xfrm>
+      </p:grpSpPr>
+      <p:sp>
+        <p:nvSpPr>
+          <p:cNvPr id="2" name="标题 1">
+            <a:extLst>
+              <a:ext uri="{FF2B5EF4-FFF2-40B4-BE49-F238E27FC236}">
+                <a16:creationId xmlns:a16="http://schemas.microsoft.com/office/drawing/2014/main" id="{9CEEFE5A-68F0-A94B-704D-15F4E2EDA12E}"/>
+              </a:ext>
+            </a:extLst>
+          </p:cNvPr>
+          <p:cNvSpPr>
+            <a:spLocks noGrp="1"/>
+          </p:cNvSpPr>
+          <p:nvPr>
+            <p:ph type="title"/>
+          </p:nvPr>
+        </p:nvSpPr>
+        <p:spPr>
+          <a:xfrm>
+            <a:off x="554865" y="377422"/>
+            <a:ext cx="11082270" cy="607230"/>
+          </a:xfrm>
+        </p:spPr>
+        <p:txBody>
+          <a:bodyPr>
+            <a:normAutofit/>
+          </a:bodyPr>
+          <a:lstStyle/>
+          <a:p>
+            <a:r>
+              <a:rPr lang="en-US" altLang="zh-CN" sz="3200" dirty="0">
+                <a:latin typeface="Arial" panose="020B0604020202020204" pitchFamily="34" charset="0"/>
+                <a:cs typeface="Arial" panose="020B0604020202020204" pitchFamily="34" charset="0"/>
+              </a:rPr>
+              <a:t>Simulation Framework</a:t>
+            </a:r>
+            <a:endParaRPr lang="zh-CN" altLang="en-US" sz="3200" dirty="0">
+              <a:latin typeface="Arial" panose="020B0604020202020204" pitchFamily="34" charset="0"/>
+              <a:cs typeface="Arial" panose="020B0604020202020204" pitchFamily="34" charset="0"/>
+            </a:endParaRPr>
+          </a:p>
+        </p:txBody>
+      </p:sp>
+      <p:sp>
+        <p:nvSpPr>
+          <p:cNvPr id="4" name="页脚占位符 3">
+            <a:extLst>
+              <a:ext uri="{FF2B5EF4-FFF2-40B4-BE49-F238E27FC236}">
+                <a16:creationId xmlns:a16="http://schemas.microsoft.com/office/drawing/2014/main" id="{DC3A1099-FFCC-5B98-467C-C081001A2C9C}"/>
+              </a:ext>
+            </a:extLst>
+          </p:cNvPr>
+          <p:cNvSpPr>
+            <a:spLocks noGrp="1"/>
+          </p:cNvSpPr>
+          <p:nvPr>
+            <p:ph type="ftr" sz="quarter" idx="11"/>
+          </p:nvPr>
+        </p:nvSpPr>
+        <p:spPr>
+          <a:xfrm>
+            <a:off x="554865" y="6356350"/>
+            <a:ext cx="11082270" cy="365125"/>
+          </a:xfrm>
+        </p:spPr>
+        <p:txBody>
+          <a:bodyPr/>
+          <a:lstStyle/>
+          <a:p>
+            <a:pPr algn="l"/>
+            <a:r>
+              <a:rPr lang="en-US" altLang="zh-CN" dirty="0">
+                <a:latin typeface="Arial" panose="020B0604020202020204" pitchFamily="34" charset="0"/>
+                <a:cs typeface="Arial" panose="020B0604020202020204" pitchFamily="34" charset="0"/>
+              </a:rPr>
+              <a:t>Source: MATLAB NR PDSCH Throughput Using Channel State Information Feedback</a:t>
+            </a:r>
+            <a:endParaRPr lang="zh-CN" altLang="en-US" dirty="0">
+              <a:latin typeface="Arial" panose="020B0604020202020204" pitchFamily="34" charset="0"/>
+              <a:cs typeface="Arial" panose="020B0604020202020204" pitchFamily="34" charset="0"/>
+            </a:endParaRPr>
+          </a:p>
+        </p:txBody>
+      </p:sp>
+      <p:sp>
+        <p:nvSpPr>
+          <p:cNvPr id="5" name="灯片编号占位符 4">
+            <a:extLst>
+              <a:ext uri="{FF2B5EF4-FFF2-40B4-BE49-F238E27FC236}">
+                <a16:creationId xmlns:a16="http://schemas.microsoft.com/office/drawing/2014/main" id="{23B1A9A6-53E3-CFED-69C9-7A5F9484964B}"/>
+              </a:ext>
+            </a:extLst>
+          </p:cNvPr>
+          <p:cNvSpPr>
+            <a:spLocks noGrp="1"/>
+          </p:cNvSpPr>
+          <p:nvPr>
+            <p:ph type="sldNum" sz="quarter" idx="12"/>
+          </p:nvPr>
+        </p:nvSpPr>
+        <p:spPr>
+          <a:xfrm>
+            <a:off x="8610599" y="6356350"/>
+            <a:ext cx="3026535" cy="365125"/>
+          </a:xfrm>
+        </p:spPr>
+        <p:txBody>
+          <a:bodyPr/>
+          <a:lstStyle/>
+          <a:p>
+            <a:r>
+              <a:rPr lang="en-US" altLang="zh-CN" dirty="0">
+                <a:latin typeface="Arial" panose="020B0604020202020204" pitchFamily="34" charset="0"/>
+                <a:cs typeface="Arial" panose="020B0604020202020204" pitchFamily="34" charset="0"/>
+              </a:rPr>
+              <a:t>MIMO Techniques in 5/6G     </a:t>
+            </a:r>
+            <a:fld id="{95B778F4-F869-49EC-876F-75AABD7B5BBF}" type="slidenum">
+              <a:rPr lang="zh-CN" altLang="en-US" smtClean="0">
+                <a:latin typeface="Arial" panose="020B0604020202020204" pitchFamily="34" charset="0"/>
+                <a:cs typeface="Arial" panose="020B0604020202020204" pitchFamily="34" charset="0"/>
+              </a:rPr>
+              <a:t>4</a:t>
+            </a:fld>
+            <a:endParaRPr lang="zh-CN" altLang="en-US" dirty="0">
+              <a:latin typeface="Arial" panose="020B0604020202020204" pitchFamily="34" charset="0"/>
+              <a:cs typeface="Arial" panose="020B0604020202020204" pitchFamily="34" charset="0"/>
+            </a:endParaRPr>
+          </a:p>
+        </p:txBody>
+      </p:sp>
+      <p:pic>
+        <p:nvPicPr>
+          <p:cNvPr id="11" name="图片 10">
+            <a:extLst>
+              <a:ext uri="{FF2B5EF4-FFF2-40B4-BE49-F238E27FC236}">
+                <a16:creationId xmlns:a16="http://schemas.microsoft.com/office/drawing/2014/main" id="{84534A41-BAFA-A82D-90E4-2FC5EA7BC6D2}"/>
+              </a:ext>
+            </a:extLst>
+          </p:cNvPr>
+          <p:cNvPicPr>
+            <a:picLocks noChangeAspect="1"/>
+          </p:cNvPicPr>
+          <p:nvPr/>
+        </p:nvPicPr>
+        <p:blipFill>
+          <a:blip r:embed="rId3"/>
+          <a:srcRect l="1944" r="1350"/>
+          <a:stretch>
+            <a:fillRect/>
+          </a:stretch>
+        </p:blipFill>
+        <p:spPr>
+          <a:xfrm>
+            <a:off x="946030" y="899785"/>
+            <a:ext cx="10299939" cy="3020229"/>
+          </a:xfrm>
+          <a:prstGeom prst="rect">
+            <a:avLst/>
+          </a:prstGeom>
+        </p:spPr>
+      </p:pic>
+      <p:sp>
+        <p:nvSpPr>
+          <p:cNvPr id="6" name="文本框 5">
+            <a:extLst>
+              <a:ext uri="{FF2B5EF4-FFF2-40B4-BE49-F238E27FC236}">
+                <a16:creationId xmlns:a16="http://schemas.microsoft.com/office/drawing/2014/main" id="{B441B10E-B056-0C9E-E818-D17BCAD0297F}"/>
+              </a:ext>
+            </a:extLst>
+          </p:cNvPr>
+          <p:cNvSpPr txBox="1"/>
+          <p:nvPr/>
+        </p:nvSpPr>
+        <p:spPr>
+          <a:xfrm>
+            <a:off x="554865" y="4275111"/>
+            <a:ext cx="11132712" cy="1703030"/>
+          </a:xfrm>
+          <a:prstGeom prst="rect">
+            <a:avLst/>
+          </a:prstGeom>
+          <a:noFill/>
+        </p:spPr>
+        <p:txBody>
+          <a:bodyPr wrap="square">
+            <a:spAutoFit/>
+          </a:bodyPr>
+          <a:lstStyle/>
+          <a:p>
+            <a:pPr marL="285750" indent="-285750">
+              <a:lnSpc>
+                <a:spcPct val="150000"/>
+              </a:lnSpc>
+              <a:buFont typeface="Arial" panose="020B0604020202020204" pitchFamily="34" charset="0"/>
+              <a:buChar char="•"/>
+            </a:pPr>
+            <a:r>
+              <a:rPr lang="en-US" altLang="zh-CN" sz="1800" dirty="0">
+                <a:latin typeface="Arial" panose="020B0604020202020204" pitchFamily="34" charset="0"/>
+                <a:cs typeface="Arial" panose="020B0604020202020204" pitchFamily="34" charset="0"/>
+              </a:rPr>
+              <a:t>CSI based feedback with adaptive RI / PMI / CQI</a:t>
+            </a:r>
+          </a:p>
+          <a:p>
+            <a:pPr marL="285750" indent="-285750">
+              <a:lnSpc>
+                <a:spcPct val="150000"/>
+              </a:lnSpc>
+              <a:buClr>
+                <a:schemeClr val="tx1"/>
+              </a:buClr>
+              <a:buFont typeface="Arial" panose="020B0604020202020204" pitchFamily="34" charset="0"/>
+              <a:buChar char="•"/>
+            </a:pPr>
+            <a:r>
+              <a:rPr lang="en-US" altLang="zh-CN" sz="1800" dirty="0">
+                <a:solidFill>
+                  <a:srgbClr val="0070C0"/>
+                </a:solidFill>
+                <a:latin typeface="Arial" panose="020B0604020202020204" pitchFamily="34" charset="0"/>
+                <a:cs typeface="Arial" panose="020B0604020202020204" pitchFamily="34" charset="0"/>
+              </a:rPr>
+              <a:t>Baseline</a:t>
+            </a:r>
+            <a:r>
+              <a:rPr lang="en-US" altLang="zh-CN" sz="1800" dirty="0">
+                <a:latin typeface="Arial" panose="020B0604020202020204" pitchFamily="34" charset="0"/>
+                <a:cs typeface="Arial" panose="020B0604020202020204" pitchFamily="34" charset="0"/>
+              </a:rPr>
+              <a:t>: 3.5 GHz, 40 MHz BW, 30 kHz SCS, 4Tx 4Rx, CDL-C channel</a:t>
+            </a:r>
+          </a:p>
+          <a:p>
+            <a:pPr marL="285750" indent="-285750">
+              <a:lnSpc>
+                <a:spcPct val="150000"/>
+              </a:lnSpc>
+              <a:buFont typeface="Arial" panose="020B0604020202020204" pitchFamily="34" charset="0"/>
+              <a:buChar char="•"/>
+            </a:pPr>
+            <a:r>
+              <a:rPr lang="en-US" altLang="zh-CN" dirty="0">
+                <a:latin typeface="Arial" panose="020B0604020202020204" pitchFamily="34" charset="0"/>
+                <a:cs typeface="Arial" panose="020B0604020202020204" pitchFamily="34" charset="0"/>
+              </a:rPr>
+              <a:t>Performance metric: delivered PDSCH </a:t>
+            </a:r>
+            <a:r>
+              <a:rPr lang="en-US" altLang="zh-CN" dirty="0">
+                <a:solidFill>
+                  <a:srgbClr val="0070C0"/>
+                </a:solidFill>
+                <a:latin typeface="Arial" panose="020B0604020202020204" pitchFamily="34" charset="0"/>
+                <a:cs typeface="Arial" panose="020B0604020202020204" pitchFamily="34" charset="0"/>
+              </a:rPr>
+              <a:t>throughput in Mbps</a:t>
+            </a:r>
+          </a:p>
+          <a:p>
+            <a:pPr marL="285750" indent="-285750">
+              <a:lnSpc>
+                <a:spcPct val="150000"/>
+              </a:lnSpc>
+              <a:buFont typeface="Arial" panose="020B0604020202020204" pitchFamily="34" charset="0"/>
+              <a:buChar char="•"/>
+            </a:pPr>
+            <a:r>
+              <a:rPr lang="en-US" altLang="zh-CN" dirty="0">
+                <a:latin typeface="Arial" panose="020B0604020202020204" pitchFamily="34" charset="0"/>
+                <a:cs typeface="Arial" panose="020B0604020202020204" pitchFamily="34" charset="0"/>
+              </a:rPr>
+              <a:t>SNR range: -5 to 25 dB, with 1</a:t>
+            </a:r>
+            <a:r>
+              <a:rPr lang="fr-FR" altLang="zh-CN" dirty="0">
+                <a:latin typeface="Arial" panose="020B0604020202020204" pitchFamily="34" charset="0"/>
+                <a:cs typeface="Arial" panose="020B0604020202020204" pitchFamily="34" charset="0"/>
+              </a:rPr>
+              <a:t>500 10-ms frames per SNR point</a:t>
+            </a:r>
+            <a:endParaRPr lang="en-US" altLang="zh-CN" sz="1800" dirty="0">
+              <a:latin typeface="Arial" panose="020B0604020202020204" pitchFamily="34" charset="0"/>
+              <a:cs typeface="Arial" panose="020B0604020202020204" pitchFamily="34" charset="0"/>
+            </a:endParaRPr>
+          </a:p>
+        </p:txBody>
+      </p:sp>
+      <p:sp>
+        <p:nvSpPr>
+          <p:cNvPr id="8" name="文本框 7">
+            <a:extLst>
+              <a:ext uri="{FF2B5EF4-FFF2-40B4-BE49-F238E27FC236}">
+                <a16:creationId xmlns:a16="http://schemas.microsoft.com/office/drawing/2014/main" id="{5A54DFC8-F30F-7A57-6700-FF7C264870FC}"/>
+              </a:ext>
+            </a:extLst>
+          </p:cNvPr>
+          <p:cNvSpPr txBox="1"/>
+          <p:nvPr/>
+        </p:nvSpPr>
+        <p:spPr>
+          <a:xfrm>
+            <a:off x="2427110" y="3895864"/>
+            <a:ext cx="7337778" cy="307777"/>
+          </a:xfrm>
+          <a:prstGeom prst="rect">
+            <a:avLst/>
+          </a:prstGeom>
+          <a:noFill/>
+        </p:spPr>
+        <p:txBody>
+          <a:bodyPr wrap="square">
+            <a:spAutoFit/>
+          </a:bodyPr>
+          <a:lstStyle/>
+          <a:p>
+            <a:pPr algn="ctr"/>
+            <a:r>
+              <a:rPr lang="en-US" altLang="zh-CN" sz="1400" dirty="0">
+                <a:latin typeface="Arial" panose="020B0604020202020204" pitchFamily="34" charset="0"/>
+                <a:cs typeface="Arial" panose="020B0604020202020204" pitchFamily="34" charset="0"/>
+              </a:rPr>
+              <a:t>Figure 2:  Overview of the CSI-based downlink transmission and feedback framework</a:t>
+            </a:r>
+            <a:endParaRPr lang="zh-CN" altLang="en-US" sz="1400" dirty="0">
+              <a:latin typeface="Arial" panose="020B0604020202020204" pitchFamily="34" charset="0"/>
+              <a:cs typeface="Arial" panose="020B0604020202020204" pitchFamily="34" charset="0"/>
+            </a:endParaRPr>
+          </a:p>
+        </p:txBody>
+      </p:sp>
+    </p:spTree>
+    <p:extLst>
+      <p:ext uri="{BB962C8B-B14F-4D97-AF65-F5344CB8AC3E}">
+        <p14:creationId xmlns:p14="http://schemas.microsoft.com/office/powerpoint/2010/main" val="1561402976"/>
+      </p:ext>
+    </p:extLst>
+  </p:cSld>
+  <p:clrMapOvr>
+    <a:masterClrMapping/>
+  </p:clrMapOvr>
+</p:sld>
+</file>
+
+<file path=ppt/slides/slide5.xml><?xml version="1.0" encoding="utf-8"?>
+<p:sld xmlns:a="http://schemas.openxmlformats.org/drawingml/2006/main" xmlns:r="http://schemas.openxmlformats.org/officeDocument/2006/relationships" xmlns:p="http://schemas.openxmlformats.org/presentationml/2006/main">
+  <p:cSld>
+    <p:spTree>
+      <p:nvGrpSpPr>
+        <p:cNvPr id="1" name="">
+          <a:extLst>
+            <a:ext uri="{FF2B5EF4-FFF2-40B4-BE49-F238E27FC236}">
+              <a16:creationId xmlns:a16="http://schemas.microsoft.com/office/drawing/2014/main" id="{A92A20DB-4E70-201D-943C-C88079E9EEB1}"/>
+            </a:ext>
+          </a:extLst>
+        </p:cNvPr>
+        <p:cNvGrpSpPr/>
+        <p:nvPr/>
+      </p:nvGrpSpPr>
+      <p:grpSpPr>
+        <a:xfrm>
+          <a:off x="0" y="0"/>
+          <a:ext cx="0" cy="0"/>
+          <a:chOff x="0" y="0"/>
+          <a:chExt cx="0" cy="0"/>
+        </a:xfrm>
+      </p:grpSpPr>
+      <p:sp>
+        <p:nvSpPr>
+          <p:cNvPr id="2" name="标题 1">
+            <a:extLst>
+              <a:ext uri="{FF2B5EF4-FFF2-40B4-BE49-F238E27FC236}">
+                <a16:creationId xmlns:a16="http://schemas.microsoft.com/office/drawing/2014/main" id="{2680CB3E-5CD4-FC3B-40CE-E42A67849EFD}"/>
+              </a:ext>
+            </a:extLst>
+          </p:cNvPr>
+          <p:cNvSpPr>
+            <a:spLocks noGrp="1"/>
+          </p:cNvSpPr>
+          <p:nvPr>
+            <p:ph type="title"/>
+          </p:nvPr>
+        </p:nvSpPr>
+        <p:spPr>
+          <a:xfrm>
+            <a:off x="554865" y="377422"/>
+            <a:ext cx="11082270" cy="607230"/>
+          </a:xfrm>
+        </p:spPr>
+        <p:txBody>
+          <a:bodyPr>
+            <a:normAutofit/>
+          </a:bodyPr>
+          <a:lstStyle/>
+          <a:p>
+            <a:r>
+              <a:rPr lang="en-US" altLang="zh-CN" sz="3200" dirty="0">
+                <a:latin typeface="Arial" panose="020B0604020202020204" pitchFamily="34" charset="0"/>
+                <a:cs typeface="Arial" panose="020B0604020202020204" pitchFamily="34" charset="0"/>
+              </a:rPr>
+              <a:t>Baseline Link Adaptation</a:t>
+            </a:r>
+            <a:endParaRPr lang="zh-CN" altLang="en-US" sz="3200" dirty="0">
+              <a:latin typeface="Arial" panose="020B0604020202020204" pitchFamily="34" charset="0"/>
+              <a:cs typeface="Arial" panose="020B0604020202020204" pitchFamily="34" charset="0"/>
+            </a:endParaRPr>
+          </a:p>
+        </p:txBody>
+      </p:sp>
+      <p:sp>
+        <p:nvSpPr>
+          <p:cNvPr id="5" name="灯片编号占位符 4">
+            <a:extLst>
+              <a:ext uri="{FF2B5EF4-FFF2-40B4-BE49-F238E27FC236}">
+                <a16:creationId xmlns:a16="http://schemas.microsoft.com/office/drawing/2014/main" id="{BE73DD59-7444-BA95-A818-A6FA9A53EF98}"/>
+              </a:ext>
+            </a:extLst>
+          </p:cNvPr>
+          <p:cNvSpPr>
+            <a:spLocks noGrp="1"/>
+          </p:cNvSpPr>
+          <p:nvPr>
+            <p:ph type="sldNum" sz="quarter" idx="12"/>
+          </p:nvPr>
+        </p:nvSpPr>
+        <p:spPr>
+          <a:xfrm>
+            <a:off x="8610599" y="6356350"/>
+            <a:ext cx="3026535" cy="365125"/>
+          </a:xfrm>
+        </p:spPr>
+        <p:txBody>
+          <a:bodyPr/>
+          <a:lstStyle/>
+          <a:p>
+            <a:r>
+              <a:rPr lang="en-US" altLang="zh-CN" dirty="0">
+                <a:latin typeface="Arial" panose="020B0604020202020204" pitchFamily="34" charset="0"/>
+                <a:cs typeface="Arial" panose="020B0604020202020204" pitchFamily="34" charset="0"/>
+              </a:rPr>
+              <a:t>MIMO Techniques in 5/6G     </a:t>
+            </a:r>
+            <a:fld id="{95B778F4-F869-49EC-876F-75AABD7B5BBF}" type="slidenum">
+              <a:rPr lang="zh-CN" altLang="en-US" smtClean="0">
+                <a:latin typeface="Arial" panose="020B0604020202020204" pitchFamily="34" charset="0"/>
+                <a:cs typeface="Arial" panose="020B0604020202020204" pitchFamily="34" charset="0"/>
+              </a:rPr>
+              <a:t>5</a:t>
+            </a:fld>
+            <a:endParaRPr lang="zh-CN" altLang="en-US" dirty="0">
+              <a:latin typeface="Arial" panose="020B0604020202020204" pitchFamily="34" charset="0"/>
+              <a:cs typeface="Arial" panose="020B0604020202020204" pitchFamily="34" charset="0"/>
+            </a:endParaRPr>
+          </a:p>
+        </p:txBody>
+      </p:sp>
+      <p:pic>
+        <p:nvPicPr>
+          <p:cNvPr id="7" name="图片 6">
+            <a:extLst>
+              <a:ext uri="{FF2B5EF4-FFF2-40B4-BE49-F238E27FC236}">
+                <a16:creationId xmlns:a16="http://schemas.microsoft.com/office/drawing/2014/main" id="{90CDD9EE-1848-5023-CA65-68B3C5A0F289}"/>
+              </a:ext>
+            </a:extLst>
+          </p:cNvPr>
+          <p:cNvPicPr>
+            <a:picLocks noChangeAspect="1"/>
+          </p:cNvPicPr>
+          <p:nvPr/>
+        </p:nvPicPr>
+        <p:blipFill>
+          <a:blip r:embed="rId3"/>
+          <a:stretch>
+            <a:fillRect/>
+          </a:stretch>
+        </p:blipFill>
+        <p:spPr>
+          <a:xfrm>
+            <a:off x="1110942" y="984652"/>
+            <a:ext cx="9180350" cy="5248723"/>
+          </a:xfrm>
+          <a:prstGeom prst="rect">
+            <a:avLst/>
+          </a:prstGeom>
+        </p:spPr>
+      </p:pic>
+      <p:sp>
+        <p:nvSpPr>
+          <p:cNvPr id="9" name="文本框 8">
+            <a:extLst>
+              <a:ext uri="{FF2B5EF4-FFF2-40B4-BE49-F238E27FC236}">
+                <a16:creationId xmlns:a16="http://schemas.microsoft.com/office/drawing/2014/main" id="{A91B3358-24C7-5D47-E89F-D91A6B15FE1C}"/>
+              </a:ext>
+            </a:extLst>
+          </p:cNvPr>
+          <p:cNvSpPr txBox="1"/>
+          <p:nvPr/>
+        </p:nvSpPr>
+        <p:spPr>
+          <a:xfrm>
+            <a:off x="3263511" y="6172801"/>
+            <a:ext cx="4875212" cy="307777"/>
+          </a:xfrm>
+          <a:prstGeom prst="rect">
+            <a:avLst/>
+          </a:prstGeom>
+          <a:noFill/>
+        </p:spPr>
+        <p:txBody>
+          <a:bodyPr wrap="square">
+            <a:spAutoFit/>
+          </a:bodyPr>
+          <a:lstStyle/>
+          <a:p>
+            <a:pPr algn="ctr"/>
+            <a:r>
+              <a:rPr lang="en-US" altLang="zh-CN" sz="1400" dirty="0">
+                <a:latin typeface="Arial" panose="020B0604020202020204" pitchFamily="34" charset="0"/>
+                <a:cs typeface="Arial" panose="020B0604020202020204" pitchFamily="34" charset="0"/>
+              </a:rPr>
+              <a:t>Figure 3:  CSI-driven link adaptation </a:t>
+            </a:r>
+            <a:r>
+              <a:rPr lang="en-US" altLang="zh-CN" sz="1400" dirty="0" err="1">
+                <a:latin typeface="Arial" panose="020B0604020202020204" pitchFamily="34" charset="0"/>
+                <a:cs typeface="Arial" panose="020B0604020202020204" pitchFamily="34" charset="0"/>
+              </a:rPr>
+              <a:t>behaviour</a:t>
+            </a:r>
+            <a:r>
+              <a:rPr lang="en-US" altLang="zh-CN" sz="1400" dirty="0">
+                <a:latin typeface="Arial" panose="020B0604020202020204" pitchFamily="34" charset="0"/>
+                <a:cs typeface="Arial" panose="020B0604020202020204" pitchFamily="34" charset="0"/>
+              </a:rPr>
+              <a:t> across SNR</a:t>
+            </a:r>
+            <a:endParaRPr lang="zh-CN" altLang="en-US" sz="1400" dirty="0">
+              <a:latin typeface="Arial" panose="020B0604020202020204" pitchFamily="34" charset="0"/>
+              <a:cs typeface="Arial" panose="020B0604020202020204" pitchFamily="34" charset="0"/>
+            </a:endParaRPr>
+          </a:p>
+        </p:txBody>
+      </p:sp>
+    </p:spTree>
+    <p:extLst>
+      <p:ext uri="{BB962C8B-B14F-4D97-AF65-F5344CB8AC3E}">
+        <p14:creationId xmlns:p14="http://schemas.microsoft.com/office/powerpoint/2010/main" val="3573729426"/>
+      </p:ext>
+    </p:extLst>
+  </p:cSld>
+  <p:clrMapOvr>
+    <a:masterClrMapping/>
+  </p:clrMapOvr>
+</p:sld>
+</file>
+
+<file path=ppt/slides/slide6.xml><?xml version="1.0" encoding="utf-8"?>
+<p:sld xmlns:a="http://schemas.openxmlformats.org/drawingml/2006/main" xmlns:r="http://schemas.openxmlformats.org/officeDocument/2006/relationships" xmlns:p="http://schemas.openxmlformats.org/presentationml/2006/main">
+  <p:cSld>
+    <p:spTree>
+      <p:nvGrpSpPr>
+        <p:cNvPr id="1" name="">
+          <a:extLst>
+            <a:ext uri="{FF2B5EF4-FFF2-40B4-BE49-F238E27FC236}">
+              <a16:creationId xmlns:a16="http://schemas.microsoft.com/office/drawing/2014/main" id="{BC601B16-EE68-09D0-7C57-A8CCF77BA30D}"/>
+            </a:ext>
+          </a:extLst>
+        </p:cNvPr>
+        <p:cNvGrpSpPr/>
+        <p:nvPr/>
+      </p:nvGrpSpPr>
+      <p:grpSpPr>
+        <a:xfrm>
+          <a:off x="0" y="0"/>
+          <a:ext cx="0" cy="0"/>
+          <a:chOff x="0" y="0"/>
+          <a:chExt cx="0" cy="0"/>
+        </a:xfrm>
+      </p:grpSpPr>
+      <p:sp>
+        <p:nvSpPr>
+          <p:cNvPr id="2" name="标题 1">
+            <a:extLst>
+              <a:ext uri="{FF2B5EF4-FFF2-40B4-BE49-F238E27FC236}">
+                <a16:creationId xmlns:a16="http://schemas.microsoft.com/office/drawing/2014/main" id="{71E24783-486D-2923-D66A-FA5A73D1DA15}"/>
+              </a:ext>
+            </a:extLst>
+          </p:cNvPr>
+          <p:cNvSpPr>
+            <a:spLocks noGrp="1"/>
+          </p:cNvSpPr>
+          <p:nvPr>
+            <p:ph type="title"/>
+          </p:nvPr>
+        </p:nvSpPr>
+        <p:spPr>
+          <a:xfrm>
+            <a:off x="554865" y="377422"/>
+            <a:ext cx="11082270" cy="607230"/>
+          </a:xfrm>
+        </p:spPr>
+        <p:txBody>
+          <a:bodyPr>
+            <a:normAutofit/>
+          </a:bodyPr>
+          <a:lstStyle/>
+          <a:p>
+            <a:r>
+              <a:rPr lang="en-US" altLang="zh-CN" sz="3200" dirty="0">
+                <a:latin typeface="Arial" panose="020B0604020202020204" pitchFamily="34" charset="0"/>
+                <a:cs typeface="Arial" panose="020B0604020202020204" pitchFamily="34" charset="0"/>
+              </a:rPr>
+              <a:t>CSI Reporting Periodicity</a:t>
+            </a:r>
+            <a:endParaRPr lang="zh-CN" altLang="en-US" sz="3200" dirty="0">
+              <a:latin typeface="Arial" panose="020B0604020202020204" pitchFamily="34" charset="0"/>
+              <a:cs typeface="Arial" panose="020B0604020202020204" pitchFamily="34" charset="0"/>
+            </a:endParaRPr>
+          </a:p>
+        </p:txBody>
+      </p:sp>
+      <p:sp>
+        <p:nvSpPr>
+          <p:cNvPr id="4" name="页脚占位符 3">
+            <a:extLst>
+              <a:ext uri="{FF2B5EF4-FFF2-40B4-BE49-F238E27FC236}">
+                <a16:creationId xmlns:a16="http://schemas.microsoft.com/office/drawing/2014/main" id="{AA400AA7-8656-DE97-BDE2-14A17D165EE6}"/>
+              </a:ext>
+            </a:extLst>
+          </p:cNvPr>
+          <p:cNvSpPr>
+            <a:spLocks noGrp="1"/>
+          </p:cNvSpPr>
+          <p:nvPr>
+            <p:ph type="ftr" sz="quarter" idx="11"/>
+          </p:nvPr>
+        </p:nvSpPr>
+        <p:spPr>
+          <a:xfrm>
+            <a:off x="554865" y="6356350"/>
+            <a:ext cx="11082270" cy="365125"/>
+          </a:xfrm>
+        </p:spPr>
+        <p:txBody>
+          <a:bodyPr/>
+          <a:lstStyle/>
+          <a:p>
+            <a:pPr algn="l"/>
+            <a:endParaRPr lang="zh-CN" altLang="en-US" dirty="0">
+              <a:latin typeface="Arial" panose="020B0604020202020204" pitchFamily="34" charset="0"/>
+              <a:cs typeface="Arial" panose="020B0604020202020204" pitchFamily="34" charset="0"/>
+            </a:endParaRPr>
+          </a:p>
+        </p:txBody>
+      </p:sp>
+      <p:sp>
+        <p:nvSpPr>
+          <p:cNvPr id="5" name="灯片编号占位符 4">
+            <a:extLst>
+              <a:ext uri="{FF2B5EF4-FFF2-40B4-BE49-F238E27FC236}">
+                <a16:creationId xmlns:a16="http://schemas.microsoft.com/office/drawing/2014/main" id="{BA624365-6944-5A89-9BBD-8A08E62953EE}"/>
+              </a:ext>
+            </a:extLst>
+          </p:cNvPr>
+          <p:cNvSpPr>
+            <a:spLocks noGrp="1"/>
+          </p:cNvSpPr>
+          <p:nvPr>
+            <p:ph type="sldNum" sz="quarter" idx="12"/>
+          </p:nvPr>
+        </p:nvSpPr>
+        <p:spPr>
+          <a:xfrm>
+            <a:off x="8610599" y="6356350"/>
+            <a:ext cx="3026535" cy="365125"/>
+          </a:xfrm>
+        </p:spPr>
+        <p:txBody>
+          <a:bodyPr/>
+          <a:lstStyle/>
+          <a:p>
+            <a:r>
+              <a:rPr lang="en-US" altLang="zh-CN" dirty="0">
+                <a:latin typeface="Arial" panose="020B0604020202020204" pitchFamily="34" charset="0"/>
+                <a:cs typeface="Arial" panose="020B0604020202020204" pitchFamily="34" charset="0"/>
+              </a:rPr>
+              <a:t>MIMO Techniques in 5/6G     </a:t>
+            </a:r>
+            <a:fld id="{95B778F4-F869-49EC-876F-75AABD7B5BBF}" type="slidenum">
+              <a:rPr lang="zh-CN" altLang="en-US" smtClean="0">
+                <a:latin typeface="Arial" panose="020B0604020202020204" pitchFamily="34" charset="0"/>
+                <a:cs typeface="Arial" panose="020B0604020202020204" pitchFamily="34" charset="0"/>
+              </a:rPr>
+              <a:t>6</a:t>
+            </a:fld>
+            <a:endParaRPr lang="zh-CN" altLang="en-US" dirty="0">
+              <a:latin typeface="Arial" panose="020B0604020202020204" pitchFamily="34" charset="0"/>
+              <a:cs typeface="Arial" panose="020B0604020202020204" pitchFamily="34" charset="0"/>
+            </a:endParaRPr>
+          </a:p>
+        </p:txBody>
+      </p:sp>
+      <p:pic>
+        <p:nvPicPr>
+          <p:cNvPr id="10" name="图片 9">
+            <a:extLst>
+              <a:ext uri="{FF2B5EF4-FFF2-40B4-BE49-F238E27FC236}">
+                <a16:creationId xmlns:a16="http://schemas.microsoft.com/office/drawing/2014/main" id="{6466A5D5-B6BF-FC2E-FEE6-B485F053C53D}"/>
+              </a:ext>
+            </a:extLst>
+          </p:cNvPr>
+          <p:cNvPicPr>
+            <a:picLocks noChangeAspect="1"/>
+          </p:cNvPicPr>
+          <p:nvPr/>
+        </p:nvPicPr>
+        <p:blipFill>
+          <a:blip r:embed="rId3"/>
+          <a:stretch>
+            <a:fillRect/>
+          </a:stretch>
+        </p:blipFill>
+        <p:spPr>
+          <a:xfrm>
+            <a:off x="1203563" y="1031175"/>
+            <a:ext cx="9630328" cy="5325175"/>
+          </a:xfrm>
+          <a:prstGeom prst="rect">
+            <a:avLst/>
+          </a:prstGeom>
+        </p:spPr>
+      </p:pic>
+      <p:sp>
+        <p:nvSpPr>
+          <p:cNvPr id="3" name="文本框 2">
+            <a:extLst>
+              <a:ext uri="{FF2B5EF4-FFF2-40B4-BE49-F238E27FC236}">
+                <a16:creationId xmlns:a16="http://schemas.microsoft.com/office/drawing/2014/main" id="{B89FC807-3165-C39D-8703-41CA4F24659C}"/>
+              </a:ext>
+            </a:extLst>
+          </p:cNvPr>
+          <p:cNvSpPr txBox="1"/>
+          <p:nvPr/>
+        </p:nvSpPr>
+        <p:spPr>
+          <a:xfrm>
+            <a:off x="1280836" y="6309827"/>
+            <a:ext cx="9630328" cy="307777"/>
+          </a:xfrm>
+          <a:prstGeom prst="rect">
+            <a:avLst/>
+          </a:prstGeom>
+          <a:noFill/>
+        </p:spPr>
+        <p:txBody>
+          <a:bodyPr wrap="square">
+            <a:spAutoFit/>
+          </a:bodyPr>
+          <a:lstStyle/>
+          <a:p>
+            <a:pPr algn="ctr"/>
+            <a:r>
+              <a:rPr lang="en-US" altLang="zh-CN" sz="1400" dirty="0">
+                <a:latin typeface="Arial" panose="020B0604020202020204" pitchFamily="34" charset="0"/>
+                <a:cs typeface="Arial" panose="020B0604020202020204" pitchFamily="34" charset="0"/>
+              </a:rPr>
+              <a:t>Figure 4:  Downlink throughput performance under different CSI reporting periods</a:t>
+            </a:r>
+            <a:endParaRPr lang="zh-CN" altLang="en-US" sz="1400" dirty="0">
+              <a:latin typeface="Arial" panose="020B0604020202020204" pitchFamily="34" charset="0"/>
+              <a:cs typeface="Arial" panose="020B0604020202020204" pitchFamily="34" charset="0"/>
+            </a:endParaRPr>
+          </a:p>
+        </p:txBody>
+      </p:sp>
+    </p:spTree>
+    <p:extLst>
+      <p:ext uri="{BB962C8B-B14F-4D97-AF65-F5344CB8AC3E}">
+        <p14:creationId xmlns:p14="http://schemas.microsoft.com/office/powerpoint/2010/main" val="999303387"/>
+      </p:ext>
+    </p:extLst>
+  </p:cSld>
+  <p:clrMapOvr>
+    <a:masterClrMapping/>
+  </p:clrMapOvr>
+</p:sld>
+</file>
+
+<file path=ppt/slides/slide7.xml><?xml version="1.0" encoding="utf-8"?>
+<p:sld xmlns:a="http://schemas.openxmlformats.org/drawingml/2006/main" xmlns:r="http://schemas.openxmlformats.org/officeDocument/2006/relationships" xmlns:p="http://schemas.openxmlformats.org/presentationml/2006/main">
+  <p:cSld>
+    <p:spTree>
+      <p:nvGrpSpPr>
+        <p:cNvPr id="1" name="">
+          <a:extLst>
+            <a:ext uri="{FF2B5EF4-FFF2-40B4-BE49-F238E27FC236}">
+              <a16:creationId xmlns:a16="http://schemas.microsoft.com/office/drawing/2014/main" id="{1F3A3E98-5DBF-BC03-3769-A5E97FA7029D}"/>
+            </a:ext>
+          </a:extLst>
+        </p:cNvPr>
+        <p:cNvGrpSpPr/>
+        <p:nvPr/>
+      </p:nvGrpSpPr>
+      <p:grpSpPr>
+        <a:xfrm>
+          <a:off x="0" y="0"/>
+          <a:ext cx="0" cy="0"/>
+          <a:chOff x="0" y="0"/>
+          <a:chExt cx="0" cy="0"/>
+        </a:xfrm>
+      </p:grpSpPr>
+      <p:sp>
+        <p:nvSpPr>
+          <p:cNvPr id="2" name="标题 1">
+            <a:extLst>
+              <a:ext uri="{FF2B5EF4-FFF2-40B4-BE49-F238E27FC236}">
+                <a16:creationId xmlns:a16="http://schemas.microsoft.com/office/drawing/2014/main" id="{79B63D06-D3AB-9D4C-4ABA-6AC83B9E9DA9}"/>
+              </a:ext>
+            </a:extLst>
+          </p:cNvPr>
+          <p:cNvSpPr>
+            <a:spLocks noGrp="1"/>
+          </p:cNvSpPr>
+          <p:nvPr>
+            <p:ph type="title"/>
+          </p:nvPr>
+        </p:nvSpPr>
+        <p:spPr>
+          <a:xfrm>
+            <a:off x="554865" y="377422"/>
+            <a:ext cx="11082270" cy="607230"/>
+          </a:xfrm>
+        </p:spPr>
+        <p:txBody>
+          <a:bodyPr>
+            <a:normAutofit/>
+          </a:bodyPr>
+          <a:lstStyle/>
+          <a:p>
+            <a:r>
+              <a:rPr lang="en-US" altLang="zh-CN" sz="3200" dirty="0">
+                <a:latin typeface="Arial" panose="020B0604020202020204" pitchFamily="34" charset="0"/>
+                <a:cs typeface="Arial" panose="020B0604020202020204" pitchFamily="34" charset="0"/>
+              </a:rPr>
+              <a:t>Contributions and Future Work</a:t>
+            </a:r>
+            <a:endParaRPr lang="zh-CN" altLang="en-US" sz="3200" dirty="0">
+              <a:latin typeface="Arial" panose="020B0604020202020204" pitchFamily="34" charset="0"/>
+              <a:cs typeface="Arial" panose="020B0604020202020204" pitchFamily="34" charset="0"/>
+            </a:endParaRPr>
+          </a:p>
+        </p:txBody>
+      </p:sp>
+      <p:sp>
+        <p:nvSpPr>
+          <p:cNvPr id="4" name="页脚占位符 3">
+            <a:extLst>
+              <a:ext uri="{FF2B5EF4-FFF2-40B4-BE49-F238E27FC236}">
+                <a16:creationId xmlns:a16="http://schemas.microsoft.com/office/drawing/2014/main" id="{8FBDDDE6-3314-C65A-5E07-6265FD29BD0B}"/>
+              </a:ext>
+            </a:extLst>
+          </p:cNvPr>
+          <p:cNvSpPr>
+            <a:spLocks noGrp="1"/>
+          </p:cNvSpPr>
+          <p:nvPr>
+            <p:ph type="ftr" sz="quarter" idx="11"/>
+          </p:nvPr>
+        </p:nvSpPr>
+        <p:spPr>
+          <a:xfrm>
+            <a:off x="554865" y="6356350"/>
+            <a:ext cx="11082270" cy="365125"/>
+          </a:xfrm>
+        </p:spPr>
+        <p:txBody>
+          <a:bodyPr/>
+          <a:lstStyle/>
+          <a:p>
+            <a:pPr algn="l"/>
+            <a:endParaRPr lang="zh-CN" altLang="en-US" dirty="0">
+              <a:latin typeface="Arial" panose="020B0604020202020204" pitchFamily="34" charset="0"/>
+              <a:cs typeface="Arial" panose="020B0604020202020204" pitchFamily="34" charset="0"/>
+            </a:endParaRPr>
+          </a:p>
+        </p:txBody>
+      </p:sp>
+      <p:sp>
+        <p:nvSpPr>
+          <p:cNvPr id="5" name="灯片编号占位符 4">
+            <a:extLst>
+              <a:ext uri="{FF2B5EF4-FFF2-40B4-BE49-F238E27FC236}">
+                <a16:creationId xmlns:a16="http://schemas.microsoft.com/office/drawing/2014/main" id="{1022D68E-A487-3A32-3077-685437586D06}"/>
+              </a:ext>
+            </a:extLst>
+          </p:cNvPr>
+          <p:cNvSpPr>
+            <a:spLocks noGrp="1"/>
+          </p:cNvSpPr>
+          <p:nvPr>
+            <p:ph type="sldNum" sz="quarter" idx="12"/>
+          </p:nvPr>
+        </p:nvSpPr>
+        <p:spPr>
+          <a:xfrm>
+            <a:off x="8610599" y="6356350"/>
+            <a:ext cx="3026535" cy="365125"/>
+          </a:xfrm>
+        </p:spPr>
+        <p:txBody>
+          <a:bodyPr/>
+          <a:lstStyle/>
+          <a:p>
+            <a:r>
+              <a:rPr lang="en-US" altLang="zh-CN" dirty="0">
+                <a:latin typeface="Arial" panose="020B0604020202020204" pitchFamily="34" charset="0"/>
+                <a:cs typeface="Arial" panose="020B0604020202020204" pitchFamily="34" charset="0"/>
+              </a:rPr>
+              <a:t>MIMO Techniques in 5/6G     </a:t>
+            </a:r>
+            <a:fld id="{95B778F4-F869-49EC-876F-75AABD7B5BBF}" type="slidenum">
+              <a:rPr lang="zh-CN" altLang="en-US" smtClean="0">
+                <a:latin typeface="Arial" panose="020B0604020202020204" pitchFamily="34" charset="0"/>
+                <a:cs typeface="Arial" panose="020B0604020202020204" pitchFamily="34" charset="0"/>
+              </a:rPr>
+              <a:t>7</a:t>
+            </a:fld>
+            <a:endParaRPr lang="zh-CN" altLang="en-US" dirty="0">
+              <a:latin typeface="Arial" panose="020B0604020202020204" pitchFamily="34" charset="0"/>
+              <a:cs typeface="Arial" panose="020B0604020202020204" pitchFamily="34" charset="0"/>
+            </a:endParaRPr>
+          </a:p>
+        </p:txBody>
+      </p:sp>
+      <p:sp>
+        <p:nvSpPr>
+          <p:cNvPr id="6" name="文本框 5">
+            <a:extLst>
+              <a:ext uri="{FF2B5EF4-FFF2-40B4-BE49-F238E27FC236}">
+                <a16:creationId xmlns:a16="http://schemas.microsoft.com/office/drawing/2014/main" id="{5A95C3D1-7200-AC8D-C0A1-54A5E2ADDD31}"/>
+              </a:ext>
+            </a:extLst>
+          </p:cNvPr>
+          <p:cNvSpPr txBox="1"/>
+          <p:nvPr/>
+        </p:nvSpPr>
+        <p:spPr>
+          <a:xfrm>
+            <a:off x="554865" y="1324860"/>
+            <a:ext cx="11023242" cy="1703030"/>
+          </a:xfrm>
+          <a:prstGeom prst="rect">
+            <a:avLst/>
+          </a:prstGeom>
+          <a:noFill/>
+        </p:spPr>
+        <p:txBody>
+          <a:bodyPr wrap="square">
+            <a:spAutoFit/>
+          </a:bodyPr>
+          <a:lstStyle/>
+          <a:p>
+            <a:pPr>
+              <a:lnSpc>
+                <a:spcPct val="150000"/>
+              </a:lnSpc>
+            </a:pPr>
+            <a:r>
+              <a:rPr lang="en-US" altLang="zh-CN" b="1" dirty="0">
+                <a:latin typeface="Arial" panose="020B0604020202020204" pitchFamily="34" charset="0"/>
+                <a:cs typeface="Arial" panose="020B0604020202020204" pitchFamily="34" charset="0"/>
+              </a:rPr>
+              <a:t>Contribution: </a:t>
+            </a:r>
+          </a:p>
+          <a:p>
+            <a:pPr marL="285750" indent="-285750">
+              <a:lnSpc>
+                <a:spcPct val="150000"/>
+              </a:lnSpc>
+              <a:buFont typeface="Arial" panose="020B0604020202020204" pitchFamily="34" charset="0"/>
+              <a:buChar char="•"/>
+            </a:pPr>
+            <a:r>
+              <a:rPr lang="en-US" altLang="zh-CN" sz="1800" dirty="0">
+                <a:latin typeface="Arial" panose="020B0604020202020204" pitchFamily="34" charset="0"/>
+                <a:cs typeface="Arial" panose="020B0604020202020204" pitchFamily="34" charset="0"/>
+              </a:rPr>
+              <a:t>Built a 3GPP-aligned </a:t>
+            </a:r>
+            <a:r>
+              <a:rPr lang="en-US" altLang="zh-CN" sz="1800" dirty="0">
+                <a:solidFill>
+                  <a:srgbClr val="0070C0"/>
+                </a:solidFill>
+                <a:latin typeface="Arial" panose="020B0604020202020204" pitchFamily="34" charset="0"/>
+                <a:cs typeface="Arial" panose="020B0604020202020204" pitchFamily="34" charset="0"/>
+              </a:rPr>
+              <a:t>simulation framework </a:t>
+            </a:r>
+            <a:r>
+              <a:rPr lang="en-US" altLang="zh-CN" sz="1800" dirty="0">
+                <a:latin typeface="Arial" panose="020B0604020202020204" pitchFamily="34" charset="0"/>
+                <a:cs typeface="Arial" panose="020B0604020202020204" pitchFamily="34" charset="0"/>
+              </a:rPr>
+              <a:t>for CSI-driven downlink MIMO</a:t>
+            </a:r>
+          </a:p>
+          <a:p>
+            <a:pPr marL="285750" indent="-285750">
+              <a:lnSpc>
+                <a:spcPct val="150000"/>
+              </a:lnSpc>
+              <a:buFont typeface="Arial" panose="020B0604020202020204" pitchFamily="34" charset="0"/>
+              <a:buChar char="•"/>
+            </a:pPr>
+            <a:r>
+              <a:rPr lang="en-US" altLang="zh-CN" sz="1800" dirty="0">
+                <a:latin typeface="Arial" panose="020B0604020202020204" pitchFamily="34" charset="0"/>
+                <a:cs typeface="Arial" panose="020B0604020202020204" pitchFamily="34" charset="0"/>
+              </a:rPr>
+              <a:t>Quantified </a:t>
+            </a:r>
+            <a:r>
+              <a:rPr lang="en-US" altLang="zh-CN" sz="1800" dirty="0">
+                <a:solidFill>
+                  <a:srgbClr val="0070C0"/>
+                </a:solidFill>
+                <a:latin typeface="Arial" panose="020B0604020202020204" pitchFamily="34" charset="0"/>
+                <a:cs typeface="Arial" panose="020B0604020202020204" pitchFamily="34" charset="0"/>
+              </a:rPr>
+              <a:t>throughput trends </a:t>
+            </a:r>
+            <a:r>
+              <a:rPr lang="en-US" altLang="zh-CN" sz="1800" dirty="0">
+                <a:latin typeface="Arial" panose="020B0604020202020204" pitchFamily="34" charset="0"/>
+                <a:cs typeface="Arial" panose="020B0604020202020204" pitchFamily="34" charset="0"/>
+              </a:rPr>
+              <a:t>under MIMO configuration, mobility, and CSI reporting-period changes</a:t>
+            </a:r>
+          </a:p>
+          <a:p>
+            <a:pPr marL="285750" indent="-285750">
+              <a:lnSpc>
+                <a:spcPct val="150000"/>
+              </a:lnSpc>
+              <a:buFont typeface="Arial" panose="020B0604020202020204" pitchFamily="34" charset="0"/>
+              <a:buChar char="•"/>
+            </a:pPr>
+            <a:r>
+              <a:rPr lang="en-US" altLang="zh-CN" sz="1800" dirty="0">
+                <a:latin typeface="Arial" panose="020B0604020202020204" pitchFamily="34" charset="0"/>
+                <a:cs typeface="Arial" panose="020B0604020202020204" pitchFamily="34" charset="0"/>
+              </a:rPr>
+              <a:t>Identified the </a:t>
+            </a:r>
+            <a:r>
+              <a:rPr lang="en-US" altLang="zh-CN" sz="1800" dirty="0">
+                <a:solidFill>
+                  <a:srgbClr val="0070C0"/>
+                </a:solidFill>
+                <a:latin typeface="Arial" panose="020B0604020202020204" pitchFamily="34" charset="0"/>
+                <a:cs typeface="Arial" panose="020B0604020202020204" pitchFamily="34" charset="0"/>
+              </a:rPr>
+              <a:t>scenario-dependent benefits </a:t>
+            </a:r>
+            <a:r>
+              <a:rPr lang="en-US" altLang="zh-CN" sz="1800" dirty="0">
+                <a:latin typeface="Arial" panose="020B0604020202020204" pitchFamily="34" charset="0"/>
+                <a:cs typeface="Arial" panose="020B0604020202020204" pitchFamily="34" charset="0"/>
+              </a:rPr>
+              <a:t>of CSI reporting and discussed the trade-off</a:t>
+            </a:r>
+            <a:endParaRPr lang="en-US" altLang="zh-CN" sz="1800" dirty="0">
+              <a:solidFill>
+                <a:srgbClr val="0070C0"/>
+              </a:solidFill>
+              <a:latin typeface="Arial" panose="020B0604020202020204" pitchFamily="34" charset="0"/>
+              <a:cs typeface="Arial" panose="020B0604020202020204" pitchFamily="34" charset="0"/>
+            </a:endParaRPr>
+          </a:p>
+        </p:txBody>
+      </p:sp>
+      <p:sp>
+        <p:nvSpPr>
+          <p:cNvPr id="7" name="文本框 6">
+            <a:extLst>
+              <a:ext uri="{FF2B5EF4-FFF2-40B4-BE49-F238E27FC236}">
+                <a16:creationId xmlns:a16="http://schemas.microsoft.com/office/drawing/2014/main" id="{4D9A6B43-C5FA-6CD7-2929-388AC07827EA}"/>
+              </a:ext>
+            </a:extLst>
+          </p:cNvPr>
+          <p:cNvSpPr txBox="1"/>
+          <p:nvPr/>
+        </p:nvSpPr>
+        <p:spPr>
+          <a:xfrm>
+            <a:off x="613892" y="3492803"/>
+            <a:ext cx="11023242" cy="1703030"/>
+          </a:xfrm>
+          <a:prstGeom prst="rect">
+            <a:avLst/>
+          </a:prstGeom>
+          <a:noFill/>
+        </p:spPr>
+        <p:txBody>
+          <a:bodyPr wrap="square">
+            <a:spAutoFit/>
+          </a:bodyPr>
+          <a:lstStyle/>
+          <a:p>
+            <a:pPr>
+              <a:lnSpc>
+                <a:spcPct val="150000"/>
+              </a:lnSpc>
+            </a:pPr>
+            <a:r>
+              <a:rPr lang="en-US" altLang="zh-CN" b="1" dirty="0">
+                <a:latin typeface="Arial" panose="020B0604020202020204" pitchFamily="34" charset="0"/>
+                <a:cs typeface="Arial" panose="020B0604020202020204" pitchFamily="34" charset="0"/>
+              </a:rPr>
+              <a:t>Future work: </a:t>
+            </a:r>
+          </a:p>
+          <a:p>
+            <a:pPr marL="285750" indent="-285750">
+              <a:lnSpc>
+                <a:spcPct val="150000"/>
+              </a:lnSpc>
+              <a:buFont typeface="Arial" panose="020B0604020202020204" pitchFamily="34" charset="0"/>
+              <a:buChar char="•"/>
+            </a:pPr>
+            <a:r>
+              <a:rPr lang="en-US" altLang="zh-CN" sz="1800" dirty="0">
+                <a:latin typeface="Arial" panose="020B0604020202020204" pitchFamily="34" charset="0"/>
+                <a:cs typeface="Arial" panose="020B0604020202020204" pitchFamily="34" charset="0"/>
+              </a:rPr>
+              <a:t>Develop </a:t>
+            </a:r>
+            <a:r>
+              <a:rPr lang="en-US" altLang="zh-CN" sz="1800" dirty="0">
+                <a:solidFill>
+                  <a:srgbClr val="0070C0"/>
+                </a:solidFill>
+                <a:latin typeface="Arial" panose="020B0604020202020204" pitchFamily="34" charset="0"/>
+                <a:cs typeface="Arial" panose="020B0604020202020204" pitchFamily="34" charset="0"/>
+              </a:rPr>
+              <a:t>adaptive CSI reporting-period selection algorithms</a:t>
+            </a:r>
+          </a:p>
+          <a:p>
+            <a:pPr marL="285750" indent="-285750">
+              <a:lnSpc>
+                <a:spcPct val="150000"/>
+              </a:lnSpc>
+              <a:buFont typeface="Arial" panose="020B0604020202020204" pitchFamily="34" charset="0"/>
+              <a:buChar char="•"/>
+            </a:pPr>
+            <a:r>
+              <a:rPr lang="en-US" altLang="zh-CN" sz="1800" dirty="0">
+                <a:latin typeface="Arial" panose="020B0604020202020204" pitchFamily="34" charset="0"/>
+                <a:cs typeface="Arial" panose="020B0604020202020204" pitchFamily="34" charset="0"/>
+              </a:rPr>
+              <a:t>Explore </a:t>
+            </a:r>
+            <a:r>
+              <a:rPr lang="en-US" altLang="zh-CN" sz="1800" dirty="0">
+                <a:solidFill>
+                  <a:srgbClr val="0070C0"/>
+                </a:solidFill>
+                <a:latin typeface="Arial" panose="020B0604020202020204" pitchFamily="34" charset="0"/>
+                <a:cs typeface="Arial" panose="020B0604020202020204" pitchFamily="34" charset="0"/>
+              </a:rPr>
+              <a:t>AI-native</a:t>
+            </a:r>
+            <a:r>
+              <a:rPr lang="en-US" altLang="zh-CN" sz="1800" dirty="0">
+                <a:latin typeface="Arial" panose="020B0604020202020204" pitchFamily="34" charset="0"/>
+                <a:cs typeface="Arial" panose="020B0604020202020204" pitchFamily="34" charset="0"/>
+              </a:rPr>
+              <a:t> CSI management for future 6G systems</a:t>
+            </a:r>
+          </a:p>
+          <a:p>
+            <a:pPr marL="285750" indent="-285750">
+              <a:lnSpc>
+                <a:spcPct val="150000"/>
+              </a:lnSpc>
+              <a:buFont typeface="Arial" panose="020B0604020202020204" pitchFamily="34" charset="0"/>
+              <a:buChar char="•"/>
+            </a:pPr>
+            <a:r>
+              <a:rPr lang="en-US" altLang="zh-CN" dirty="0">
+                <a:latin typeface="Arial" panose="020B0604020202020204" pitchFamily="34" charset="0"/>
+                <a:cs typeface="Arial" panose="020B0604020202020204" pitchFamily="34" charset="0"/>
+              </a:rPr>
+              <a:t>Extend the simulation with HARQ and more realistic system assumptions</a:t>
+            </a:r>
+          </a:p>
+        </p:txBody>
+      </p:sp>
+    </p:spTree>
+    <p:extLst>
+      <p:ext uri="{BB962C8B-B14F-4D97-AF65-F5344CB8AC3E}">
+        <p14:creationId xmlns:p14="http://schemas.microsoft.com/office/powerpoint/2010/main" val="2125488668"/>
+      </p:ext>
+    </p:extLst>
+  </p:cSld>
+  <p:clrMapOvr>
+    <a:masterClrMapping/>
+  </p:clrMapOvr>
+</p:sld>
+</file>
+
+<file path=ppt/slides/slide8.xml><?xml version="1.0" encoding="utf-8"?>
+<p:sld xmlns:a="http://schemas.openxmlformats.org/drawingml/2006/main" xmlns:r="http://schemas.openxmlformats.org/officeDocument/2006/relationships" xmlns:p="http://schemas.openxmlformats.org/presentationml/2006/main">
+  <p:cSld>
+    <p:spTree>
+      <p:nvGrpSpPr>
+        <p:cNvPr id="1" name=""/>
+        <p:cNvGrpSpPr/>
+        <p:nvPr/>
+      </p:nvGrpSpPr>
+      <p:grpSpPr>
+        <a:xfrm>
+          <a:off x="0" y="0"/>
+          <a:ext cx="0" cy="0"/>
+          <a:chOff x="0" y="0"/>
+          <a:chExt cx="0" cy="0"/>
+        </a:xfrm>
+      </p:grpSpPr>
+      <p:sp>
+        <p:nvSpPr>
+          <p:cNvPr id="2" name="标题 1">
+            <a:extLst>
+              <a:ext uri="{FF2B5EF4-FFF2-40B4-BE49-F238E27FC236}">
+                <a16:creationId xmlns:a16="http://schemas.microsoft.com/office/drawing/2014/main" id="{13DE347D-7F75-0C12-E846-E02AC66AE91D}"/>
+              </a:ext>
+            </a:extLst>
+          </p:cNvPr>
+          <p:cNvSpPr>
+            <a:spLocks noGrp="1"/>
+          </p:cNvSpPr>
+          <p:nvPr>
+            <p:ph type="title"/>
+          </p:nvPr>
+        </p:nvSpPr>
+        <p:spPr>
+          <a:xfrm>
+            <a:off x="4579907" y="2766218"/>
+            <a:ext cx="3032185" cy="1325563"/>
+          </a:xfrm>
+        </p:spPr>
+        <p:txBody>
+          <a:bodyPr/>
+          <a:lstStyle/>
+          <a:p>
+            <a:r>
+              <a:rPr lang="en-US" altLang="zh-CN" dirty="0">
+                <a:latin typeface="Arial" panose="020B0604020202020204" pitchFamily="34" charset="0"/>
+                <a:cs typeface="Arial" panose="020B0604020202020204" pitchFamily="34" charset="0"/>
+              </a:rPr>
+              <a:t>Thank You!</a:t>
+            </a:r>
+            <a:endParaRPr lang="zh-CN" altLang="en-US" dirty="0">
+              <a:latin typeface="Arial" panose="020B0604020202020204" pitchFamily="34" charset="0"/>
+              <a:cs typeface="Arial" panose="020B0604020202020204" pitchFamily="34" charset="0"/>
+            </a:endParaRPr>
+          </a:p>
+        </p:txBody>
+      </p:sp>
+    </p:spTree>
+    <p:extLst>
+      <p:ext uri="{BB962C8B-B14F-4D97-AF65-F5344CB8AC3E}">
+        <p14:creationId xmlns:p14="http://schemas.microsoft.com/office/powerpoint/2010/main" val="1251739903"/>
+      </p:ext>
+    </p:extLst>
+  </p:cSld>
+  <p:clrMapOvr>
+    <a:masterClrMapping/>
+  </p:clrMapOvr>
+</p:sld>
+</file>
+
+<file path=ppt/slides/slide9.xml><?xml version="1.0" encoding="utf-8"?>
+<p:sld xmlns:a="http://schemas.openxmlformats.org/drawingml/2006/main" xmlns:r="http://schemas.openxmlformats.org/officeDocument/2006/relationships" xmlns:p="http://schemas.openxmlformats.org/presentationml/2006/main">
+  <p:cSld>
+    <p:spTree>
+      <p:nvGrpSpPr>
+        <p:cNvPr id="1" name="">
+          <a:extLst>
+            <a:ext uri="{FF2B5EF4-FFF2-40B4-BE49-F238E27FC236}">
+              <a16:creationId xmlns:a16="http://schemas.microsoft.com/office/drawing/2014/main" id="{56A51AF2-4EE8-A000-1B02-66D7E8C6A984}"/>
+            </a:ext>
+          </a:extLst>
+        </p:cNvPr>
+        <p:cNvGrpSpPr/>
+        <p:nvPr/>
+      </p:nvGrpSpPr>
+      <p:grpSpPr>
+        <a:xfrm>
+          <a:off x="0" y="0"/>
+          <a:ext cx="0" cy="0"/>
+          <a:chOff x="0" y="0"/>
+          <a:chExt cx="0" cy="0"/>
+        </a:xfrm>
+      </p:grpSpPr>
+      <p:sp>
+        <p:nvSpPr>
+          <p:cNvPr id="2" name="标题 1">
+            <a:extLst>
+              <a:ext uri="{FF2B5EF4-FFF2-40B4-BE49-F238E27FC236}">
+                <a16:creationId xmlns:a16="http://schemas.microsoft.com/office/drawing/2014/main" id="{CC25EDD8-96B8-62E1-2010-3070C5A8A278}"/>
+              </a:ext>
+            </a:extLst>
+          </p:cNvPr>
+          <p:cNvSpPr>
+            <a:spLocks noGrp="1"/>
+          </p:cNvSpPr>
+          <p:nvPr>
+            <p:ph type="title"/>
+          </p:nvPr>
+        </p:nvSpPr>
+        <p:spPr>
+          <a:xfrm>
+            <a:off x="554865" y="377422"/>
+            <a:ext cx="11082270" cy="607230"/>
+          </a:xfrm>
+        </p:spPr>
+        <p:txBody>
+          <a:bodyPr>
+            <a:normAutofit/>
+          </a:bodyPr>
+          <a:lstStyle/>
+          <a:p>
+            <a:r>
+              <a:rPr lang="en-US" altLang="zh-CN" sz="3200" dirty="0">
+                <a:latin typeface="Arial" panose="020B0604020202020204" pitchFamily="34" charset="0"/>
+                <a:cs typeface="Arial" panose="020B0604020202020204" pitchFamily="34" charset="0"/>
+              </a:rPr>
+              <a:t>Appendix</a:t>
+            </a:r>
+            <a:endParaRPr lang="zh-CN" altLang="en-US" sz="3200" dirty="0">
+              <a:latin typeface="Arial" panose="020B0604020202020204" pitchFamily="34" charset="0"/>
+              <a:cs typeface="Arial" panose="020B0604020202020204" pitchFamily="34" charset="0"/>
+            </a:endParaRPr>
+          </a:p>
+        </p:txBody>
+      </p:sp>
+      <p:sp>
+        <p:nvSpPr>
+          <p:cNvPr id="4" name="页脚占位符 3">
+            <a:extLst>
+              <a:ext uri="{FF2B5EF4-FFF2-40B4-BE49-F238E27FC236}">
+                <a16:creationId xmlns:a16="http://schemas.microsoft.com/office/drawing/2014/main" id="{CA80131D-5906-3879-F332-C3AA171CECC5}"/>
+              </a:ext>
+            </a:extLst>
+          </p:cNvPr>
+          <p:cNvSpPr>
+            <a:spLocks noGrp="1"/>
+          </p:cNvSpPr>
+          <p:nvPr>
+            <p:ph type="ftr" sz="quarter" idx="11"/>
+          </p:nvPr>
+        </p:nvSpPr>
+        <p:spPr>
+          <a:xfrm>
+            <a:off x="554865" y="6356350"/>
+            <a:ext cx="11082270" cy="365125"/>
+          </a:xfrm>
+        </p:spPr>
+        <p:txBody>
+          <a:bodyPr/>
+          <a:lstStyle/>
+          <a:p>
+            <a:pPr algn="l"/>
+            <a:endParaRPr lang="zh-CN" altLang="en-US" dirty="0">
+              <a:latin typeface="Arial" panose="020B0604020202020204" pitchFamily="34" charset="0"/>
+              <a:cs typeface="Arial" panose="020B0604020202020204" pitchFamily="34" charset="0"/>
+            </a:endParaRPr>
+          </a:p>
+        </p:txBody>
+      </p:sp>
+      <p:sp>
+        <p:nvSpPr>
+          <p:cNvPr id="5" name="灯片编号占位符 4">
+            <a:extLst>
+              <a:ext uri="{FF2B5EF4-FFF2-40B4-BE49-F238E27FC236}">
+                <a16:creationId xmlns:a16="http://schemas.microsoft.com/office/drawing/2014/main" id="{5D348BC3-AFEB-86DF-647B-38858509F10A}"/>
+              </a:ext>
+            </a:extLst>
+          </p:cNvPr>
+          <p:cNvSpPr>
+            <a:spLocks noGrp="1"/>
+          </p:cNvSpPr>
+          <p:nvPr>
+            <p:ph type="sldNum" sz="quarter" idx="12"/>
+          </p:nvPr>
+        </p:nvSpPr>
+        <p:spPr>
+          <a:xfrm>
+            <a:off x="8610599" y="6356350"/>
+            <a:ext cx="3026535" cy="365125"/>
+          </a:xfrm>
+        </p:spPr>
+        <p:txBody>
+          <a:bodyPr/>
+          <a:lstStyle/>
+          <a:p>
+            <a:r>
+              <a:rPr lang="en-US" altLang="zh-CN" dirty="0">
+                <a:latin typeface="Arial" panose="020B0604020202020204" pitchFamily="34" charset="0"/>
+                <a:cs typeface="Arial" panose="020B0604020202020204" pitchFamily="34" charset="0"/>
+              </a:rPr>
+              <a:t>MIMO Techniques in 5/6G     </a:t>
+            </a:r>
+            <a:fld id="{95B778F4-F869-49EC-876F-75AABD7B5BBF}" type="slidenum">
+              <a:rPr lang="zh-CN" altLang="en-US" smtClean="0">
+                <a:latin typeface="Arial" panose="020B0604020202020204" pitchFamily="34" charset="0"/>
+                <a:cs typeface="Arial" panose="020B0604020202020204" pitchFamily="34" charset="0"/>
+              </a:rPr>
+              <a:t>9</a:t>
+            </a:fld>
+            <a:endParaRPr lang="zh-CN" altLang="en-US" dirty="0">
+              <a:latin typeface="Arial" panose="020B0604020202020204" pitchFamily="34" charset="0"/>
+              <a:cs typeface="Arial" panose="020B0604020202020204" pitchFamily="34" charset="0"/>
+            </a:endParaRPr>
+          </a:p>
+        </p:txBody>
+      </p:sp>
+      <p:pic>
+        <p:nvPicPr>
+          <p:cNvPr id="3" name="图片 2">
+            <a:extLst>
+              <a:ext uri="{FF2B5EF4-FFF2-40B4-BE49-F238E27FC236}">
+                <a16:creationId xmlns:a16="http://schemas.microsoft.com/office/drawing/2014/main" id="{50DDF7BD-3112-6170-A059-F87171B760E2}"/>
+              </a:ext>
+            </a:extLst>
+          </p:cNvPr>
+          <p:cNvPicPr>
+            <a:picLocks noChangeAspect="1"/>
+          </p:cNvPicPr>
+          <p:nvPr/>
+        </p:nvPicPr>
+        <p:blipFill>
+          <a:blip r:embed="rId3"/>
+          <a:stretch>
+            <a:fillRect/>
+          </a:stretch>
+        </p:blipFill>
+        <p:spPr>
+          <a:xfrm>
+            <a:off x="1418701" y="1404875"/>
+            <a:ext cx="8624831" cy="4691126"/>
+          </a:xfrm>
+          <a:prstGeom prst="rect">
+            <a:avLst/>
+          </a:prstGeom>
+        </p:spPr>
+      </p:pic>
+    </p:spTree>
+    <p:extLst>
+      <p:ext uri="{BB962C8B-B14F-4D97-AF65-F5344CB8AC3E}">
+        <p14:creationId xmlns:p14="http://schemas.microsoft.com/office/powerpoint/2010/main" val="1158804414"/>
       </p:ext>
     </p:extLst>
   </p:cSld>
